--- a/docs/test/golden-outputs/p5-yangpyeong-r2/captures/yangpyeong_basic.pptx
+++ b/docs/test/golden-outputs/p5-yangpyeong-r2/captures/yangpyeong_basic.pptx
@@ -2199,7 +2199,7 @@
                 <a:ea typeface="맑은 고딕" pitchFamily="34" charset="-122"/>
                 <a:cs typeface="맑은 고딕" pitchFamily="34" charset="-120"/>
               </a:rPr>
-              <a:t>2026.09.22  |  정현우 수석팀장  |  제이에스부동산중개법인</a:t>
+              <a:t>2026.09.23  |  정현우 수석팀장  |  제이에스부동산중개법인</a:t>
             </a:r>
             <a:endParaRPr lang="en-US" sz="900" dirty="0"/>
           </a:p>
@@ -9396,8 +9396,7 @@
                 <a:gridCol w="749808"/>
                 <a:gridCol w="658368"/>
                 <a:gridCol w="658368"/>
-                <a:gridCol w="658368"/>
-                <a:gridCol w="502920"/>
+                <a:gridCol w="1161288"/>
               </a:tblGrid>
               <a:tr h="320040">
                 <a:tc>
@@ -9781,67 +9780,6 @@
                           </a:solidFill>
                         </a:rPr>
                         <a:t>월세(만원)</a:t>
-                      </a:r>
-                      <a:endParaRPr lang="en-US" sz="1000" dirty="0"/>
-                    </a:p>
-                  </a:txBody>
-                  <a:tcPr marL="91440" marR="91440" marT="45720" marB="45720" anchor="ctr">
-                    <a:lnL w="12700" cap="flat" cmpd="sng" algn="ctr">
-                      <a:solidFill>
-                        <a:srgbClr val="CBD5E0"/>
-                      </a:solidFill>
-                      <a:prstDash val="solid"/>
-                      <a:round/>
-                      <a:headEnd type="none" w="med" len="med"/>
-                      <a:tailEnd type="none" w="med" len="med"/>
-                    </a:lnL>
-                    <a:lnR w="12700" cap="flat" cmpd="sng" algn="ctr">
-                      <a:solidFill>
-                        <a:srgbClr val="CBD5E0"/>
-                      </a:solidFill>
-                      <a:prstDash val="solid"/>
-                      <a:round/>
-                      <a:headEnd type="none" w="med" len="med"/>
-                      <a:tailEnd type="none" w="med" len="med"/>
-                    </a:lnR>
-                    <a:lnT w="12700" cap="flat" cmpd="sng" algn="ctr">
-                      <a:solidFill>
-                        <a:srgbClr val="CBD5E0"/>
-                      </a:solidFill>
-                      <a:prstDash val="solid"/>
-                      <a:round/>
-                      <a:headEnd type="none" w="med" len="med"/>
-                      <a:tailEnd type="none" w="med" len="med"/>
-                    </a:lnT>
-                    <a:lnB w="12700" cap="flat" cmpd="sng" algn="ctr">
-                      <a:solidFill>
-                        <a:srgbClr val="CBD5E0"/>
-                      </a:solidFill>
-                      <a:prstDash val="solid"/>
-                      <a:round/>
-                      <a:headEnd type="none" w="med" len="med"/>
-                      <a:tailEnd type="none" w="med" len="med"/>
-                    </a:lnB>
-                    <a:solidFill>
-                      <a:srgbClr val="132A3A"/>
-                    </a:solidFill>
-                  </a:tcPr>
-                </a:tc>
-                <a:tc>
-                  <a:txBody>
-                    <a:bodyPr/>
-                    <a:lstStyle/>
-                    <a:p>
-                      <a:pPr algn="ctr" indent="0" marL="0">
-                        <a:buNone/>
-                      </a:pPr>
-                      <a:r>
-                        <a:rPr lang="en-US" sz="1000" b="1" dirty="0">
-                          <a:solidFill>
-                            <a:srgbClr val="FFFFFF"/>
-                          </a:solidFill>
-                        </a:rPr>
-                        <a:t>관리비(만원)</a:t>
                       </a:r>
                       <a:endParaRPr lang="en-US" sz="1000" dirty="0"/>
                     </a:p>
@@ -10573,7 +10511,7 @@
                           <a:ea typeface="맑은 고딕" pitchFamily="34" charset="-122"/>
                           <a:cs typeface="맑은 고딕" pitchFamily="34" charset="-120"/>
                         </a:rPr>
-                        <a:t>-</a:t>
+                        <a:t>공실</a:t>
                       </a:r>
                       <a:endParaRPr lang="en-US" sz="850" dirty="0">
                         <a:latin typeface="맑은 고딕" charset="0"/>
@@ -10632,17 +10570,6 @@
                       <a:pPr algn="ctr" indent="0" marL="0">
                         <a:buNone/>
                       </a:pPr>
-                      <a:r>
-                        <a:rPr lang="en-US" sz="850" b="1" dirty="0">
-                          <a:solidFill>
-                            <a:srgbClr val="B05A2E"/>
-                          </a:solidFill>
-                          <a:latin typeface="맑은 고딕" pitchFamily="34" charset="0"/>
-                          <a:ea typeface="맑은 고딕" pitchFamily="34" charset="-122"/>
-                          <a:cs typeface="맑은 고딕" pitchFamily="34" charset="-120"/>
-                        </a:rPr>
-                        <a:t>공실</a:t>
-                      </a:r>
                       <a:endParaRPr lang="en-US" sz="850" dirty="0">
                         <a:latin typeface="맑은 고딕" charset="0"/>
                         <a:ea typeface="맑은 고딕" charset="0"/>
@@ -11187,7 +11114,7 @@
                           <a:ea typeface="맑은 고딕" pitchFamily="34" charset="-122"/>
                           <a:cs typeface="맑은 고딕" pitchFamily="34" charset="-120"/>
                         </a:rPr>
-                        <a:t>57</a:t>
+                        <a:t>2026-11-30</a:t>
                       </a:r>
                       <a:endParaRPr lang="en-US" sz="850" dirty="0">
                         <a:latin typeface="맑은 고딕" charset="0"/>
@@ -11246,17 +11173,6 @@
                       <a:pPr algn="ctr" indent="0" marL="0">
                         <a:buNone/>
                       </a:pPr>
-                      <a:r>
-                        <a:rPr lang="en-US" sz="850" dirty="0">
-                          <a:solidFill>
-                            <a:srgbClr val="2B2B2B"/>
-                          </a:solidFill>
-                          <a:latin typeface="맑은 고딕" pitchFamily="34" charset="0"/>
-                          <a:ea typeface="맑은 고딕" pitchFamily="34" charset="-122"/>
-                          <a:cs typeface="맑은 고딕" pitchFamily="34" charset="-120"/>
-                        </a:rPr>
-                        <a:t>2026-11-30</a:t>
-                      </a:r>
                       <a:endParaRPr lang="en-US" sz="850" dirty="0">
                         <a:latin typeface="맑은 고딕" charset="0"/>
                         <a:ea typeface="맑은 고딕" charset="0"/>
@@ -11858,7 +11774,7 @@
                           <a:ea typeface="맑은 고딕" pitchFamily="34" charset="-122"/>
                           <a:cs typeface="맑은 고딕" pitchFamily="34" charset="-120"/>
                         </a:rPr>
-                        <a:t>66</a:t>
+                        <a:t>2027-03-31</a:t>
                       </a:r>
                       <a:endParaRPr lang="en-US" sz="850" dirty="0">
                         <a:latin typeface="맑은 고딕" charset="0"/>
@@ -11917,17 +11833,6 @@
                       <a:pPr algn="ctr" indent="0" marL="0">
                         <a:buNone/>
                       </a:pPr>
-                      <a:r>
-                        <a:rPr lang="en-US" sz="850" dirty="0">
-                          <a:solidFill>
-                            <a:srgbClr val="2B2B2B"/>
-                          </a:solidFill>
-                          <a:latin typeface="맑은 고딕" pitchFamily="34" charset="0"/>
-                          <a:ea typeface="맑은 고딕" pitchFamily="34" charset="-122"/>
-                          <a:cs typeface="맑은 고딕" pitchFamily="34" charset="-120"/>
-                        </a:rPr>
-                        <a:t>2027-03-31</a:t>
-                      </a:r>
                       <a:endParaRPr lang="en-US" sz="850" dirty="0">
                         <a:latin typeface="맑은 고딕" charset="0"/>
                         <a:ea typeface="맑은 고딕" charset="0"/>
@@ -12529,7 +12434,7 @@
                           <a:ea typeface="맑은 고딕" pitchFamily="34" charset="-122"/>
                           <a:cs typeface="맑은 고딕" pitchFamily="34" charset="-120"/>
                         </a:rPr>
-                        <a:t>66</a:t>
+                        <a:t>2027-12-31</a:t>
                       </a:r>
                       <a:endParaRPr lang="en-US" sz="850" dirty="0">
                         <a:latin typeface="맑은 고딕" charset="0"/>
@@ -12588,17 +12493,6 @@
                       <a:pPr algn="ctr" indent="0" marL="0">
                         <a:buNone/>
                       </a:pPr>
-                      <a:r>
-                        <a:rPr lang="en-US" sz="850" dirty="0">
-                          <a:solidFill>
-                            <a:srgbClr val="2B2B2B"/>
-                          </a:solidFill>
-                          <a:latin typeface="맑은 고딕" pitchFamily="34" charset="0"/>
-                          <a:ea typeface="맑은 고딕" pitchFamily="34" charset="-122"/>
-                          <a:cs typeface="맑은 고딕" pitchFamily="34" charset="-120"/>
-                        </a:rPr>
-                        <a:t>2027-12-31</a:t>
-                      </a:r>
                       <a:endParaRPr lang="en-US" sz="850" dirty="0">
                         <a:latin typeface="맑은 고딕" charset="0"/>
                         <a:ea typeface="맑은 고딕" charset="0"/>
@@ -13200,7 +13094,7 @@
                           <a:ea typeface="맑은 고딕" pitchFamily="34" charset="-122"/>
                           <a:cs typeface="맑은 고딕" pitchFamily="34" charset="-120"/>
                         </a:rPr>
-                        <a:t>66</a:t>
+                        <a:t>2026-05-31</a:t>
                       </a:r>
                       <a:endParaRPr lang="en-US" sz="850" dirty="0">
                         <a:latin typeface="맑은 고딕" charset="0"/>
@@ -13259,17 +13153,6 @@
                       <a:pPr algn="ctr" indent="0" marL="0">
                         <a:buNone/>
                       </a:pPr>
-                      <a:r>
-                        <a:rPr lang="en-US" sz="850" dirty="0">
-                          <a:solidFill>
-                            <a:srgbClr val="2B2B2B"/>
-                          </a:solidFill>
-                          <a:latin typeface="맑은 고딕" pitchFamily="34" charset="0"/>
-                          <a:ea typeface="맑은 고딕" pitchFamily="34" charset="-122"/>
-                          <a:cs typeface="맑은 고딕" pitchFamily="34" charset="-120"/>
-                        </a:rPr>
-                        <a:t>2026-05-31</a:t>
-                      </a:r>
                       <a:endParaRPr lang="en-US" sz="850" dirty="0">
                         <a:latin typeface="맑은 고딕" charset="0"/>
                         <a:ea typeface="맑은 고딕" charset="0"/>
@@ -13871,7 +13754,7 @@
                           <a:ea typeface="맑은 고딕" pitchFamily="34" charset="-122"/>
                           <a:cs typeface="맑은 고딕" pitchFamily="34" charset="-120"/>
                         </a:rPr>
-                        <a:t>66</a:t>
+                        <a:t>2027-08-31</a:t>
                       </a:r>
                       <a:endParaRPr lang="en-US" sz="850" dirty="0">
                         <a:latin typeface="맑은 고딕" charset="0"/>
@@ -13930,17 +13813,6 @@
                       <a:pPr algn="ctr" indent="0" marL="0">
                         <a:buNone/>
                       </a:pPr>
-                      <a:r>
-                        <a:rPr lang="en-US" sz="850" dirty="0">
-                          <a:solidFill>
-                            <a:srgbClr val="2B2B2B"/>
-                          </a:solidFill>
-                          <a:latin typeface="맑은 고딕" pitchFamily="34" charset="0"/>
-                          <a:ea typeface="맑은 고딕" pitchFamily="34" charset="-122"/>
-                          <a:cs typeface="맑은 고딕" pitchFamily="34" charset="-120"/>
-                        </a:rPr>
-                        <a:t>2027-08-31</a:t>
-                      </a:r>
                       <a:endParaRPr lang="en-US" sz="850" dirty="0">
                         <a:latin typeface="맑은 고딕" charset="0"/>
                         <a:ea typeface="맑은 고딕" charset="0"/>
@@ -14542,7 +14414,7 @@
                           <a:ea typeface="맑은 고딕" pitchFamily="34" charset="-122"/>
                           <a:cs typeface="맑은 고딕" pitchFamily="34" charset="-120"/>
                         </a:rPr>
-                        <a:t>66</a:t>
+                        <a:t>2027-12-31</a:t>
                       </a:r>
                       <a:endParaRPr lang="en-US" sz="850" dirty="0">
                         <a:latin typeface="맑은 고딕" charset="0"/>
@@ -14601,17 +14473,6 @@
                       <a:pPr algn="ctr" indent="0" marL="0">
                         <a:buNone/>
                       </a:pPr>
-                      <a:r>
-                        <a:rPr lang="en-US" sz="850" dirty="0">
-                          <a:solidFill>
-                            <a:srgbClr val="2B2B2B"/>
-                          </a:solidFill>
-                          <a:latin typeface="맑은 고딕" pitchFamily="34" charset="0"/>
-                          <a:ea typeface="맑은 고딕" pitchFamily="34" charset="-122"/>
-                          <a:cs typeface="맑은 고딕" pitchFamily="34" charset="-120"/>
-                        </a:rPr>
-                        <a:t>2027-12-31</a:t>
-                      </a:r>
                       <a:endParaRPr lang="en-US" sz="850" dirty="0">
                         <a:latin typeface="맑은 고딕" charset="0"/>
                         <a:ea typeface="맑은 고딕" charset="0"/>
@@ -15213,7 +15074,7 @@
                           <a:ea typeface="맑은 고딕" pitchFamily="34" charset="-122"/>
                           <a:cs typeface="맑은 고딕" pitchFamily="34" charset="-120"/>
                         </a:rPr>
-                        <a:t>66</a:t>
+                        <a:t>2027-06-30</a:t>
                       </a:r>
                       <a:endParaRPr lang="en-US" sz="850" dirty="0">
                         <a:latin typeface="맑은 고딕" charset="0"/>
@@ -15272,17 +15133,6 @@
                       <a:pPr algn="ctr" indent="0" marL="0">
                         <a:buNone/>
                       </a:pPr>
-                      <a:r>
-                        <a:rPr lang="en-US" sz="850" dirty="0">
-                          <a:solidFill>
-                            <a:srgbClr val="2B2B2B"/>
-                          </a:solidFill>
-                          <a:latin typeface="맑은 고딕" pitchFamily="34" charset="0"/>
-                          <a:ea typeface="맑은 고딕" pitchFamily="34" charset="-122"/>
-                          <a:cs typeface="맑은 고딕" pitchFamily="34" charset="-120"/>
-                        </a:rPr>
-                        <a:t>2027-06-30</a:t>
-                      </a:r>
                       <a:endParaRPr lang="en-US" sz="850" dirty="0">
                         <a:latin typeface="맑은 고딕" charset="0"/>
                         <a:ea typeface="맑은 고딕" charset="0"/>
@@ -15884,7 +15734,7 @@
                           <a:ea typeface="맑은 고딕" pitchFamily="34" charset="-122"/>
                           <a:cs typeface="맑은 고딕" pitchFamily="34" charset="-120"/>
                         </a:rPr>
-                        <a:t>66</a:t>
+                        <a:t>2028-02-28</a:t>
                       </a:r>
                       <a:endParaRPr lang="en-US" sz="850" dirty="0">
                         <a:latin typeface="맑은 고딕" charset="0"/>
@@ -15943,17 +15793,6 @@
                       <a:pPr algn="ctr" indent="0" marL="0">
                         <a:buNone/>
                       </a:pPr>
-                      <a:r>
-                        <a:rPr lang="en-US" sz="850" dirty="0">
-                          <a:solidFill>
-                            <a:srgbClr val="2B2B2B"/>
-                          </a:solidFill>
-                          <a:latin typeface="맑은 고딕" pitchFamily="34" charset="0"/>
-                          <a:ea typeface="맑은 고딕" pitchFamily="34" charset="-122"/>
-                          <a:cs typeface="맑은 고딕" pitchFamily="34" charset="-120"/>
-                        </a:rPr>
-                        <a:t>2028-02-28</a:t>
-                      </a:r>
                       <a:endParaRPr lang="en-US" sz="850" dirty="0">
                         <a:latin typeface="맑은 고딕" charset="0"/>
                         <a:ea typeface="맑은 고딕" charset="0"/>
@@ -16555,74 +16394,6 @@
                           <a:ea typeface="맑은 고딕" pitchFamily="34" charset="-122"/>
                           <a:cs typeface="맑은 고딕" pitchFamily="34" charset="-120"/>
                         </a:rPr>
-                        <a:t>33</a:t>
-                      </a:r>
-                      <a:endParaRPr lang="en-US" sz="850" dirty="0">
-                        <a:latin typeface="맑은 고딕" charset="0"/>
-                        <a:ea typeface="맑은 고딕" charset="0"/>
-                        <a:cs typeface="맑은 고딕" charset="0"/>
-                      </a:endParaRPr>
-                    </a:p>
-                  </a:txBody>
-                  <a:tcPr marL="91440" marR="91440" marT="45720" marB="45720" anchor="ctr">
-                    <a:lnL w="12700" cap="flat" cmpd="sng" algn="ctr">
-                      <a:solidFill>
-                        <a:srgbClr val="CBD5E0"/>
-                      </a:solidFill>
-                      <a:prstDash val="solid"/>
-                      <a:round/>
-                      <a:headEnd type="none" w="med" len="med"/>
-                      <a:tailEnd type="none" w="med" len="med"/>
-                    </a:lnL>
-                    <a:lnR w="12700" cap="flat" cmpd="sng" algn="ctr">
-                      <a:solidFill>
-                        <a:srgbClr val="CBD5E0"/>
-                      </a:solidFill>
-                      <a:prstDash val="solid"/>
-                      <a:round/>
-                      <a:headEnd type="none" w="med" len="med"/>
-                      <a:tailEnd type="none" w="med" len="med"/>
-                    </a:lnR>
-                    <a:lnT w="12700" cap="flat" cmpd="sng" algn="ctr">
-                      <a:solidFill>
-                        <a:srgbClr val="CBD5E0"/>
-                      </a:solidFill>
-                      <a:prstDash val="solid"/>
-                      <a:round/>
-                      <a:headEnd type="none" w="med" len="med"/>
-                      <a:tailEnd type="none" w="med" len="med"/>
-                    </a:lnT>
-                    <a:lnB w="12700" cap="flat" cmpd="sng" algn="ctr">
-                      <a:solidFill>
-                        <a:srgbClr val="CBD5E0"/>
-                      </a:solidFill>
-                      <a:prstDash val="solid"/>
-                      <a:round/>
-                      <a:headEnd type="none" w="med" len="med"/>
-                      <a:tailEnd type="none" w="med" len="med"/>
-                    </a:lnB>
-                    <a:solidFill>
-                      <a:srgbClr val="F3F6F7"/>
-                    </a:solidFill>
-                  </a:tcPr>
-                </a:tc>
-                <a:tc>
-                  <a:txBody>
-                    <a:bodyPr/>
-                    <a:lstStyle/>
-                    <a:p>
-                      <a:pPr algn="ctr" indent="0" marL="0">
-                        <a:buNone/>
-                      </a:pPr>
-                      <a:r>
-                        <a:rPr lang="en-US" sz="850" dirty="0">
-                          <a:solidFill>
-                            <a:srgbClr val="2B2B2B"/>
-                          </a:solidFill>
-                          <a:latin typeface="맑은 고딕" pitchFamily="34" charset="0"/>
-                          <a:ea typeface="맑은 고딕" pitchFamily="34" charset="-122"/>
-                          <a:cs typeface="맑은 고딕" pitchFamily="34" charset="-120"/>
-                        </a:rPr>
                         <a:t>2028-12-31</a:t>
                       </a:r>
                       <a:endParaRPr lang="en-US" sz="850" dirty="0">
@@ -16693,6 +16464,63 @@
                         </a:rPr>
                         <a:t>분할임대</a:t>
                       </a:r>
+                      <a:endParaRPr lang="en-US" sz="850" dirty="0">
+                        <a:latin typeface="맑은 고딕" charset="0"/>
+                        <a:ea typeface="맑은 고딕" charset="0"/>
+                        <a:cs typeface="맑은 고딕" charset="0"/>
+                      </a:endParaRPr>
+                    </a:p>
+                  </a:txBody>
+                  <a:tcPr marL="91440" marR="91440" marT="45720" marB="45720" anchor="ctr">
+                    <a:lnL w="12700" cap="flat" cmpd="sng" algn="ctr">
+                      <a:solidFill>
+                        <a:srgbClr val="CBD5E0"/>
+                      </a:solidFill>
+                      <a:prstDash val="solid"/>
+                      <a:round/>
+                      <a:headEnd type="none" w="med" len="med"/>
+                      <a:tailEnd type="none" w="med" len="med"/>
+                    </a:lnL>
+                    <a:lnR w="12700" cap="flat" cmpd="sng" algn="ctr">
+                      <a:solidFill>
+                        <a:srgbClr val="CBD5E0"/>
+                      </a:solidFill>
+                      <a:prstDash val="solid"/>
+                      <a:round/>
+                      <a:headEnd type="none" w="med" len="med"/>
+                      <a:tailEnd type="none" w="med" len="med"/>
+                    </a:lnR>
+                    <a:lnT w="12700" cap="flat" cmpd="sng" algn="ctr">
+                      <a:solidFill>
+                        <a:srgbClr val="CBD5E0"/>
+                      </a:solidFill>
+                      <a:prstDash val="solid"/>
+                      <a:round/>
+                      <a:headEnd type="none" w="med" len="med"/>
+                      <a:tailEnd type="none" w="med" len="med"/>
+                    </a:lnT>
+                    <a:lnB w="12700" cap="flat" cmpd="sng" algn="ctr">
+                      <a:solidFill>
+                        <a:srgbClr val="CBD5E0"/>
+                      </a:solidFill>
+                      <a:prstDash val="solid"/>
+                      <a:round/>
+                      <a:headEnd type="none" w="med" len="med"/>
+                      <a:tailEnd type="none" w="med" len="med"/>
+                    </a:lnB>
+                    <a:solidFill>
+                      <a:srgbClr val="F3F6F7"/>
+                    </a:solidFill>
+                  </a:tcPr>
+                </a:tc>
+                <a:tc>
+                  <a:txBody>
+                    <a:bodyPr/>
+                    <a:lstStyle/>
+                    <a:p>
+                      <a:pPr algn="ctr" indent="0" marL="0">
+                        <a:buNone/>
+                      </a:pPr>
                       <a:endParaRPr lang="en-US" sz="850" dirty="0">
                         <a:latin typeface="맑은 고딕" charset="0"/>
                         <a:ea typeface="맑은 고딕" charset="0"/>

--- a/docs/test/golden-outputs/p5-yangpyeong-r2/captures/yangpyeong_basic.pptx
+++ b/docs/test/golden-outputs/p5-yangpyeong-r2/captures/yangpyeong_basic.pptx
@@ -2199,7 +2199,7 @@
                 <a:ea typeface="맑은 고딕" pitchFamily="34" charset="-122"/>
                 <a:cs typeface="맑은 고딕" pitchFamily="34" charset="-120"/>
               </a:rPr>
-              <a:t>2026.09.23  |  정현우 수석팀장  |  제이에스부동산중개법인</a:t>
+              <a:t>2026.09.24  |  정현우 수석팀장  |  제이에스부동산중개법인</a:t>
             </a:r>
             <a:endParaRPr lang="en-US" sz="900" dirty="0"/>
           </a:p>

--- a/docs/test/golden-outputs/p5-yangpyeong-r2/captures/yangpyeong_basic.pptx
+++ b/docs/test/golden-outputs/p5-yangpyeong-r2/captures/yangpyeong_basic.pptx
@@ -2199,7 +2199,7 @@
                 <a:ea typeface="맑은 고딕" pitchFamily="34" charset="-122"/>
                 <a:cs typeface="맑은 고딕" pitchFamily="34" charset="-120"/>
               </a:rPr>
-              <a:t>2026.09.24  |  정현우 수석팀장  |  제이에스부동산중개법인</a:t>
+              <a:t>2026.09.29  |  정현우 수석팀장  |  제이에스부동산중개법인</a:t>
             </a:r>
             <a:endParaRPr lang="en-US" sz="900" dirty="0"/>
           </a:p>
@@ -7763,183 +7763,6 @@
             <a:avLst/>
           </a:prstGeom>
           <a:solidFill>
-            <a:srgbClr val="93B3A0"/>
-          </a:solidFill>
-          <a:ln/>
-        </p:spPr>
-      </p:sp>
-      <p:sp>
-        <p:nvSpPr>
-          <p:cNvPr id="7" name="Text 5"/>
-          <p:cNvSpPr/>
-          <p:nvPr/>
-        </p:nvSpPr>
-        <p:spPr>
-          <a:xfrm>
-            <a:off x="685800" y="1645920"/>
-            <a:ext cx="548640" cy="137160"/>
-          </a:xfrm>
-          <a:prstGeom prst="rect">
-            <a:avLst/>
-          </a:prstGeom>
-          <a:noFill/>
-          <a:ln/>
-        </p:spPr>
-        <p:txBody>
-          <a:bodyPr wrap="square" rtlCol="0" anchor="ctr"/>
-          <a:lstStyle/>
-          <a:p>
-            <a:pPr indent="0" marL="0">
-              <a:buNone/>
-            </a:pPr>
-            <a:r>
-              <a:rPr lang="en-US" sz="900" dirty="0">
-                <a:solidFill>
-                  <a:srgbClr val="5B6B73"/>
-                </a:solidFill>
-                <a:latin typeface="맑은 고딕" pitchFamily="34" charset="0"/>
-                <a:ea typeface="맑은 고딕" pitchFamily="34" charset="-122"/>
-                <a:cs typeface="맑은 고딕" pitchFamily="34" charset="-120"/>
-              </a:rPr>
-              <a:t>2026</a:t>
-            </a:r>
-            <a:endParaRPr lang="en-US" sz="900" dirty="0"/>
-          </a:p>
-        </p:txBody>
-      </p:sp>
-      <p:sp>
-        <p:nvSpPr>
-          <p:cNvPr id="8" name="Shape 6"/>
-          <p:cNvSpPr/>
-          <p:nvPr/>
-        </p:nvSpPr>
-        <p:spPr>
-          <a:xfrm>
-            <a:off x="1234440" y="1645920"/>
-            <a:ext cx="137160" cy="137160"/>
-          </a:xfrm>
-          <a:prstGeom prst="rect">
-            <a:avLst/>
-          </a:prstGeom>
-          <a:solidFill>
-            <a:srgbClr val="A6C1D9"/>
-          </a:solidFill>
-          <a:ln/>
-        </p:spPr>
-      </p:sp>
-      <p:sp>
-        <p:nvSpPr>
-          <p:cNvPr id="9" name="Text 7"/>
-          <p:cNvSpPr/>
-          <p:nvPr/>
-        </p:nvSpPr>
-        <p:spPr>
-          <a:xfrm>
-            <a:off x="1417320" y="1645920"/>
-            <a:ext cx="548640" cy="137160"/>
-          </a:xfrm>
-          <a:prstGeom prst="rect">
-            <a:avLst/>
-          </a:prstGeom>
-          <a:noFill/>
-          <a:ln/>
-        </p:spPr>
-        <p:txBody>
-          <a:bodyPr wrap="square" rtlCol="0" anchor="ctr"/>
-          <a:lstStyle/>
-          <a:p>
-            <a:pPr indent="0" marL="0">
-              <a:buNone/>
-            </a:pPr>
-            <a:r>
-              <a:rPr lang="en-US" sz="900" dirty="0">
-                <a:solidFill>
-                  <a:srgbClr val="5B6B73"/>
-                </a:solidFill>
-                <a:latin typeface="맑은 고딕" pitchFamily="34" charset="0"/>
-                <a:ea typeface="맑은 고딕" pitchFamily="34" charset="-122"/>
-                <a:cs typeface="맑은 고딕" pitchFamily="34" charset="-120"/>
-              </a:rPr>
-              <a:t>2027</a:t>
-            </a:r>
-            <a:endParaRPr lang="en-US" sz="900" dirty="0"/>
-          </a:p>
-        </p:txBody>
-      </p:sp>
-      <p:sp>
-        <p:nvSpPr>
-          <p:cNvPr id="10" name="Shape 8"/>
-          <p:cNvSpPr/>
-          <p:nvPr/>
-        </p:nvSpPr>
-        <p:spPr>
-          <a:xfrm>
-            <a:off x="1965960" y="1645920"/>
-            <a:ext cx="137160" cy="137160"/>
-          </a:xfrm>
-          <a:prstGeom prst="rect">
-            <a:avLst/>
-          </a:prstGeom>
-          <a:solidFill>
-            <a:srgbClr val="C5B4E3"/>
-          </a:solidFill>
-          <a:ln/>
-        </p:spPr>
-      </p:sp>
-      <p:sp>
-        <p:nvSpPr>
-          <p:cNvPr id="11" name="Text 9"/>
-          <p:cNvSpPr/>
-          <p:nvPr/>
-        </p:nvSpPr>
-        <p:spPr>
-          <a:xfrm>
-            <a:off x="2148840" y="1645920"/>
-            <a:ext cx="548640" cy="137160"/>
-          </a:xfrm>
-          <a:prstGeom prst="rect">
-            <a:avLst/>
-          </a:prstGeom>
-          <a:noFill/>
-          <a:ln/>
-        </p:spPr>
-        <p:txBody>
-          <a:bodyPr wrap="square" rtlCol="0" anchor="ctr"/>
-          <a:lstStyle/>
-          <a:p>
-            <a:pPr indent="0" marL="0">
-              <a:buNone/>
-            </a:pPr>
-            <a:r>
-              <a:rPr lang="en-US" sz="900" dirty="0">
-                <a:solidFill>
-                  <a:srgbClr val="5B6B73"/>
-                </a:solidFill>
-                <a:latin typeface="맑은 고딕" pitchFamily="34" charset="0"/>
-                <a:ea typeface="맑은 고딕" pitchFamily="34" charset="-122"/>
-                <a:cs typeface="맑은 고딕" pitchFamily="34" charset="-120"/>
-              </a:rPr>
-              <a:t>2028</a:t>
-            </a:r>
-            <a:endParaRPr lang="en-US" sz="900" dirty="0"/>
-          </a:p>
-        </p:txBody>
-      </p:sp>
-      <p:sp>
-        <p:nvSpPr>
-          <p:cNvPr id="12" name="Shape 10"/>
-          <p:cNvSpPr/>
-          <p:nvPr/>
-        </p:nvSpPr>
-        <p:spPr>
-          <a:xfrm>
-            <a:off x="2697480" y="1645920"/>
-            <a:ext cx="137160" cy="137160"/>
-          </a:xfrm>
-          <a:prstGeom prst="rect">
-            <a:avLst/>
-          </a:prstGeom>
-          <a:solidFill>
             <a:srgbClr val="FBEFE8"/>
           </a:solidFill>
           <a:ln w="12700">
@@ -7952,13 +7775,13 @@
       </p:sp>
       <p:sp>
         <p:nvSpPr>
-          <p:cNvPr id="13" name="Text 11"/>
-          <p:cNvSpPr/>
-          <p:nvPr/>
-        </p:nvSpPr>
-        <p:spPr>
-          <a:xfrm>
-            <a:off x="2880360" y="1645920"/>
+          <p:cNvPr id="7" name="Text 5"/>
+          <p:cNvSpPr/>
+          <p:nvPr/>
+        </p:nvSpPr>
+        <p:spPr>
+          <a:xfrm>
+            <a:off x="685800" y="1645920"/>
             <a:ext cx="548640" cy="137160"/>
           </a:xfrm>
           <a:prstGeom prst="rect">
@@ -7991,14 +7814,14 @@
       </p:sp>
       <p:sp>
         <p:nvSpPr>
-          <p:cNvPr id="14" name="Shape 12"/>
+          <p:cNvPr id="8" name="Shape 6"/>
           <p:cNvSpPr/>
           <p:nvPr/>
         </p:nvSpPr>
         <p:spPr>
           <a:xfrm>
             <a:off x="685800" y="5699760"/>
-            <a:ext cx="2560320" cy="0"/>
+            <a:ext cx="2743200" cy="0"/>
           </a:xfrm>
           <a:prstGeom prst="line">
             <a:avLst/>
@@ -8014,7 +7837,7 @@
       </p:sp>
       <p:sp>
         <p:nvSpPr>
-          <p:cNvPr id="15" name="Text 13"/>
+          <p:cNvPr id="9" name="Text 7"/>
           <p:cNvSpPr/>
           <p:nvPr/>
         </p:nvSpPr>
@@ -8053,14 +7876,14 @@
       </p:sp>
       <p:sp>
         <p:nvSpPr>
-          <p:cNvPr id="16" name="Text 14"/>
+          <p:cNvPr id="10" name="Text 8"/>
           <p:cNvSpPr/>
           <p:nvPr/>
         </p:nvSpPr>
         <p:spPr>
           <a:xfrm>
             <a:off x="502920" y="5699760"/>
-            <a:ext cx="320040" cy="335280"/>
+            <a:ext cx="475488" cy="335280"/>
           </a:xfrm>
           <a:prstGeom prst="rect">
             <a:avLst/>
@@ -8092,14 +7915,14 @@
       </p:sp>
       <p:sp>
         <p:nvSpPr>
-          <p:cNvPr id="17" name="Shape 15"/>
-          <p:cNvSpPr/>
-          <p:nvPr/>
-        </p:nvSpPr>
-        <p:spPr>
-          <a:xfrm>
-            <a:off x="868680" y="5727192"/>
-            <a:ext cx="2194560" cy="280416"/>
+          <p:cNvPr id="11" name="Shape 9"/>
+          <p:cNvSpPr/>
+          <p:nvPr/>
+        </p:nvSpPr>
+        <p:spPr>
+          <a:xfrm>
+            <a:off x="1033272" y="5727192"/>
+            <a:ext cx="2468880" cy="280416"/>
           </a:xfrm>
           <a:prstGeom prst="rect">
             <a:avLst/>
@@ -8117,14 +7940,14 @@
       </p:sp>
       <p:sp>
         <p:nvSpPr>
-          <p:cNvPr id="18" name="Text 16"/>
-          <p:cNvSpPr/>
-          <p:nvPr/>
-        </p:nvSpPr>
-        <p:spPr>
-          <a:xfrm>
-            <a:off x="941832" y="5727192"/>
-            <a:ext cx="1316736" cy="280416"/>
+          <p:cNvPr id="12" name="Text 10"/>
+          <p:cNvSpPr/>
+          <p:nvPr/>
+        </p:nvSpPr>
+        <p:spPr>
+          <a:xfrm>
+            <a:off x="1069848" y="5718048"/>
+            <a:ext cx="2395728" cy="298704"/>
           </a:xfrm>
           <a:prstGeom prst="rect">
             <a:avLst/>
@@ -8136,7 +7959,7 @@
           <a:bodyPr wrap="square" rtlCol="0" anchor="ctr"/>
           <a:lstStyle/>
           <a:p>
-            <a:pPr algn="l" indent="0" marL="0">
+            <a:pPr algn="ctr" indent="0" marL="0">
               <a:buNone/>
             </a:pPr>
             <a:r>
@@ -8156,53 +7979,14 @@
       </p:sp>
       <p:sp>
         <p:nvSpPr>
-          <p:cNvPr id="19" name="Text 17"/>
-          <p:cNvSpPr/>
-          <p:nvPr/>
-        </p:nvSpPr>
-        <p:spPr>
-          <a:xfrm>
-            <a:off x="2185416" y="5727192"/>
-            <a:ext cx="768096" cy="280416"/>
-          </a:xfrm>
-          <a:prstGeom prst="rect">
-            <a:avLst/>
-          </a:prstGeom>
-          <a:noFill/>
-          <a:ln/>
-        </p:spPr>
-        <p:txBody>
-          <a:bodyPr wrap="square" rtlCol="0" anchor="ctr"/>
-          <a:lstStyle/>
-          <a:p>
-            <a:pPr algn="r" indent="0" marL="0">
-              <a:buNone/>
-            </a:pPr>
-            <a:r>
-              <a:rPr lang="en-US" sz="700" dirty="0">
-                <a:solidFill>
-                  <a:srgbClr val="8A9AA3"/>
-                </a:solidFill>
-                <a:latin typeface="맑은 고딕" pitchFamily="34" charset="0"/>
-                <a:ea typeface="맑은 고딕" pitchFamily="34" charset="-122"/>
-                <a:cs typeface="맑은 고딕" pitchFamily="34" charset="-120"/>
-              </a:rPr>
-              <a:t>422평</a:t>
-            </a:r>
-            <a:endParaRPr lang="en-US" sz="700" dirty="0"/>
-          </a:p>
-        </p:txBody>
-      </p:sp>
-      <p:sp>
-        <p:nvSpPr>
-          <p:cNvPr id="20" name="Text 18"/>
+          <p:cNvPr id="13" name="Text 11"/>
           <p:cNvSpPr/>
           <p:nvPr/>
         </p:nvSpPr>
         <p:spPr>
           <a:xfrm>
             <a:off x="502920" y="5364480"/>
-            <a:ext cx="320040" cy="335280"/>
+            <a:ext cx="475488" cy="335280"/>
           </a:xfrm>
           <a:prstGeom prst="rect">
             <a:avLst/>
@@ -8234,20 +8018,20 @@
       </p:sp>
       <p:sp>
         <p:nvSpPr>
-          <p:cNvPr id="21" name="Shape 19"/>
-          <p:cNvSpPr/>
-          <p:nvPr/>
-        </p:nvSpPr>
-        <p:spPr>
-          <a:xfrm>
-            <a:off x="1472184" y="5391912"/>
-            <a:ext cx="987552" cy="280416"/>
+          <p:cNvPr id="14" name="Shape 12"/>
+          <p:cNvSpPr/>
+          <p:nvPr/>
+        </p:nvSpPr>
+        <p:spPr>
+          <a:xfrm>
+            <a:off x="1033272" y="5391912"/>
+            <a:ext cx="2468880" cy="280416"/>
           </a:xfrm>
           <a:prstGeom prst="rect">
             <a:avLst/>
           </a:prstGeom>
           <a:solidFill>
-            <a:srgbClr val="93B3A0"/>
+            <a:srgbClr val="E2E8F0"/>
           </a:solidFill>
           <a:ln w="13970">
             <a:solidFill>
@@ -8259,14 +8043,14 @@
       </p:sp>
       <p:sp>
         <p:nvSpPr>
-          <p:cNvPr id="22" name="Text 20"/>
-          <p:cNvSpPr/>
-          <p:nvPr/>
-        </p:nvSpPr>
-        <p:spPr>
-          <a:xfrm>
-            <a:off x="1517904" y="5391912"/>
-            <a:ext cx="896112" cy="280416"/>
+          <p:cNvPr id="15" name="Text 13"/>
+          <p:cNvSpPr/>
+          <p:nvPr/>
+        </p:nvSpPr>
+        <p:spPr>
+          <a:xfrm>
+            <a:off x="1069848" y="5382768"/>
+            <a:ext cx="2395728" cy="298704"/>
           </a:xfrm>
           <a:prstGeom prst="rect">
             <a:avLst/>
@@ -8298,14 +8082,14 @@
       </p:sp>
       <p:sp>
         <p:nvSpPr>
-          <p:cNvPr id="23" name="Text 21"/>
+          <p:cNvPr id="16" name="Text 14"/>
           <p:cNvSpPr/>
           <p:nvPr/>
         </p:nvSpPr>
         <p:spPr>
           <a:xfrm>
             <a:off x="502920" y="5029200"/>
-            <a:ext cx="320040" cy="335280"/>
+            <a:ext cx="475488" cy="335280"/>
           </a:xfrm>
           <a:prstGeom prst="rect">
             <a:avLst/>
@@ -8337,20 +8121,20 @@
       </p:sp>
       <p:sp>
         <p:nvSpPr>
-          <p:cNvPr id="24" name="Shape 22"/>
-          <p:cNvSpPr/>
-          <p:nvPr/>
-        </p:nvSpPr>
-        <p:spPr>
-          <a:xfrm>
-            <a:off x="1417320" y="5056632"/>
-            <a:ext cx="1097280" cy="280416"/>
+          <p:cNvPr id="17" name="Shape 15"/>
+          <p:cNvSpPr/>
+          <p:nvPr/>
+        </p:nvSpPr>
+        <p:spPr>
+          <a:xfrm>
+            <a:off x="1033272" y="5056632"/>
+            <a:ext cx="2468880" cy="280416"/>
           </a:xfrm>
           <a:prstGeom prst="rect">
             <a:avLst/>
           </a:prstGeom>
           <a:solidFill>
-            <a:srgbClr val="A6C1D9"/>
+            <a:srgbClr val="E2E8F0"/>
           </a:solidFill>
           <a:ln w="13970">
             <a:solidFill>
@@ -8362,14 +8146,14 @@
       </p:sp>
       <p:sp>
         <p:nvSpPr>
-          <p:cNvPr id="25" name="Text 23"/>
-          <p:cNvSpPr/>
-          <p:nvPr/>
-        </p:nvSpPr>
-        <p:spPr>
-          <a:xfrm>
-            <a:off x="1463040" y="5056632"/>
-            <a:ext cx="1005840" cy="280416"/>
+          <p:cNvPr id="18" name="Text 16"/>
+          <p:cNvSpPr/>
+          <p:nvPr/>
+        </p:nvSpPr>
+        <p:spPr>
+          <a:xfrm>
+            <a:off x="1069848" y="5047488"/>
+            <a:ext cx="2395728" cy="298704"/>
           </a:xfrm>
           <a:prstGeom prst="rect">
             <a:avLst/>
@@ -8401,14 +8185,14 @@
       </p:sp>
       <p:sp>
         <p:nvSpPr>
-          <p:cNvPr id="26" name="Text 24"/>
+          <p:cNvPr id="19" name="Text 17"/>
           <p:cNvSpPr/>
           <p:nvPr/>
         </p:nvSpPr>
         <p:spPr>
           <a:xfrm>
             <a:off x="502920" y="4693920"/>
-            <a:ext cx="320040" cy="335280"/>
+            <a:ext cx="475488" cy="335280"/>
           </a:xfrm>
           <a:prstGeom prst="rect">
             <a:avLst/>
@@ -8440,20 +8224,20 @@
       </p:sp>
       <p:sp>
         <p:nvSpPr>
-          <p:cNvPr id="27" name="Shape 25"/>
-          <p:cNvSpPr/>
-          <p:nvPr/>
-        </p:nvSpPr>
-        <p:spPr>
-          <a:xfrm>
-            <a:off x="1417320" y="4721352"/>
-            <a:ext cx="1097280" cy="280416"/>
+          <p:cNvPr id="20" name="Shape 18"/>
+          <p:cNvSpPr/>
+          <p:nvPr/>
+        </p:nvSpPr>
+        <p:spPr>
+          <a:xfrm>
+            <a:off x="1033272" y="4721352"/>
+            <a:ext cx="2468880" cy="280416"/>
           </a:xfrm>
           <a:prstGeom prst="rect">
             <a:avLst/>
           </a:prstGeom>
           <a:solidFill>
-            <a:srgbClr val="A6C1D9"/>
+            <a:srgbClr val="E2E8F0"/>
           </a:solidFill>
           <a:ln w="13970">
             <a:solidFill>
@@ -8465,14 +8249,14 @@
       </p:sp>
       <p:sp>
         <p:nvSpPr>
-          <p:cNvPr id="28" name="Text 26"/>
-          <p:cNvSpPr/>
-          <p:nvPr/>
-        </p:nvSpPr>
-        <p:spPr>
-          <a:xfrm>
-            <a:off x="1463040" y="4721352"/>
-            <a:ext cx="1005840" cy="280416"/>
+          <p:cNvPr id="21" name="Text 19"/>
+          <p:cNvSpPr/>
+          <p:nvPr/>
+        </p:nvSpPr>
+        <p:spPr>
+          <a:xfrm>
+            <a:off x="1069848" y="4712208"/>
+            <a:ext cx="2395728" cy="298704"/>
           </a:xfrm>
           <a:prstGeom prst="rect">
             <a:avLst/>
@@ -8504,14 +8288,14 @@
       </p:sp>
       <p:sp>
         <p:nvSpPr>
-          <p:cNvPr id="29" name="Text 27"/>
+          <p:cNvPr id="22" name="Text 20"/>
           <p:cNvSpPr/>
           <p:nvPr/>
         </p:nvSpPr>
         <p:spPr>
           <a:xfrm>
             <a:off x="502920" y="4358640"/>
-            <a:ext cx="320040" cy="335280"/>
+            <a:ext cx="475488" cy="335280"/>
           </a:xfrm>
           <a:prstGeom prst="rect">
             <a:avLst/>
@@ -8543,20 +8327,20 @@
       </p:sp>
       <p:sp>
         <p:nvSpPr>
-          <p:cNvPr id="30" name="Shape 28"/>
-          <p:cNvSpPr/>
-          <p:nvPr/>
-        </p:nvSpPr>
-        <p:spPr>
-          <a:xfrm>
-            <a:off x="1417320" y="4386072"/>
-            <a:ext cx="1097280" cy="280416"/>
+          <p:cNvPr id="23" name="Shape 21"/>
+          <p:cNvSpPr/>
+          <p:nvPr/>
+        </p:nvSpPr>
+        <p:spPr>
+          <a:xfrm>
+            <a:off x="1033272" y="4386072"/>
+            <a:ext cx="2468880" cy="280416"/>
           </a:xfrm>
           <a:prstGeom prst="rect">
             <a:avLst/>
           </a:prstGeom>
           <a:solidFill>
-            <a:srgbClr val="93B3A0"/>
+            <a:srgbClr val="E2E8F0"/>
           </a:solidFill>
           <a:ln w="13970">
             <a:solidFill>
@@ -8568,14 +8352,14 @@
       </p:sp>
       <p:sp>
         <p:nvSpPr>
-          <p:cNvPr id="31" name="Text 29"/>
-          <p:cNvSpPr/>
-          <p:nvPr/>
-        </p:nvSpPr>
-        <p:spPr>
-          <a:xfrm>
-            <a:off x="1463040" y="4386072"/>
-            <a:ext cx="1005840" cy="280416"/>
+          <p:cNvPr id="24" name="Text 22"/>
+          <p:cNvSpPr/>
+          <p:nvPr/>
+        </p:nvSpPr>
+        <p:spPr>
+          <a:xfrm>
+            <a:off x="1069848" y="4376928"/>
+            <a:ext cx="2395728" cy="298704"/>
           </a:xfrm>
           <a:prstGeom prst="rect">
             <a:avLst/>
@@ -8607,14 +8391,14 @@
       </p:sp>
       <p:sp>
         <p:nvSpPr>
-          <p:cNvPr id="32" name="Text 30"/>
+          <p:cNvPr id="25" name="Text 23"/>
           <p:cNvSpPr/>
           <p:nvPr/>
         </p:nvSpPr>
         <p:spPr>
           <a:xfrm>
             <a:off x="502920" y="4023360"/>
-            <a:ext cx="320040" cy="335280"/>
+            <a:ext cx="475488" cy="335280"/>
           </a:xfrm>
           <a:prstGeom prst="rect">
             <a:avLst/>
@@ -8646,20 +8430,20 @@
       </p:sp>
       <p:sp>
         <p:nvSpPr>
-          <p:cNvPr id="33" name="Shape 31"/>
-          <p:cNvSpPr/>
-          <p:nvPr/>
-        </p:nvSpPr>
-        <p:spPr>
-          <a:xfrm>
-            <a:off x="1417320" y="4050792"/>
-            <a:ext cx="1097280" cy="280416"/>
+          <p:cNvPr id="26" name="Shape 24"/>
+          <p:cNvSpPr/>
+          <p:nvPr/>
+        </p:nvSpPr>
+        <p:spPr>
+          <a:xfrm>
+            <a:off x="1033272" y="4050792"/>
+            <a:ext cx="2468880" cy="280416"/>
           </a:xfrm>
           <a:prstGeom prst="rect">
             <a:avLst/>
           </a:prstGeom>
           <a:solidFill>
-            <a:srgbClr val="A6C1D9"/>
+            <a:srgbClr val="E2E8F0"/>
           </a:solidFill>
           <a:ln w="13970">
             <a:solidFill>
@@ -8671,14 +8455,14 @@
       </p:sp>
       <p:sp>
         <p:nvSpPr>
-          <p:cNvPr id="34" name="Text 32"/>
-          <p:cNvSpPr/>
-          <p:nvPr/>
-        </p:nvSpPr>
-        <p:spPr>
-          <a:xfrm>
-            <a:off x="1463040" y="4050792"/>
-            <a:ext cx="1005840" cy="280416"/>
+          <p:cNvPr id="27" name="Text 25"/>
+          <p:cNvSpPr/>
+          <p:nvPr/>
+        </p:nvSpPr>
+        <p:spPr>
+          <a:xfrm>
+            <a:off x="1069848" y="4041648"/>
+            <a:ext cx="2395728" cy="298704"/>
           </a:xfrm>
           <a:prstGeom prst="rect">
             <a:avLst/>
@@ -8710,14 +8494,14 @@
       </p:sp>
       <p:sp>
         <p:nvSpPr>
-          <p:cNvPr id="35" name="Text 33"/>
+          <p:cNvPr id="28" name="Text 26"/>
           <p:cNvSpPr/>
           <p:nvPr/>
         </p:nvSpPr>
         <p:spPr>
           <a:xfrm>
             <a:off x="502920" y="3688080"/>
-            <a:ext cx="320040" cy="335280"/>
+            <a:ext cx="475488" cy="335280"/>
           </a:xfrm>
           <a:prstGeom prst="rect">
             <a:avLst/>
@@ -8749,20 +8533,20 @@
       </p:sp>
       <p:sp>
         <p:nvSpPr>
-          <p:cNvPr id="36" name="Shape 34"/>
-          <p:cNvSpPr/>
-          <p:nvPr/>
-        </p:nvSpPr>
-        <p:spPr>
-          <a:xfrm>
-            <a:off x="1417320" y="3715512"/>
-            <a:ext cx="1097280" cy="280416"/>
+          <p:cNvPr id="29" name="Shape 27"/>
+          <p:cNvSpPr/>
+          <p:nvPr/>
+        </p:nvSpPr>
+        <p:spPr>
+          <a:xfrm>
+            <a:off x="1033272" y="3715512"/>
+            <a:ext cx="2468880" cy="280416"/>
           </a:xfrm>
           <a:prstGeom prst="rect">
             <a:avLst/>
           </a:prstGeom>
           <a:solidFill>
-            <a:srgbClr val="A6C1D9"/>
+            <a:srgbClr val="E2E8F0"/>
           </a:solidFill>
           <a:ln w="13970">
             <a:solidFill>
@@ -8774,14 +8558,14 @@
       </p:sp>
       <p:sp>
         <p:nvSpPr>
-          <p:cNvPr id="37" name="Text 35"/>
-          <p:cNvSpPr/>
-          <p:nvPr/>
-        </p:nvSpPr>
-        <p:spPr>
-          <a:xfrm>
-            <a:off x="1463040" y="3715512"/>
-            <a:ext cx="1005840" cy="280416"/>
+          <p:cNvPr id="30" name="Text 28"/>
+          <p:cNvSpPr/>
+          <p:nvPr/>
+        </p:nvSpPr>
+        <p:spPr>
+          <a:xfrm>
+            <a:off x="1069848" y="3706368"/>
+            <a:ext cx="2395728" cy="298704"/>
           </a:xfrm>
           <a:prstGeom prst="rect">
             <a:avLst/>
@@ -8813,14 +8597,14 @@
       </p:sp>
       <p:sp>
         <p:nvSpPr>
-          <p:cNvPr id="38" name="Text 36"/>
+          <p:cNvPr id="31" name="Text 29"/>
           <p:cNvSpPr/>
           <p:nvPr/>
         </p:nvSpPr>
         <p:spPr>
           <a:xfrm>
             <a:off x="502920" y="3352800"/>
-            <a:ext cx="320040" cy="335280"/>
+            <a:ext cx="475488" cy="335280"/>
           </a:xfrm>
           <a:prstGeom prst="rect">
             <a:avLst/>
@@ -8852,20 +8636,20 @@
       </p:sp>
       <p:sp>
         <p:nvSpPr>
-          <p:cNvPr id="39" name="Shape 37"/>
-          <p:cNvSpPr/>
-          <p:nvPr/>
-        </p:nvSpPr>
-        <p:spPr>
-          <a:xfrm>
-            <a:off x="1417320" y="3380232"/>
-            <a:ext cx="1097280" cy="280416"/>
+          <p:cNvPr id="32" name="Shape 30"/>
+          <p:cNvSpPr/>
+          <p:nvPr/>
+        </p:nvSpPr>
+        <p:spPr>
+          <a:xfrm>
+            <a:off x="1033272" y="3380232"/>
+            <a:ext cx="2468880" cy="280416"/>
           </a:xfrm>
           <a:prstGeom prst="rect">
             <a:avLst/>
           </a:prstGeom>
           <a:solidFill>
-            <a:srgbClr val="A6C1D9"/>
+            <a:srgbClr val="E2E8F0"/>
           </a:solidFill>
           <a:ln w="13970">
             <a:solidFill>
@@ -8877,14 +8661,14 @@
       </p:sp>
       <p:sp>
         <p:nvSpPr>
-          <p:cNvPr id="40" name="Text 38"/>
-          <p:cNvSpPr/>
-          <p:nvPr/>
-        </p:nvSpPr>
-        <p:spPr>
-          <a:xfrm>
-            <a:off x="1463040" y="3380232"/>
-            <a:ext cx="1005840" cy="280416"/>
+          <p:cNvPr id="33" name="Text 31"/>
+          <p:cNvSpPr/>
+          <p:nvPr/>
+        </p:nvSpPr>
+        <p:spPr>
+          <a:xfrm>
+            <a:off x="1069848" y="3371088"/>
+            <a:ext cx="2395728" cy="298704"/>
           </a:xfrm>
           <a:prstGeom prst="rect">
             <a:avLst/>
@@ -8916,14 +8700,14 @@
       </p:sp>
       <p:sp>
         <p:nvSpPr>
-          <p:cNvPr id="41" name="Text 39"/>
+          <p:cNvPr id="34" name="Text 32"/>
           <p:cNvSpPr/>
           <p:nvPr/>
         </p:nvSpPr>
         <p:spPr>
           <a:xfrm>
             <a:off x="502920" y="3017520"/>
-            <a:ext cx="320040" cy="335280"/>
+            <a:ext cx="475488" cy="335280"/>
           </a:xfrm>
           <a:prstGeom prst="rect">
             <a:avLst/>
@@ -8955,20 +8739,20 @@
       </p:sp>
       <p:sp>
         <p:nvSpPr>
-          <p:cNvPr id="42" name="Shape 40"/>
-          <p:cNvSpPr/>
-          <p:nvPr/>
-        </p:nvSpPr>
-        <p:spPr>
-          <a:xfrm>
-            <a:off x="1417320" y="3044952"/>
-            <a:ext cx="1097280" cy="280416"/>
+          <p:cNvPr id="35" name="Shape 33"/>
+          <p:cNvSpPr/>
+          <p:nvPr/>
+        </p:nvSpPr>
+        <p:spPr>
+          <a:xfrm>
+            <a:off x="1033272" y="3044952"/>
+            <a:ext cx="2468880" cy="280416"/>
           </a:xfrm>
           <a:prstGeom prst="rect">
             <a:avLst/>
           </a:prstGeom>
           <a:solidFill>
-            <a:srgbClr val="C5B4E3"/>
+            <a:srgbClr val="E2E8F0"/>
           </a:solidFill>
           <a:ln w="13970">
             <a:solidFill>
@@ -8980,14 +8764,14 @@
       </p:sp>
       <p:sp>
         <p:nvSpPr>
-          <p:cNvPr id="43" name="Text 41"/>
-          <p:cNvSpPr/>
-          <p:nvPr/>
-        </p:nvSpPr>
-        <p:spPr>
-          <a:xfrm>
-            <a:off x="1463040" y="3044952"/>
-            <a:ext cx="1005840" cy="280416"/>
+          <p:cNvPr id="36" name="Text 34"/>
+          <p:cNvSpPr/>
+          <p:nvPr/>
+        </p:nvSpPr>
+        <p:spPr>
+          <a:xfrm>
+            <a:off x="1069848" y="3035808"/>
+            <a:ext cx="2395728" cy="298704"/>
           </a:xfrm>
           <a:prstGeom prst="rect">
             <a:avLst/>
@@ -9019,14 +8803,14 @@
       </p:sp>
       <p:sp>
         <p:nvSpPr>
-          <p:cNvPr id="44" name="Text 42"/>
+          <p:cNvPr id="37" name="Text 35"/>
           <p:cNvSpPr/>
           <p:nvPr/>
         </p:nvSpPr>
         <p:spPr>
           <a:xfrm>
             <a:off x="502920" y="2682240"/>
-            <a:ext cx="320040" cy="335280"/>
+            <a:ext cx="475488" cy="335280"/>
           </a:xfrm>
           <a:prstGeom prst="rect">
             <a:avLst/>
@@ -9058,20 +8842,20 @@
       </p:sp>
       <p:sp>
         <p:nvSpPr>
-          <p:cNvPr id="45" name="Shape 43"/>
-          <p:cNvSpPr/>
-          <p:nvPr/>
-        </p:nvSpPr>
-        <p:spPr>
-          <a:xfrm>
-            <a:off x="1472184" y="2709672"/>
-            <a:ext cx="987552" cy="280416"/>
+          <p:cNvPr id="38" name="Shape 36"/>
+          <p:cNvSpPr/>
+          <p:nvPr/>
+        </p:nvSpPr>
+        <p:spPr>
+          <a:xfrm>
+            <a:off x="1033272" y="2709672"/>
+            <a:ext cx="2468880" cy="280416"/>
           </a:xfrm>
           <a:prstGeom prst="rect">
             <a:avLst/>
           </a:prstGeom>
           <a:solidFill>
-            <a:srgbClr val="C5B4E3"/>
+            <a:srgbClr val="E2E8F0"/>
           </a:solidFill>
           <a:ln w="13970">
             <a:solidFill>
@@ -9083,14 +8867,14 @@
       </p:sp>
       <p:sp>
         <p:nvSpPr>
-          <p:cNvPr id="46" name="Text 44"/>
-          <p:cNvSpPr/>
-          <p:nvPr/>
-        </p:nvSpPr>
-        <p:spPr>
-          <a:xfrm>
-            <a:off x="1517904" y="2709672"/>
-            <a:ext cx="896112" cy="280416"/>
+          <p:cNvPr id="39" name="Text 37"/>
+          <p:cNvSpPr/>
+          <p:nvPr/>
+        </p:nvSpPr>
+        <p:spPr>
+          <a:xfrm>
+            <a:off x="1069848" y="2700528"/>
+            <a:ext cx="2395728" cy="298704"/>
           </a:xfrm>
           <a:prstGeom prst="rect">
             <a:avLst/>
@@ -9122,14 +8906,14 @@
       </p:sp>
       <p:sp>
         <p:nvSpPr>
-          <p:cNvPr id="47" name="Text 45"/>
+          <p:cNvPr id="40" name="Text 38"/>
           <p:cNvSpPr/>
           <p:nvPr/>
         </p:nvSpPr>
         <p:spPr>
           <a:xfrm>
             <a:off x="502920" y="2346960"/>
-            <a:ext cx="320040" cy="335280"/>
+            <a:ext cx="475488" cy="335280"/>
           </a:xfrm>
           <a:prstGeom prst="rect">
             <a:avLst/>
@@ -9161,20 +8945,20 @@
       </p:sp>
       <p:sp>
         <p:nvSpPr>
-          <p:cNvPr id="48" name="Shape 46"/>
-          <p:cNvSpPr/>
-          <p:nvPr/>
-        </p:nvSpPr>
-        <p:spPr>
-          <a:xfrm>
-            <a:off x="1472184" y="2374392"/>
-            <a:ext cx="987552" cy="280416"/>
+          <p:cNvPr id="41" name="Shape 39"/>
+          <p:cNvSpPr/>
+          <p:nvPr/>
+        </p:nvSpPr>
+        <p:spPr>
+          <a:xfrm>
+            <a:off x="1033272" y="2374392"/>
+            <a:ext cx="2468880" cy="280416"/>
           </a:xfrm>
           <a:prstGeom prst="rect">
             <a:avLst/>
           </a:prstGeom>
           <a:solidFill>
-            <a:srgbClr val="C5B4E3"/>
+            <a:srgbClr val="E2E8F0"/>
           </a:solidFill>
           <a:ln w="13970">
             <a:solidFill>
@@ -9186,14 +8970,14 @@
       </p:sp>
       <p:sp>
         <p:nvSpPr>
-          <p:cNvPr id="49" name="Text 47"/>
-          <p:cNvSpPr/>
-          <p:nvPr/>
-        </p:nvSpPr>
-        <p:spPr>
-          <a:xfrm>
-            <a:off x="1517904" y="2374392"/>
-            <a:ext cx="896112" cy="280416"/>
+          <p:cNvPr id="42" name="Text 40"/>
+          <p:cNvSpPr/>
+          <p:nvPr/>
+        </p:nvSpPr>
+        <p:spPr>
+          <a:xfrm>
+            <a:off x="1069848" y="2365248"/>
+            <a:ext cx="2395728" cy="298704"/>
           </a:xfrm>
           <a:prstGeom prst="rect">
             <a:avLst/>
@@ -9225,14 +9009,14 @@
       </p:sp>
       <p:sp>
         <p:nvSpPr>
-          <p:cNvPr id="50" name="Text 48"/>
+          <p:cNvPr id="43" name="Text 41"/>
           <p:cNvSpPr/>
           <p:nvPr/>
         </p:nvSpPr>
         <p:spPr>
           <a:xfrm>
             <a:off x="502920" y="2011680"/>
-            <a:ext cx="320040" cy="335280"/>
+            <a:ext cx="475488" cy="335280"/>
           </a:xfrm>
           <a:prstGeom prst="rect">
             <a:avLst/>
@@ -9264,20 +9048,20 @@
       </p:sp>
       <p:sp>
         <p:nvSpPr>
-          <p:cNvPr id="51" name="Shape 49"/>
-          <p:cNvSpPr/>
-          <p:nvPr/>
-        </p:nvSpPr>
-        <p:spPr>
-          <a:xfrm>
-            <a:off x="1417320" y="2039112"/>
-            <a:ext cx="1097280" cy="280416"/>
+          <p:cNvPr id="44" name="Shape 42"/>
+          <p:cNvSpPr/>
+          <p:nvPr/>
+        </p:nvSpPr>
+        <p:spPr>
+          <a:xfrm>
+            <a:off x="1033272" y="2039112"/>
+            <a:ext cx="2468880" cy="280416"/>
           </a:xfrm>
           <a:prstGeom prst="rect">
             <a:avLst/>
           </a:prstGeom>
           <a:solidFill>
-            <a:srgbClr val="93B3A0"/>
+            <a:srgbClr val="E2E8F0"/>
           </a:solidFill>
           <a:ln w="13970">
             <a:solidFill>
@@ -9289,14 +9073,14 @@
       </p:sp>
       <p:sp>
         <p:nvSpPr>
-          <p:cNvPr id="52" name="Text 50"/>
-          <p:cNvSpPr/>
-          <p:nvPr/>
-        </p:nvSpPr>
-        <p:spPr>
-          <a:xfrm>
-            <a:off x="1463040" y="2039112"/>
-            <a:ext cx="1005840" cy="280416"/>
+          <p:cNvPr id="45" name="Text 43"/>
+          <p:cNvSpPr/>
+          <p:nvPr/>
+        </p:nvSpPr>
+        <p:spPr>
+          <a:xfrm>
+            <a:off x="1069848" y="2029968"/>
+            <a:ext cx="2395728" cy="298704"/>
           </a:xfrm>
           <a:prstGeom prst="rect">
             <a:avLst/>
@@ -9328,14 +9112,14 @@
       </p:sp>
       <p:sp>
         <p:nvSpPr>
-          <p:cNvPr id="53" name="Text 51"/>
+          <p:cNvPr id="46" name="Text 44"/>
           <p:cNvSpPr/>
           <p:nvPr/>
         </p:nvSpPr>
         <p:spPr>
           <a:xfrm>
             <a:off x="502920" y="6080760"/>
-            <a:ext cx="2926080" cy="228600"/>
+            <a:ext cx="3108960" cy="228600"/>
           </a:xfrm>
           <a:prstGeom prst="rect">
             <a:avLst/>
@@ -9380,25 +9164,28 @@
           </p:nvPr>
         </p:nvGraphicFramePr>
         <p:xfrm>
-          <a:off x="3749040" y="1645920"/>
-          <a:ext cx="6805879" cy="914400"/>
+          <a:off x="3886200" y="1645920"/>
+          <a:ext cx="7674559" cy="914400"/>
         </p:xfrm>
         <a:graphic>
           <a:graphicData uri="http://schemas.openxmlformats.org/drawingml/2006/table">
             <a:tbl>
               <a:tblPr/>
               <a:tblGrid>
-                <a:gridCol w="457200"/>
-                <a:gridCol w="457200"/>
-                <a:gridCol w="868680"/>
-                <a:gridCol w="1188720"/>
-                <a:gridCol w="749808"/>
-                <a:gridCol w="749808"/>
-                <a:gridCol w="658368"/>
-                <a:gridCol w="658368"/>
-                <a:gridCol w="1161288"/>
+                <a:gridCol w="411480"/>
+                <a:gridCol w="411480"/>
+                <a:gridCol w="640080"/>
+                <a:gridCol w="1051560"/>
+                <a:gridCol w="640080"/>
+                <a:gridCol w="640080"/>
+                <a:gridCol w="502920"/>
+                <a:gridCol w="640080"/>
+                <a:gridCol w="640080"/>
+                <a:gridCol w="640080"/>
+                <a:gridCol w="640080"/>
+                <a:gridCol w="850392"/>
               </a:tblGrid>
-              <a:tr h="320040">
+              <a:tr h="313509">
                 <a:tc>
                   <a:txBody>
                     <a:bodyPr/>
@@ -9408,14 +9195,14 @@
                         <a:buNone/>
                       </a:pPr>
                       <a:r>
-                        <a:rPr lang="en-US" sz="1000" b="1" dirty="0">
+                        <a:rPr lang="en-US" sz="900" b="1" dirty="0">
                           <a:solidFill>
                             <a:srgbClr val="FFFFFF"/>
                           </a:solidFill>
                         </a:rPr>
                         <a:t>층</a:t>
                       </a:r>
-                      <a:endParaRPr lang="en-US" sz="1000" dirty="0"/>
+                      <a:endParaRPr lang="en-US" sz="900" dirty="0"/>
                     </a:p>
                   </a:txBody>
                   <a:tcPr marL="91440" marR="91440" marT="45720" marB="45720" anchor="ctr">
@@ -9469,14 +9256,14 @@
                         <a:buNone/>
                       </a:pPr>
                       <a:r>
-                        <a:rPr lang="en-US" sz="1000" b="1" dirty="0">
+                        <a:rPr lang="en-US" sz="900" b="1" dirty="0">
                           <a:solidFill>
                             <a:srgbClr val="FFFFFF"/>
                           </a:solidFill>
                         </a:rPr>
                         <a:t>호실</a:t>
                       </a:r>
-                      <a:endParaRPr lang="en-US" sz="1000" dirty="0"/>
+                      <a:endParaRPr lang="en-US" sz="900" dirty="0"/>
                     </a:p>
                   </a:txBody>
                   <a:tcPr marL="91440" marR="91440" marT="45720" marB="45720" anchor="ctr">
@@ -9530,14 +9317,14 @@
                         <a:buNone/>
                       </a:pPr>
                       <a:r>
-                        <a:rPr lang="en-US" sz="1000" b="1" dirty="0">
+                        <a:rPr lang="en-US" sz="900" b="1" dirty="0">
                           <a:solidFill>
                             <a:srgbClr val="FFFFFF"/>
                           </a:solidFill>
                         </a:rPr>
-                        <a:t>용도/업종</a:t>
+                        <a:t>용도</a:t>
                       </a:r>
-                      <a:endParaRPr lang="en-US" sz="1000" dirty="0"/>
+                      <a:endParaRPr lang="en-US" sz="900" dirty="0"/>
                     </a:p>
                   </a:txBody>
                   <a:tcPr marL="91440" marR="91440" marT="45720" marB="45720" anchor="ctr">
@@ -9591,14 +9378,14 @@
                         <a:buNone/>
                       </a:pPr>
                       <a:r>
-                        <a:rPr lang="en-US" sz="1000" b="1" dirty="0">
+                        <a:rPr lang="en-US" sz="900" b="1" dirty="0">
                           <a:solidFill>
                             <a:srgbClr val="FFFFFF"/>
                           </a:solidFill>
                         </a:rPr>
                         <a:t>임차인</a:t>
                       </a:r>
-                      <a:endParaRPr lang="en-US" sz="1000" dirty="0"/>
+                      <a:endParaRPr lang="en-US" sz="900" dirty="0"/>
                     </a:p>
                   </a:txBody>
                   <a:tcPr marL="91440" marR="91440" marT="45720" marB="45720" anchor="ctr">
@@ -9652,14 +9439,14 @@
                         <a:buNone/>
                       </a:pPr>
                       <a:r>
-                        <a:rPr lang="en-US" sz="1000" b="1" dirty="0">
+                        <a:rPr lang="en-US" sz="900" b="1" dirty="0">
                           <a:solidFill>
                             <a:srgbClr val="FFFFFF"/>
                           </a:solidFill>
                         </a:rPr>
-                        <a:t>전용면적(㎡)</a:t>
+                        <a:t>임대(㎡)</a:t>
                       </a:r>
-                      <a:endParaRPr lang="en-US" sz="1000" dirty="0"/>
+                      <a:endParaRPr lang="en-US" sz="900" dirty="0"/>
                     </a:p>
                   </a:txBody>
                   <a:tcPr marL="91440" marR="91440" marT="45720" marB="45720" anchor="ctr">
@@ -9713,14 +9500,14 @@
                         <a:buNone/>
                       </a:pPr>
                       <a:r>
-                        <a:rPr lang="en-US" sz="1000" b="1" dirty="0">
+                        <a:rPr lang="en-US" sz="900" b="1" dirty="0">
                           <a:solidFill>
                             <a:srgbClr val="FFFFFF"/>
                           </a:solidFill>
                         </a:rPr>
-                        <a:t>보증금(만원)</a:t>
+                        <a:t>전용(㎡)</a:t>
                       </a:r>
-                      <a:endParaRPr lang="en-US" sz="1000" dirty="0"/>
+                      <a:endParaRPr lang="en-US" sz="900" dirty="0"/>
                     </a:p>
                   </a:txBody>
                   <a:tcPr marL="91440" marR="91440" marT="45720" marB="45720" anchor="ctr">
@@ -9774,14 +9561,14 @@
                         <a:buNone/>
                       </a:pPr>
                       <a:r>
-                        <a:rPr lang="en-US" sz="1000" b="1" dirty="0">
+                        <a:rPr lang="en-US" sz="900" b="1" dirty="0">
                           <a:solidFill>
                             <a:srgbClr val="FFFFFF"/>
                           </a:solidFill>
                         </a:rPr>
-                        <a:t>월세(만원)</a:t>
+                        <a:t>전용률</a:t>
                       </a:r>
-                      <a:endParaRPr lang="en-US" sz="1000" dirty="0"/>
+                      <a:endParaRPr lang="en-US" sz="900" dirty="0"/>
                     </a:p>
                   </a:txBody>
                   <a:tcPr marL="91440" marR="91440" marT="45720" marB="45720" anchor="ctr">
@@ -9835,14 +9622,14 @@
                         <a:buNone/>
                       </a:pPr>
                       <a:r>
-                        <a:rPr lang="en-US" sz="1000" b="1" dirty="0">
+                        <a:rPr lang="en-US" sz="900" b="1" dirty="0">
                           <a:solidFill>
                             <a:srgbClr val="FFFFFF"/>
                           </a:solidFill>
                         </a:rPr>
-                        <a:t>계약종료</a:t>
+                        <a:t>보증금</a:t>
                       </a:r>
-                      <a:endParaRPr lang="en-US" sz="1000" dirty="0"/>
+                      <a:endParaRPr lang="en-US" sz="900" dirty="0"/>
                     </a:p>
                   </a:txBody>
                   <a:tcPr marL="91440" marR="91440" marT="45720" marB="45720" anchor="ctr">
@@ -9896,14 +9683,197 @@
                         <a:buNone/>
                       </a:pPr>
                       <a:r>
-                        <a:rPr lang="en-US" sz="1000" b="1" dirty="0">
+                        <a:rPr lang="en-US" sz="900" b="1" dirty="0">
                           <a:solidFill>
                             <a:srgbClr val="FFFFFF"/>
                           </a:solidFill>
                         </a:rPr>
-                        <a:t>비고</a:t>
+                        <a:t>월세</a:t>
                       </a:r>
-                      <a:endParaRPr lang="en-US" sz="1000" dirty="0"/>
+                      <a:endParaRPr lang="en-US" sz="900" dirty="0"/>
+                    </a:p>
+                  </a:txBody>
+                  <a:tcPr marL="91440" marR="91440" marT="45720" marB="45720" anchor="ctr">
+                    <a:lnL w="12700" cap="flat" cmpd="sng" algn="ctr">
+                      <a:solidFill>
+                        <a:srgbClr val="CBD5E0"/>
+                      </a:solidFill>
+                      <a:prstDash val="solid"/>
+                      <a:round/>
+                      <a:headEnd type="none" w="med" len="med"/>
+                      <a:tailEnd type="none" w="med" len="med"/>
+                    </a:lnL>
+                    <a:lnR w="12700" cap="flat" cmpd="sng" algn="ctr">
+                      <a:solidFill>
+                        <a:srgbClr val="CBD5E0"/>
+                      </a:solidFill>
+                      <a:prstDash val="solid"/>
+                      <a:round/>
+                      <a:headEnd type="none" w="med" len="med"/>
+                      <a:tailEnd type="none" w="med" len="med"/>
+                    </a:lnR>
+                    <a:lnT w="12700" cap="flat" cmpd="sng" algn="ctr">
+                      <a:solidFill>
+                        <a:srgbClr val="CBD5E0"/>
+                      </a:solidFill>
+                      <a:prstDash val="solid"/>
+                      <a:round/>
+                      <a:headEnd type="none" w="med" len="med"/>
+                      <a:tailEnd type="none" w="med" len="med"/>
+                    </a:lnT>
+                    <a:lnB w="12700" cap="flat" cmpd="sng" algn="ctr">
+                      <a:solidFill>
+                        <a:srgbClr val="CBD5E0"/>
+                      </a:solidFill>
+                      <a:prstDash val="solid"/>
+                      <a:round/>
+                      <a:headEnd type="none" w="med" len="med"/>
+                      <a:tailEnd type="none" w="med" len="med"/>
+                    </a:lnB>
+                    <a:solidFill>
+                      <a:srgbClr val="132A3A"/>
+                    </a:solidFill>
+                  </a:tcPr>
+                </a:tc>
+                <a:tc>
+                  <a:txBody>
+                    <a:bodyPr/>
+                    <a:lstStyle/>
+                    <a:p>
+                      <a:pPr algn="ctr" indent="0" marL="0">
+                        <a:buNone/>
+                      </a:pPr>
+                      <a:r>
+                        <a:rPr lang="en-US" sz="900" b="1" dirty="0">
+                          <a:solidFill>
+                            <a:srgbClr val="FFFFFF"/>
+                          </a:solidFill>
+                        </a:rPr>
+                        <a:t>관리비</a:t>
+                      </a:r>
+                      <a:endParaRPr lang="en-US" sz="900" dirty="0"/>
+                    </a:p>
+                  </a:txBody>
+                  <a:tcPr marL="91440" marR="91440" marT="45720" marB="45720" anchor="ctr">
+                    <a:lnL w="12700" cap="flat" cmpd="sng" algn="ctr">
+                      <a:solidFill>
+                        <a:srgbClr val="CBD5E0"/>
+                      </a:solidFill>
+                      <a:prstDash val="solid"/>
+                      <a:round/>
+                      <a:headEnd type="none" w="med" len="med"/>
+                      <a:tailEnd type="none" w="med" len="med"/>
+                    </a:lnL>
+                    <a:lnR w="12700" cap="flat" cmpd="sng" algn="ctr">
+                      <a:solidFill>
+                        <a:srgbClr val="CBD5E0"/>
+                      </a:solidFill>
+                      <a:prstDash val="solid"/>
+                      <a:round/>
+                      <a:headEnd type="none" w="med" len="med"/>
+                      <a:tailEnd type="none" w="med" len="med"/>
+                    </a:lnR>
+                    <a:lnT w="12700" cap="flat" cmpd="sng" algn="ctr">
+                      <a:solidFill>
+                        <a:srgbClr val="CBD5E0"/>
+                      </a:solidFill>
+                      <a:prstDash val="solid"/>
+                      <a:round/>
+                      <a:headEnd type="none" w="med" len="med"/>
+                      <a:tailEnd type="none" w="med" len="med"/>
+                    </a:lnT>
+                    <a:lnB w="12700" cap="flat" cmpd="sng" algn="ctr">
+                      <a:solidFill>
+                        <a:srgbClr val="CBD5E0"/>
+                      </a:solidFill>
+                      <a:prstDash val="solid"/>
+                      <a:round/>
+                      <a:headEnd type="none" w="med" len="med"/>
+                      <a:tailEnd type="none" w="med" len="med"/>
+                    </a:lnB>
+                    <a:solidFill>
+                      <a:srgbClr val="132A3A"/>
+                    </a:solidFill>
+                  </a:tcPr>
+                </a:tc>
+                <a:tc>
+                  <a:txBody>
+                    <a:bodyPr/>
+                    <a:lstStyle/>
+                    <a:p>
+                      <a:pPr algn="ctr" indent="0" marL="0">
+                        <a:buNone/>
+                      </a:pPr>
+                      <a:r>
+                        <a:rPr lang="en-US" sz="900" b="1" dirty="0">
+                          <a:solidFill>
+                            <a:srgbClr val="FFFFFF"/>
+                          </a:solidFill>
+                        </a:rPr>
+                        <a:t>NOC</a:t>
+                      </a:r>
+                      <a:endParaRPr lang="en-US" sz="900" dirty="0"/>
+                    </a:p>
+                  </a:txBody>
+                  <a:tcPr marL="91440" marR="91440" marT="45720" marB="45720" anchor="ctr">
+                    <a:lnL w="12700" cap="flat" cmpd="sng" algn="ctr">
+                      <a:solidFill>
+                        <a:srgbClr val="CBD5E0"/>
+                      </a:solidFill>
+                      <a:prstDash val="solid"/>
+                      <a:round/>
+                      <a:headEnd type="none" w="med" len="med"/>
+                      <a:tailEnd type="none" w="med" len="med"/>
+                    </a:lnL>
+                    <a:lnR w="12700" cap="flat" cmpd="sng" algn="ctr">
+                      <a:solidFill>
+                        <a:srgbClr val="CBD5E0"/>
+                      </a:solidFill>
+                      <a:prstDash val="solid"/>
+                      <a:round/>
+                      <a:headEnd type="none" w="med" len="med"/>
+                      <a:tailEnd type="none" w="med" len="med"/>
+                    </a:lnR>
+                    <a:lnT w="12700" cap="flat" cmpd="sng" algn="ctr">
+                      <a:solidFill>
+                        <a:srgbClr val="CBD5E0"/>
+                      </a:solidFill>
+                      <a:prstDash val="solid"/>
+                      <a:round/>
+                      <a:headEnd type="none" w="med" len="med"/>
+                      <a:tailEnd type="none" w="med" len="med"/>
+                    </a:lnT>
+                    <a:lnB w="12700" cap="flat" cmpd="sng" algn="ctr">
+                      <a:solidFill>
+                        <a:srgbClr val="CBD5E0"/>
+                      </a:solidFill>
+                      <a:prstDash val="solid"/>
+                      <a:round/>
+                      <a:headEnd type="none" w="med" len="med"/>
+                      <a:tailEnd type="none" w="med" len="med"/>
+                    </a:lnB>
+                    <a:solidFill>
+                      <a:srgbClr val="132A3A"/>
+                    </a:solidFill>
+                  </a:tcPr>
+                </a:tc>
+                <a:tc>
+                  <a:txBody>
+                    <a:bodyPr/>
+                    <a:lstStyle/>
+                    <a:p>
+                      <a:pPr algn="ctr" indent="0" marL="0">
+                        <a:buNone/>
+                      </a:pPr>
+                      <a:r>
+                        <a:rPr lang="en-US" sz="900" b="1" dirty="0">
+                          <a:solidFill>
+                            <a:srgbClr val="FFFFFF"/>
+                          </a:solidFill>
+                        </a:rPr>
+                        <a:t>만기일</a:t>
+                      </a:r>
+                      <a:endParaRPr lang="en-US" sz="900" dirty="0"/>
                     </a:p>
                   </a:txBody>
                   <a:tcPr marL="91440" marR="91440" marT="45720" marB="45720" anchor="ctr">
@@ -9949,7 +9919,7 @@
                   </a:tcPr>
                 </a:tc>
               </a:tr>
-              <a:tr h="320040">
+              <a:tr h="313509">
                 <a:tc>
                   <a:txBody>
                     <a:bodyPr/>
@@ -10239,7 +10209,143 @@
                           <a:ea typeface="맑은 고딕" pitchFamily="34" charset="-122"/>
                           <a:cs typeface="맑은 고딕" pitchFamily="34" charset="-120"/>
                         </a:rPr>
-                        <a:t>422.1</a:t>
+                        <a:t>-</a:t>
+                      </a:r>
+                      <a:endParaRPr lang="en-US" sz="850" dirty="0">
+                        <a:latin typeface="맑은 고딕" charset="0"/>
+                        <a:ea typeface="맑은 고딕" charset="0"/>
+                        <a:cs typeface="맑은 고딕" charset="0"/>
+                      </a:endParaRPr>
+                    </a:p>
+                  </a:txBody>
+                  <a:tcPr marL="91440" marR="91440" marT="45720" marB="45720" anchor="ctr">
+                    <a:lnL w="12700" cap="flat" cmpd="sng" algn="ctr">
+                      <a:solidFill>
+                        <a:srgbClr val="CBD5E0"/>
+                      </a:solidFill>
+                      <a:prstDash val="solid"/>
+                      <a:round/>
+                      <a:headEnd type="none" w="med" len="med"/>
+                      <a:tailEnd type="none" w="med" len="med"/>
+                    </a:lnL>
+                    <a:lnR w="12700" cap="flat" cmpd="sng" algn="ctr">
+                      <a:solidFill>
+                        <a:srgbClr val="CBD5E0"/>
+                      </a:solidFill>
+                      <a:prstDash val="solid"/>
+                      <a:round/>
+                      <a:headEnd type="none" w="med" len="med"/>
+                      <a:tailEnd type="none" w="med" len="med"/>
+                    </a:lnR>
+                    <a:lnT w="12700" cap="flat" cmpd="sng" algn="ctr">
+                      <a:solidFill>
+                        <a:srgbClr val="CBD5E0"/>
+                      </a:solidFill>
+                      <a:prstDash val="solid"/>
+                      <a:round/>
+                      <a:headEnd type="none" w="med" len="med"/>
+                      <a:tailEnd type="none" w="med" len="med"/>
+                    </a:lnT>
+                    <a:lnB w="12700" cap="flat" cmpd="sng" algn="ctr">
+                      <a:solidFill>
+                        <a:srgbClr val="CBD5E0"/>
+                      </a:solidFill>
+                      <a:prstDash val="solid"/>
+                      <a:round/>
+                      <a:headEnd type="none" w="med" len="med"/>
+                      <a:tailEnd type="none" w="med" len="med"/>
+                    </a:lnB>
+                    <a:solidFill>
+                      <a:srgbClr val="FBEFE8"/>
+                    </a:solidFill>
+                  </a:tcPr>
+                </a:tc>
+                <a:tc>
+                  <a:txBody>
+                    <a:bodyPr/>
+                    <a:lstStyle/>
+                    <a:p>
+                      <a:pPr algn="r" indent="0" marL="0">
+                        <a:buNone/>
+                      </a:pPr>
+                      <a:r>
+                        <a:rPr lang="en-US" sz="850" b="1" dirty="0">
+                          <a:solidFill>
+                            <a:srgbClr val="B05A2E"/>
+                          </a:solidFill>
+                          <a:latin typeface="맑은 고딕" pitchFamily="34" charset="0"/>
+                          <a:ea typeface="맑은 고딕" pitchFamily="34" charset="-122"/>
+                          <a:cs typeface="맑은 고딕" pitchFamily="34" charset="-120"/>
+                        </a:rPr>
+                        <a:t>-</a:t>
+                      </a:r>
+                      <a:endParaRPr lang="en-US" sz="850" dirty="0">
+                        <a:latin typeface="맑은 고딕" charset="0"/>
+                        <a:ea typeface="맑은 고딕" charset="0"/>
+                        <a:cs typeface="맑은 고딕" charset="0"/>
+                      </a:endParaRPr>
+                    </a:p>
+                  </a:txBody>
+                  <a:tcPr marL="91440" marR="91440" marT="45720" marB="45720" anchor="ctr">
+                    <a:lnL w="12700" cap="flat" cmpd="sng" algn="ctr">
+                      <a:solidFill>
+                        <a:srgbClr val="CBD5E0"/>
+                      </a:solidFill>
+                      <a:prstDash val="solid"/>
+                      <a:round/>
+                      <a:headEnd type="none" w="med" len="med"/>
+                      <a:tailEnd type="none" w="med" len="med"/>
+                    </a:lnL>
+                    <a:lnR w="12700" cap="flat" cmpd="sng" algn="ctr">
+                      <a:solidFill>
+                        <a:srgbClr val="CBD5E0"/>
+                      </a:solidFill>
+                      <a:prstDash val="solid"/>
+                      <a:round/>
+                      <a:headEnd type="none" w="med" len="med"/>
+                      <a:tailEnd type="none" w="med" len="med"/>
+                    </a:lnR>
+                    <a:lnT w="12700" cap="flat" cmpd="sng" algn="ctr">
+                      <a:solidFill>
+                        <a:srgbClr val="CBD5E0"/>
+                      </a:solidFill>
+                      <a:prstDash val="solid"/>
+                      <a:round/>
+                      <a:headEnd type="none" w="med" len="med"/>
+                      <a:tailEnd type="none" w="med" len="med"/>
+                    </a:lnT>
+                    <a:lnB w="12700" cap="flat" cmpd="sng" algn="ctr">
+                      <a:solidFill>
+                        <a:srgbClr val="CBD5E0"/>
+                      </a:solidFill>
+                      <a:prstDash val="solid"/>
+                      <a:round/>
+                      <a:headEnd type="none" w="med" len="med"/>
+                      <a:tailEnd type="none" w="med" len="med"/>
+                    </a:lnB>
+                    <a:solidFill>
+                      <a:srgbClr val="FBEFE8"/>
+                    </a:solidFill>
+                  </a:tcPr>
+                </a:tc>
+                <a:tc>
+                  <a:txBody>
+                    <a:bodyPr/>
+                    <a:lstStyle/>
+                    <a:p>
+                      <a:pPr algn="r" indent="0" marL="0">
+                        <a:buNone/>
+                      </a:pPr>
+                      <a:r>
+                        <a:rPr lang="en-US" sz="850" b="1" dirty="0">
+                          <a:solidFill>
+                            <a:srgbClr val="B05A2E"/>
+                          </a:solidFill>
+                          <a:latin typeface="맑은 고딕" pitchFamily="34" charset="0"/>
+                          <a:ea typeface="맑은 고딕" pitchFamily="34" charset="-122"/>
+                          <a:cs typeface="맑은 고딕" pitchFamily="34" charset="-120"/>
+                        </a:rPr>
+                        <a:t>-</a:t>
                       </a:r>
                       <a:endParaRPr lang="en-US" sz="850" dirty="0">
                         <a:latin typeface="맑은 고딕" charset="0"/>
@@ -10363,7 +10469,7 @@
                     <a:bodyPr/>
                     <a:lstStyle/>
                     <a:p>
-                      <a:pPr algn="r" indent="0" marL="0">
+                      <a:pPr algn="ctr" indent="0" marL="0">
                         <a:buNone/>
                       </a:pPr>
                       <a:r>
@@ -10426,201 +10532,8 @@
                     </a:solidFill>
                   </a:tcPr>
                 </a:tc>
-                <a:tc>
-                  <a:txBody>
-                    <a:bodyPr/>
-                    <a:lstStyle/>
-                    <a:p>
-                      <a:pPr algn="r" indent="0" marL="0">
-                        <a:buNone/>
-                      </a:pPr>
-                      <a:r>
-                        <a:rPr lang="en-US" sz="850" b="1" dirty="0">
-                          <a:solidFill>
-                            <a:srgbClr val="B05A2E"/>
-                          </a:solidFill>
-                          <a:latin typeface="맑은 고딕" pitchFamily="34" charset="0"/>
-                          <a:ea typeface="맑은 고딕" pitchFamily="34" charset="-122"/>
-                          <a:cs typeface="맑은 고딕" pitchFamily="34" charset="-120"/>
-                        </a:rPr>
-                        <a:t>-</a:t>
-                      </a:r>
-                      <a:endParaRPr lang="en-US" sz="850" dirty="0">
-                        <a:latin typeface="맑은 고딕" charset="0"/>
-                        <a:ea typeface="맑은 고딕" charset="0"/>
-                        <a:cs typeface="맑은 고딕" charset="0"/>
-                      </a:endParaRPr>
-                    </a:p>
-                  </a:txBody>
-                  <a:tcPr marL="91440" marR="91440" marT="45720" marB="45720" anchor="ctr">
-                    <a:lnL w="12700" cap="flat" cmpd="sng" algn="ctr">
-                      <a:solidFill>
-                        <a:srgbClr val="CBD5E0"/>
-                      </a:solidFill>
-                      <a:prstDash val="solid"/>
-                      <a:round/>
-                      <a:headEnd type="none" w="med" len="med"/>
-                      <a:tailEnd type="none" w="med" len="med"/>
-                    </a:lnL>
-                    <a:lnR w="12700" cap="flat" cmpd="sng" algn="ctr">
-                      <a:solidFill>
-                        <a:srgbClr val="CBD5E0"/>
-                      </a:solidFill>
-                      <a:prstDash val="solid"/>
-                      <a:round/>
-                      <a:headEnd type="none" w="med" len="med"/>
-                      <a:tailEnd type="none" w="med" len="med"/>
-                    </a:lnR>
-                    <a:lnT w="12700" cap="flat" cmpd="sng" algn="ctr">
-                      <a:solidFill>
-                        <a:srgbClr val="CBD5E0"/>
-                      </a:solidFill>
-                      <a:prstDash val="solid"/>
-                      <a:round/>
-                      <a:headEnd type="none" w="med" len="med"/>
-                      <a:tailEnd type="none" w="med" len="med"/>
-                    </a:lnT>
-                    <a:lnB w="12700" cap="flat" cmpd="sng" algn="ctr">
-                      <a:solidFill>
-                        <a:srgbClr val="CBD5E0"/>
-                      </a:solidFill>
-                      <a:prstDash val="solid"/>
-                      <a:round/>
-                      <a:headEnd type="none" w="med" len="med"/>
-                      <a:tailEnd type="none" w="med" len="med"/>
-                    </a:lnB>
-                    <a:solidFill>
-                      <a:srgbClr val="FBEFE8"/>
-                    </a:solidFill>
-                  </a:tcPr>
-                </a:tc>
-                <a:tc>
-                  <a:txBody>
-                    <a:bodyPr/>
-                    <a:lstStyle/>
-                    <a:p>
-                      <a:pPr algn="ctr" indent="0" marL="0">
-                        <a:buNone/>
-                      </a:pPr>
-                      <a:r>
-                        <a:rPr lang="en-US" sz="850" b="1" dirty="0">
-                          <a:solidFill>
-                            <a:srgbClr val="B05A2E"/>
-                          </a:solidFill>
-                          <a:latin typeface="맑은 고딕" pitchFamily="34" charset="0"/>
-                          <a:ea typeface="맑은 고딕" pitchFamily="34" charset="-122"/>
-                          <a:cs typeface="맑은 고딕" pitchFamily="34" charset="-120"/>
-                        </a:rPr>
-                        <a:t>공실</a:t>
-                      </a:r>
-                      <a:endParaRPr lang="en-US" sz="850" dirty="0">
-                        <a:latin typeface="맑은 고딕" charset="0"/>
-                        <a:ea typeface="맑은 고딕" charset="0"/>
-                        <a:cs typeface="맑은 고딕" charset="0"/>
-                      </a:endParaRPr>
-                    </a:p>
-                  </a:txBody>
-                  <a:tcPr marL="91440" marR="91440" marT="45720" marB="45720" anchor="ctr">
-                    <a:lnL w="12700" cap="flat" cmpd="sng" algn="ctr">
-                      <a:solidFill>
-                        <a:srgbClr val="CBD5E0"/>
-                      </a:solidFill>
-                      <a:prstDash val="solid"/>
-                      <a:round/>
-                      <a:headEnd type="none" w="med" len="med"/>
-                      <a:tailEnd type="none" w="med" len="med"/>
-                    </a:lnL>
-                    <a:lnR w="12700" cap="flat" cmpd="sng" algn="ctr">
-                      <a:solidFill>
-                        <a:srgbClr val="CBD5E0"/>
-                      </a:solidFill>
-                      <a:prstDash val="solid"/>
-                      <a:round/>
-                      <a:headEnd type="none" w="med" len="med"/>
-                      <a:tailEnd type="none" w="med" len="med"/>
-                    </a:lnR>
-                    <a:lnT w="12700" cap="flat" cmpd="sng" algn="ctr">
-                      <a:solidFill>
-                        <a:srgbClr val="CBD5E0"/>
-                      </a:solidFill>
-                      <a:prstDash val="solid"/>
-                      <a:round/>
-                      <a:headEnd type="none" w="med" len="med"/>
-                      <a:tailEnd type="none" w="med" len="med"/>
-                    </a:lnT>
-                    <a:lnB w="12700" cap="flat" cmpd="sng" algn="ctr">
-                      <a:solidFill>
-                        <a:srgbClr val="CBD5E0"/>
-                      </a:solidFill>
-                      <a:prstDash val="solid"/>
-                      <a:round/>
-                      <a:headEnd type="none" w="med" len="med"/>
-                      <a:tailEnd type="none" w="med" len="med"/>
-                    </a:lnB>
-                    <a:solidFill>
-                      <a:srgbClr val="FBEFE8"/>
-                    </a:solidFill>
-                  </a:tcPr>
-                </a:tc>
-                <a:tc>
-                  <a:txBody>
-                    <a:bodyPr/>
-                    <a:lstStyle/>
-                    <a:p>
-                      <a:pPr algn="ctr" indent="0" marL="0">
-                        <a:buNone/>
-                      </a:pPr>
-                      <a:endParaRPr lang="en-US" sz="850" dirty="0">
-                        <a:latin typeface="맑은 고딕" charset="0"/>
-                        <a:ea typeface="맑은 고딕" charset="0"/>
-                        <a:cs typeface="맑은 고딕" charset="0"/>
-                      </a:endParaRPr>
-                    </a:p>
-                  </a:txBody>
-                  <a:tcPr marL="91440" marR="91440" marT="45720" marB="45720" anchor="ctr">
-                    <a:lnL w="12700" cap="flat" cmpd="sng" algn="ctr">
-                      <a:solidFill>
-                        <a:srgbClr val="CBD5E0"/>
-                      </a:solidFill>
-                      <a:prstDash val="solid"/>
-                      <a:round/>
-                      <a:headEnd type="none" w="med" len="med"/>
-                      <a:tailEnd type="none" w="med" len="med"/>
-                    </a:lnL>
-                    <a:lnR w="12700" cap="flat" cmpd="sng" algn="ctr">
-                      <a:solidFill>
-                        <a:srgbClr val="CBD5E0"/>
-                      </a:solidFill>
-                      <a:prstDash val="solid"/>
-                      <a:round/>
-                      <a:headEnd type="none" w="med" len="med"/>
-                      <a:tailEnd type="none" w="med" len="med"/>
-                    </a:lnR>
-                    <a:lnT w="12700" cap="flat" cmpd="sng" algn="ctr">
-                      <a:solidFill>
-                        <a:srgbClr val="CBD5E0"/>
-                      </a:solidFill>
-                      <a:prstDash val="solid"/>
-                      <a:round/>
-                      <a:headEnd type="none" w="med" len="med"/>
-                      <a:tailEnd type="none" w="med" len="med"/>
-                    </a:lnT>
-                    <a:lnB w="12700" cap="flat" cmpd="sng" algn="ctr">
-                      <a:solidFill>
-                        <a:srgbClr val="CBD5E0"/>
-                      </a:solidFill>
-                      <a:prstDash val="solid"/>
-                      <a:round/>
-                      <a:headEnd type="none" w="med" len="med"/>
-                      <a:tailEnd type="none" w="med" len="med"/>
-                    </a:lnB>
-                    <a:solidFill>
-                      <a:srgbClr val="FBEFE8"/>
-                    </a:solidFill>
-                  </a:tcPr>
-                </a:tc>
               </a:tr>
-              <a:tr h="320040">
+              <a:tr h="313509">
                 <a:tc>
                   <a:txBody>
                     <a:bodyPr/>
@@ -10910,7 +10823,143 @@
                           <a:ea typeface="맑은 고딕" pitchFamily="34" charset="-122"/>
                           <a:cs typeface="맑은 고딕" pitchFamily="34" charset="-120"/>
                         </a:rPr>
-                        <a:t>181.8</a:t>
+                        <a:t>-</a:t>
+                      </a:r>
+                      <a:endParaRPr lang="en-US" sz="850" dirty="0">
+                        <a:latin typeface="맑은 고딕" charset="0"/>
+                        <a:ea typeface="맑은 고딕" charset="0"/>
+                        <a:cs typeface="맑은 고딕" charset="0"/>
+                      </a:endParaRPr>
+                    </a:p>
+                  </a:txBody>
+                  <a:tcPr marL="91440" marR="91440" marT="45720" marB="45720" anchor="ctr">
+                    <a:lnL w="12700" cap="flat" cmpd="sng" algn="ctr">
+                      <a:solidFill>
+                        <a:srgbClr val="CBD5E0"/>
+                      </a:solidFill>
+                      <a:prstDash val="solid"/>
+                      <a:round/>
+                      <a:headEnd type="none" w="med" len="med"/>
+                      <a:tailEnd type="none" w="med" len="med"/>
+                    </a:lnL>
+                    <a:lnR w="12700" cap="flat" cmpd="sng" algn="ctr">
+                      <a:solidFill>
+                        <a:srgbClr val="CBD5E0"/>
+                      </a:solidFill>
+                      <a:prstDash val="solid"/>
+                      <a:round/>
+                      <a:headEnd type="none" w="med" len="med"/>
+                      <a:tailEnd type="none" w="med" len="med"/>
+                    </a:lnR>
+                    <a:lnT w="12700" cap="flat" cmpd="sng" algn="ctr">
+                      <a:solidFill>
+                        <a:srgbClr val="CBD5E0"/>
+                      </a:solidFill>
+                      <a:prstDash val="solid"/>
+                      <a:round/>
+                      <a:headEnd type="none" w="med" len="med"/>
+                      <a:tailEnd type="none" w="med" len="med"/>
+                    </a:lnT>
+                    <a:lnB w="12700" cap="flat" cmpd="sng" algn="ctr">
+                      <a:solidFill>
+                        <a:srgbClr val="CBD5E0"/>
+                      </a:solidFill>
+                      <a:prstDash val="solid"/>
+                      <a:round/>
+                      <a:headEnd type="none" w="med" len="med"/>
+                      <a:tailEnd type="none" w="med" len="med"/>
+                    </a:lnB>
+                    <a:solidFill>
+                      <a:srgbClr val="F3F6F7"/>
+                    </a:solidFill>
+                  </a:tcPr>
+                </a:tc>
+                <a:tc>
+                  <a:txBody>
+                    <a:bodyPr/>
+                    <a:lstStyle/>
+                    <a:p>
+                      <a:pPr algn="r" indent="0" marL="0">
+                        <a:buNone/>
+                      </a:pPr>
+                      <a:r>
+                        <a:rPr lang="en-US" sz="850" dirty="0">
+                          <a:solidFill>
+                            <a:srgbClr val="2B2B2B"/>
+                          </a:solidFill>
+                          <a:latin typeface="맑은 고딕" pitchFamily="34" charset="0"/>
+                          <a:ea typeface="맑은 고딕" pitchFamily="34" charset="-122"/>
+                          <a:cs typeface="맑은 고딕" pitchFamily="34" charset="-120"/>
+                        </a:rPr>
+                        <a:t>-</a:t>
+                      </a:r>
+                      <a:endParaRPr lang="en-US" sz="850" dirty="0">
+                        <a:latin typeface="맑은 고딕" charset="0"/>
+                        <a:ea typeface="맑은 고딕" charset="0"/>
+                        <a:cs typeface="맑은 고딕" charset="0"/>
+                      </a:endParaRPr>
+                    </a:p>
+                  </a:txBody>
+                  <a:tcPr marL="91440" marR="91440" marT="45720" marB="45720" anchor="ctr">
+                    <a:lnL w="12700" cap="flat" cmpd="sng" algn="ctr">
+                      <a:solidFill>
+                        <a:srgbClr val="CBD5E0"/>
+                      </a:solidFill>
+                      <a:prstDash val="solid"/>
+                      <a:round/>
+                      <a:headEnd type="none" w="med" len="med"/>
+                      <a:tailEnd type="none" w="med" len="med"/>
+                    </a:lnL>
+                    <a:lnR w="12700" cap="flat" cmpd="sng" algn="ctr">
+                      <a:solidFill>
+                        <a:srgbClr val="CBD5E0"/>
+                      </a:solidFill>
+                      <a:prstDash val="solid"/>
+                      <a:round/>
+                      <a:headEnd type="none" w="med" len="med"/>
+                      <a:tailEnd type="none" w="med" len="med"/>
+                    </a:lnR>
+                    <a:lnT w="12700" cap="flat" cmpd="sng" algn="ctr">
+                      <a:solidFill>
+                        <a:srgbClr val="CBD5E0"/>
+                      </a:solidFill>
+                      <a:prstDash val="solid"/>
+                      <a:round/>
+                      <a:headEnd type="none" w="med" len="med"/>
+                      <a:tailEnd type="none" w="med" len="med"/>
+                    </a:lnT>
+                    <a:lnB w="12700" cap="flat" cmpd="sng" algn="ctr">
+                      <a:solidFill>
+                        <a:srgbClr val="CBD5E0"/>
+                      </a:solidFill>
+                      <a:prstDash val="solid"/>
+                      <a:round/>
+                      <a:headEnd type="none" w="med" len="med"/>
+                      <a:tailEnd type="none" w="med" len="med"/>
+                    </a:lnB>
+                    <a:solidFill>
+                      <a:srgbClr val="F3F6F7"/>
+                    </a:solidFill>
+                  </a:tcPr>
+                </a:tc>
+                <a:tc>
+                  <a:txBody>
+                    <a:bodyPr/>
+                    <a:lstStyle/>
+                    <a:p>
+                      <a:pPr algn="r" indent="0" marL="0">
+                        <a:buNone/>
+                      </a:pPr>
+                      <a:r>
+                        <a:rPr lang="en-US" sz="850" dirty="0">
+                          <a:solidFill>
+                            <a:srgbClr val="2B2B2B"/>
+                          </a:solidFill>
+                          <a:latin typeface="맑은 고딕" pitchFamily="34" charset="0"/>
+                          <a:ea typeface="맑은 고딕" pitchFamily="34" charset="-122"/>
+                          <a:cs typeface="맑은 고딕" pitchFamily="34" charset="-120"/>
+                        </a:rPr>
+                        <a:t>-</a:t>
                       </a:r>
                       <a:endParaRPr lang="en-US" sz="850" dirty="0">
                         <a:latin typeface="맑은 고딕" charset="0"/>
@@ -11034,7 +11083,7 @@
                     <a:bodyPr/>
                     <a:lstStyle/>
                     <a:p>
-                      <a:pPr algn="r" indent="0" marL="0">
+                      <a:pPr algn="ctr" indent="0" marL="0">
                         <a:buNone/>
                       </a:pPr>
                       <a:r>
@@ -11097,190 +11146,8 @@
                     </a:solidFill>
                   </a:tcPr>
                 </a:tc>
-                <a:tc>
-                  <a:txBody>
-                    <a:bodyPr/>
-                    <a:lstStyle/>
-                    <a:p>
-                      <a:pPr algn="r" indent="0" marL="0">
-                        <a:buNone/>
-                      </a:pPr>
-                      <a:r>
-                        <a:rPr lang="en-US" sz="850" dirty="0">
-                          <a:solidFill>
-                            <a:srgbClr val="2B2B2B"/>
-                          </a:solidFill>
-                          <a:latin typeface="맑은 고딕" pitchFamily="34" charset="0"/>
-                          <a:ea typeface="맑은 고딕" pitchFamily="34" charset="-122"/>
-                          <a:cs typeface="맑은 고딕" pitchFamily="34" charset="-120"/>
-                        </a:rPr>
-                        <a:t>2026-11-30</a:t>
-                      </a:r>
-                      <a:endParaRPr lang="en-US" sz="850" dirty="0">
-                        <a:latin typeface="맑은 고딕" charset="0"/>
-                        <a:ea typeface="맑은 고딕" charset="0"/>
-                        <a:cs typeface="맑은 고딕" charset="0"/>
-                      </a:endParaRPr>
-                    </a:p>
-                  </a:txBody>
-                  <a:tcPr marL="91440" marR="91440" marT="45720" marB="45720" anchor="ctr">
-                    <a:lnL w="12700" cap="flat" cmpd="sng" algn="ctr">
-                      <a:solidFill>
-                        <a:srgbClr val="CBD5E0"/>
-                      </a:solidFill>
-                      <a:prstDash val="solid"/>
-                      <a:round/>
-                      <a:headEnd type="none" w="med" len="med"/>
-                      <a:tailEnd type="none" w="med" len="med"/>
-                    </a:lnL>
-                    <a:lnR w="12700" cap="flat" cmpd="sng" algn="ctr">
-                      <a:solidFill>
-                        <a:srgbClr val="CBD5E0"/>
-                      </a:solidFill>
-                      <a:prstDash val="solid"/>
-                      <a:round/>
-                      <a:headEnd type="none" w="med" len="med"/>
-                      <a:tailEnd type="none" w="med" len="med"/>
-                    </a:lnR>
-                    <a:lnT w="12700" cap="flat" cmpd="sng" algn="ctr">
-                      <a:solidFill>
-                        <a:srgbClr val="CBD5E0"/>
-                      </a:solidFill>
-                      <a:prstDash val="solid"/>
-                      <a:round/>
-                      <a:headEnd type="none" w="med" len="med"/>
-                      <a:tailEnd type="none" w="med" len="med"/>
-                    </a:lnT>
-                    <a:lnB w="12700" cap="flat" cmpd="sng" algn="ctr">
-                      <a:solidFill>
-                        <a:srgbClr val="CBD5E0"/>
-                      </a:solidFill>
-                      <a:prstDash val="solid"/>
-                      <a:round/>
-                      <a:headEnd type="none" w="med" len="med"/>
-                      <a:tailEnd type="none" w="med" len="med"/>
-                    </a:lnB>
-                    <a:solidFill>
-                      <a:srgbClr val="F3F6F7"/>
-                    </a:solidFill>
-                  </a:tcPr>
-                </a:tc>
-                <a:tc>
-                  <a:txBody>
-                    <a:bodyPr/>
-                    <a:lstStyle/>
-                    <a:p>
-                      <a:pPr algn="ctr" indent="0" marL="0">
-                        <a:buNone/>
-                      </a:pPr>
-                      <a:endParaRPr lang="en-US" sz="850" dirty="0">
-                        <a:latin typeface="맑은 고딕" charset="0"/>
-                        <a:ea typeface="맑은 고딕" charset="0"/>
-                        <a:cs typeface="맑은 고딕" charset="0"/>
-                      </a:endParaRPr>
-                    </a:p>
-                  </a:txBody>
-                  <a:tcPr marL="91440" marR="91440" marT="45720" marB="45720" anchor="ctr">
-                    <a:lnL w="12700" cap="flat" cmpd="sng" algn="ctr">
-                      <a:solidFill>
-                        <a:srgbClr val="CBD5E0"/>
-                      </a:solidFill>
-                      <a:prstDash val="solid"/>
-                      <a:round/>
-                      <a:headEnd type="none" w="med" len="med"/>
-                      <a:tailEnd type="none" w="med" len="med"/>
-                    </a:lnL>
-                    <a:lnR w="12700" cap="flat" cmpd="sng" algn="ctr">
-                      <a:solidFill>
-                        <a:srgbClr val="CBD5E0"/>
-                      </a:solidFill>
-                      <a:prstDash val="solid"/>
-                      <a:round/>
-                      <a:headEnd type="none" w="med" len="med"/>
-                      <a:tailEnd type="none" w="med" len="med"/>
-                    </a:lnR>
-                    <a:lnT w="12700" cap="flat" cmpd="sng" algn="ctr">
-                      <a:solidFill>
-                        <a:srgbClr val="CBD5E0"/>
-                      </a:solidFill>
-                      <a:prstDash val="solid"/>
-                      <a:round/>
-                      <a:headEnd type="none" w="med" len="med"/>
-                      <a:tailEnd type="none" w="med" len="med"/>
-                    </a:lnT>
-                    <a:lnB w="12700" cap="flat" cmpd="sng" algn="ctr">
-                      <a:solidFill>
-                        <a:srgbClr val="CBD5E0"/>
-                      </a:solidFill>
-                      <a:prstDash val="solid"/>
-                      <a:round/>
-                      <a:headEnd type="none" w="med" len="med"/>
-                      <a:tailEnd type="none" w="med" len="med"/>
-                    </a:lnB>
-                    <a:solidFill>
-                      <a:srgbClr val="F3F6F7"/>
-                    </a:solidFill>
-                  </a:tcPr>
-                </a:tc>
-                <a:tc>
-                  <a:txBody>
-                    <a:bodyPr/>
-                    <a:lstStyle/>
-                    <a:p>
-                      <a:pPr algn="ctr" indent="0" marL="0">
-                        <a:buNone/>
-                      </a:pPr>
-                      <a:endParaRPr lang="en-US" sz="850" dirty="0">
-                        <a:latin typeface="맑은 고딕" charset="0"/>
-                        <a:ea typeface="맑은 고딕" charset="0"/>
-                        <a:cs typeface="맑은 고딕" charset="0"/>
-                      </a:endParaRPr>
-                    </a:p>
-                  </a:txBody>
-                  <a:tcPr marL="91440" marR="91440" marT="45720" marB="45720" anchor="ctr">
-                    <a:lnL w="12700" cap="flat" cmpd="sng" algn="ctr">
-                      <a:solidFill>
-                        <a:srgbClr val="CBD5E0"/>
-                      </a:solidFill>
-                      <a:prstDash val="solid"/>
-                      <a:round/>
-                      <a:headEnd type="none" w="med" len="med"/>
-                      <a:tailEnd type="none" w="med" len="med"/>
-                    </a:lnL>
-                    <a:lnR w="12700" cap="flat" cmpd="sng" algn="ctr">
-                      <a:solidFill>
-                        <a:srgbClr val="CBD5E0"/>
-                      </a:solidFill>
-                      <a:prstDash val="solid"/>
-                      <a:round/>
-                      <a:headEnd type="none" w="med" len="med"/>
-                      <a:tailEnd type="none" w="med" len="med"/>
-                    </a:lnR>
-                    <a:lnT w="12700" cap="flat" cmpd="sng" algn="ctr">
-                      <a:solidFill>
-                        <a:srgbClr val="CBD5E0"/>
-                      </a:solidFill>
-                      <a:prstDash val="solid"/>
-                      <a:round/>
-                      <a:headEnd type="none" w="med" len="med"/>
-                      <a:tailEnd type="none" w="med" len="med"/>
-                    </a:lnT>
-                    <a:lnB w="12700" cap="flat" cmpd="sng" algn="ctr">
-                      <a:solidFill>
-                        <a:srgbClr val="CBD5E0"/>
-                      </a:solidFill>
-                      <a:prstDash val="solid"/>
-                      <a:round/>
-                      <a:headEnd type="none" w="med" len="med"/>
-                      <a:tailEnd type="none" w="med" len="med"/>
-                    </a:lnB>
-                    <a:solidFill>
-                      <a:srgbClr val="F3F6F7"/>
-                    </a:solidFill>
-                  </a:tcPr>
-                </a:tc>
               </a:tr>
-              <a:tr h="320040">
+              <a:tr h="313509">
                 <a:tc>
                   <a:txBody>
                     <a:bodyPr/>
@@ -11570,7 +11437,143 @@
                           <a:ea typeface="맑은 고딕" pitchFamily="34" charset="-122"/>
                           <a:cs typeface="맑은 고딕" pitchFamily="34" charset="-120"/>
                         </a:rPr>
-                        <a:t>209.6</a:t>
+                        <a:t>-</a:t>
+                      </a:r>
+                      <a:endParaRPr lang="en-US" sz="850" dirty="0">
+                        <a:latin typeface="맑은 고딕" charset="0"/>
+                        <a:ea typeface="맑은 고딕" charset="0"/>
+                        <a:cs typeface="맑은 고딕" charset="0"/>
+                      </a:endParaRPr>
+                    </a:p>
+                  </a:txBody>
+                  <a:tcPr marL="91440" marR="91440" marT="45720" marB="45720" anchor="ctr">
+                    <a:lnL w="12700" cap="flat" cmpd="sng" algn="ctr">
+                      <a:solidFill>
+                        <a:srgbClr val="CBD5E0"/>
+                      </a:solidFill>
+                      <a:prstDash val="solid"/>
+                      <a:round/>
+                      <a:headEnd type="none" w="med" len="med"/>
+                      <a:tailEnd type="none" w="med" len="med"/>
+                    </a:lnL>
+                    <a:lnR w="12700" cap="flat" cmpd="sng" algn="ctr">
+                      <a:solidFill>
+                        <a:srgbClr val="CBD5E0"/>
+                      </a:solidFill>
+                      <a:prstDash val="solid"/>
+                      <a:round/>
+                      <a:headEnd type="none" w="med" len="med"/>
+                      <a:tailEnd type="none" w="med" len="med"/>
+                    </a:lnR>
+                    <a:lnT w="12700" cap="flat" cmpd="sng" algn="ctr">
+                      <a:solidFill>
+                        <a:srgbClr val="CBD5E0"/>
+                      </a:solidFill>
+                      <a:prstDash val="solid"/>
+                      <a:round/>
+                      <a:headEnd type="none" w="med" len="med"/>
+                      <a:tailEnd type="none" w="med" len="med"/>
+                    </a:lnT>
+                    <a:lnB w="12700" cap="flat" cmpd="sng" algn="ctr">
+                      <a:solidFill>
+                        <a:srgbClr val="CBD5E0"/>
+                      </a:solidFill>
+                      <a:prstDash val="solid"/>
+                      <a:round/>
+                      <a:headEnd type="none" w="med" len="med"/>
+                      <a:tailEnd type="none" w="med" len="med"/>
+                    </a:lnB>
+                    <a:solidFill>
+                      <a:srgbClr val="FFFFFF"/>
+                    </a:solidFill>
+                  </a:tcPr>
+                </a:tc>
+                <a:tc>
+                  <a:txBody>
+                    <a:bodyPr/>
+                    <a:lstStyle/>
+                    <a:p>
+                      <a:pPr algn="r" indent="0" marL="0">
+                        <a:buNone/>
+                      </a:pPr>
+                      <a:r>
+                        <a:rPr lang="en-US" sz="850" dirty="0">
+                          <a:solidFill>
+                            <a:srgbClr val="2B2B2B"/>
+                          </a:solidFill>
+                          <a:latin typeface="맑은 고딕" pitchFamily="34" charset="0"/>
+                          <a:ea typeface="맑은 고딕" pitchFamily="34" charset="-122"/>
+                          <a:cs typeface="맑은 고딕" pitchFamily="34" charset="-120"/>
+                        </a:rPr>
+                        <a:t>-</a:t>
+                      </a:r>
+                      <a:endParaRPr lang="en-US" sz="850" dirty="0">
+                        <a:latin typeface="맑은 고딕" charset="0"/>
+                        <a:ea typeface="맑은 고딕" charset="0"/>
+                        <a:cs typeface="맑은 고딕" charset="0"/>
+                      </a:endParaRPr>
+                    </a:p>
+                  </a:txBody>
+                  <a:tcPr marL="91440" marR="91440" marT="45720" marB="45720" anchor="ctr">
+                    <a:lnL w="12700" cap="flat" cmpd="sng" algn="ctr">
+                      <a:solidFill>
+                        <a:srgbClr val="CBD5E0"/>
+                      </a:solidFill>
+                      <a:prstDash val="solid"/>
+                      <a:round/>
+                      <a:headEnd type="none" w="med" len="med"/>
+                      <a:tailEnd type="none" w="med" len="med"/>
+                    </a:lnL>
+                    <a:lnR w="12700" cap="flat" cmpd="sng" algn="ctr">
+                      <a:solidFill>
+                        <a:srgbClr val="CBD5E0"/>
+                      </a:solidFill>
+                      <a:prstDash val="solid"/>
+                      <a:round/>
+                      <a:headEnd type="none" w="med" len="med"/>
+                      <a:tailEnd type="none" w="med" len="med"/>
+                    </a:lnR>
+                    <a:lnT w="12700" cap="flat" cmpd="sng" algn="ctr">
+                      <a:solidFill>
+                        <a:srgbClr val="CBD5E0"/>
+                      </a:solidFill>
+                      <a:prstDash val="solid"/>
+                      <a:round/>
+                      <a:headEnd type="none" w="med" len="med"/>
+                      <a:tailEnd type="none" w="med" len="med"/>
+                    </a:lnT>
+                    <a:lnB w="12700" cap="flat" cmpd="sng" algn="ctr">
+                      <a:solidFill>
+                        <a:srgbClr val="CBD5E0"/>
+                      </a:solidFill>
+                      <a:prstDash val="solid"/>
+                      <a:round/>
+                      <a:headEnd type="none" w="med" len="med"/>
+                      <a:tailEnd type="none" w="med" len="med"/>
+                    </a:lnB>
+                    <a:solidFill>
+                      <a:srgbClr val="FFFFFF"/>
+                    </a:solidFill>
+                  </a:tcPr>
+                </a:tc>
+                <a:tc>
+                  <a:txBody>
+                    <a:bodyPr/>
+                    <a:lstStyle/>
+                    <a:p>
+                      <a:pPr algn="r" indent="0" marL="0">
+                        <a:buNone/>
+                      </a:pPr>
+                      <a:r>
+                        <a:rPr lang="en-US" sz="850" dirty="0">
+                          <a:solidFill>
+                            <a:srgbClr val="2B2B2B"/>
+                          </a:solidFill>
+                          <a:latin typeface="맑은 고딕" pitchFamily="34" charset="0"/>
+                          <a:ea typeface="맑은 고딕" pitchFamily="34" charset="-122"/>
+                          <a:cs typeface="맑은 고딕" pitchFamily="34" charset="-120"/>
+                        </a:rPr>
+                        <a:t>-</a:t>
                       </a:r>
                       <a:endParaRPr lang="en-US" sz="850" dirty="0">
                         <a:latin typeface="맑은 고딕" charset="0"/>
@@ -11694,7 +11697,7 @@
                     <a:bodyPr/>
                     <a:lstStyle/>
                     <a:p>
-                      <a:pPr algn="r" indent="0" marL="0">
+                      <a:pPr algn="ctr" indent="0" marL="0">
                         <a:buNone/>
                       </a:pPr>
                       <a:r>
@@ -11757,190 +11760,8 @@
                     </a:solidFill>
                   </a:tcPr>
                 </a:tc>
-                <a:tc>
-                  <a:txBody>
-                    <a:bodyPr/>
-                    <a:lstStyle/>
-                    <a:p>
-                      <a:pPr algn="r" indent="0" marL="0">
-                        <a:buNone/>
-                      </a:pPr>
-                      <a:r>
-                        <a:rPr lang="en-US" sz="850" dirty="0">
-                          <a:solidFill>
-                            <a:srgbClr val="2B2B2B"/>
-                          </a:solidFill>
-                          <a:latin typeface="맑은 고딕" pitchFamily="34" charset="0"/>
-                          <a:ea typeface="맑은 고딕" pitchFamily="34" charset="-122"/>
-                          <a:cs typeface="맑은 고딕" pitchFamily="34" charset="-120"/>
-                        </a:rPr>
-                        <a:t>2027-03-31</a:t>
-                      </a:r>
-                      <a:endParaRPr lang="en-US" sz="850" dirty="0">
-                        <a:latin typeface="맑은 고딕" charset="0"/>
-                        <a:ea typeface="맑은 고딕" charset="0"/>
-                        <a:cs typeface="맑은 고딕" charset="0"/>
-                      </a:endParaRPr>
-                    </a:p>
-                  </a:txBody>
-                  <a:tcPr marL="91440" marR="91440" marT="45720" marB="45720" anchor="ctr">
-                    <a:lnL w="12700" cap="flat" cmpd="sng" algn="ctr">
-                      <a:solidFill>
-                        <a:srgbClr val="CBD5E0"/>
-                      </a:solidFill>
-                      <a:prstDash val="solid"/>
-                      <a:round/>
-                      <a:headEnd type="none" w="med" len="med"/>
-                      <a:tailEnd type="none" w="med" len="med"/>
-                    </a:lnL>
-                    <a:lnR w="12700" cap="flat" cmpd="sng" algn="ctr">
-                      <a:solidFill>
-                        <a:srgbClr val="CBD5E0"/>
-                      </a:solidFill>
-                      <a:prstDash val="solid"/>
-                      <a:round/>
-                      <a:headEnd type="none" w="med" len="med"/>
-                      <a:tailEnd type="none" w="med" len="med"/>
-                    </a:lnR>
-                    <a:lnT w="12700" cap="flat" cmpd="sng" algn="ctr">
-                      <a:solidFill>
-                        <a:srgbClr val="CBD5E0"/>
-                      </a:solidFill>
-                      <a:prstDash val="solid"/>
-                      <a:round/>
-                      <a:headEnd type="none" w="med" len="med"/>
-                      <a:tailEnd type="none" w="med" len="med"/>
-                    </a:lnT>
-                    <a:lnB w="12700" cap="flat" cmpd="sng" algn="ctr">
-                      <a:solidFill>
-                        <a:srgbClr val="CBD5E0"/>
-                      </a:solidFill>
-                      <a:prstDash val="solid"/>
-                      <a:round/>
-                      <a:headEnd type="none" w="med" len="med"/>
-                      <a:tailEnd type="none" w="med" len="med"/>
-                    </a:lnB>
-                    <a:solidFill>
-                      <a:srgbClr val="FFFFFF"/>
-                    </a:solidFill>
-                  </a:tcPr>
-                </a:tc>
-                <a:tc>
-                  <a:txBody>
-                    <a:bodyPr/>
-                    <a:lstStyle/>
-                    <a:p>
-                      <a:pPr algn="ctr" indent="0" marL="0">
-                        <a:buNone/>
-                      </a:pPr>
-                      <a:endParaRPr lang="en-US" sz="850" dirty="0">
-                        <a:latin typeface="맑은 고딕" charset="0"/>
-                        <a:ea typeface="맑은 고딕" charset="0"/>
-                        <a:cs typeface="맑은 고딕" charset="0"/>
-                      </a:endParaRPr>
-                    </a:p>
-                  </a:txBody>
-                  <a:tcPr marL="91440" marR="91440" marT="45720" marB="45720" anchor="ctr">
-                    <a:lnL w="12700" cap="flat" cmpd="sng" algn="ctr">
-                      <a:solidFill>
-                        <a:srgbClr val="CBD5E0"/>
-                      </a:solidFill>
-                      <a:prstDash val="solid"/>
-                      <a:round/>
-                      <a:headEnd type="none" w="med" len="med"/>
-                      <a:tailEnd type="none" w="med" len="med"/>
-                    </a:lnL>
-                    <a:lnR w="12700" cap="flat" cmpd="sng" algn="ctr">
-                      <a:solidFill>
-                        <a:srgbClr val="CBD5E0"/>
-                      </a:solidFill>
-                      <a:prstDash val="solid"/>
-                      <a:round/>
-                      <a:headEnd type="none" w="med" len="med"/>
-                      <a:tailEnd type="none" w="med" len="med"/>
-                    </a:lnR>
-                    <a:lnT w="12700" cap="flat" cmpd="sng" algn="ctr">
-                      <a:solidFill>
-                        <a:srgbClr val="CBD5E0"/>
-                      </a:solidFill>
-                      <a:prstDash val="solid"/>
-                      <a:round/>
-                      <a:headEnd type="none" w="med" len="med"/>
-                      <a:tailEnd type="none" w="med" len="med"/>
-                    </a:lnT>
-                    <a:lnB w="12700" cap="flat" cmpd="sng" algn="ctr">
-                      <a:solidFill>
-                        <a:srgbClr val="CBD5E0"/>
-                      </a:solidFill>
-                      <a:prstDash val="solid"/>
-                      <a:round/>
-                      <a:headEnd type="none" w="med" len="med"/>
-                      <a:tailEnd type="none" w="med" len="med"/>
-                    </a:lnB>
-                    <a:solidFill>
-                      <a:srgbClr val="FFFFFF"/>
-                    </a:solidFill>
-                  </a:tcPr>
-                </a:tc>
-                <a:tc>
-                  <a:txBody>
-                    <a:bodyPr/>
-                    <a:lstStyle/>
-                    <a:p>
-                      <a:pPr algn="ctr" indent="0" marL="0">
-                        <a:buNone/>
-                      </a:pPr>
-                      <a:endParaRPr lang="en-US" sz="850" dirty="0">
-                        <a:latin typeface="맑은 고딕" charset="0"/>
-                        <a:ea typeface="맑은 고딕" charset="0"/>
-                        <a:cs typeface="맑은 고딕" charset="0"/>
-                      </a:endParaRPr>
-                    </a:p>
-                  </a:txBody>
-                  <a:tcPr marL="91440" marR="91440" marT="45720" marB="45720" anchor="ctr">
-                    <a:lnL w="12700" cap="flat" cmpd="sng" algn="ctr">
-                      <a:solidFill>
-                        <a:srgbClr val="CBD5E0"/>
-                      </a:solidFill>
-                      <a:prstDash val="solid"/>
-                      <a:round/>
-                      <a:headEnd type="none" w="med" len="med"/>
-                      <a:tailEnd type="none" w="med" len="med"/>
-                    </a:lnL>
-                    <a:lnR w="12700" cap="flat" cmpd="sng" algn="ctr">
-                      <a:solidFill>
-                        <a:srgbClr val="CBD5E0"/>
-                      </a:solidFill>
-                      <a:prstDash val="solid"/>
-                      <a:round/>
-                      <a:headEnd type="none" w="med" len="med"/>
-                      <a:tailEnd type="none" w="med" len="med"/>
-                    </a:lnR>
-                    <a:lnT w="12700" cap="flat" cmpd="sng" algn="ctr">
-                      <a:solidFill>
-                        <a:srgbClr val="CBD5E0"/>
-                      </a:solidFill>
-                      <a:prstDash val="solid"/>
-                      <a:round/>
-                      <a:headEnd type="none" w="med" len="med"/>
-                      <a:tailEnd type="none" w="med" len="med"/>
-                    </a:lnT>
-                    <a:lnB w="12700" cap="flat" cmpd="sng" algn="ctr">
-                      <a:solidFill>
-                        <a:srgbClr val="CBD5E0"/>
-                      </a:solidFill>
-                      <a:prstDash val="solid"/>
-                      <a:round/>
-                      <a:headEnd type="none" w="med" len="med"/>
-                      <a:tailEnd type="none" w="med" len="med"/>
-                    </a:lnB>
-                    <a:solidFill>
-                      <a:srgbClr val="FFFFFF"/>
-                    </a:solidFill>
-                  </a:tcPr>
-                </a:tc>
               </a:tr>
-              <a:tr h="320040">
+              <a:tr h="313509">
                 <a:tc>
                   <a:txBody>
                     <a:bodyPr/>
@@ -12230,7 +12051,143 @@
                           <a:ea typeface="맑은 고딕" pitchFamily="34" charset="-122"/>
                           <a:cs typeface="맑은 고딕" pitchFamily="34" charset="-120"/>
                         </a:rPr>
-                        <a:t>209.6</a:t>
+                        <a:t>-</a:t>
+                      </a:r>
+                      <a:endParaRPr lang="en-US" sz="850" dirty="0">
+                        <a:latin typeface="맑은 고딕" charset="0"/>
+                        <a:ea typeface="맑은 고딕" charset="0"/>
+                        <a:cs typeface="맑은 고딕" charset="0"/>
+                      </a:endParaRPr>
+                    </a:p>
+                  </a:txBody>
+                  <a:tcPr marL="91440" marR="91440" marT="45720" marB="45720" anchor="ctr">
+                    <a:lnL w="12700" cap="flat" cmpd="sng" algn="ctr">
+                      <a:solidFill>
+                        <a:srgbClr val="CBD5E0"/>
+                      </a:solidFill>
+                      <a:prstDash val="solid"/>
+                      <a:round/>
+                      <a:headEnd type="none" w="med" len="med"/>
+                      <a:tailEnd type="none" w="med" len="med"/>
+                    </a:lnL>
+                    <a:lnR w="12700" cap="flat" cmpd="sng" algn="ctr">
+                      <a:solidFill>
+                        <a:srgbClr val="CBD5E0"/>
+                      </a:solidFill>
+                      <a:prstDash val="solid"/>
+                      <a:round/>
+                      <a:headEnd type="none" w="med" len="med"/>
+                      <a:tailEnd type="none" w="med" len="med"/>
+                    </a:lnR>
+                    <a:lnT w="12700" cap="flat" cmpd="sng" algn="ctr">
+                      <a:solidFill>
+                        <a:srgbClr val="CBD5E0"/>
+                      </a:solidFill>
+                      <a:prstDash val="solid"/>
+                      <a:round/>
+                      <a:headEnd type="none" w="med" len="med"/>
+                      <a:tailEnd type="none" w="med" len="med"/>
+                    </a:lnT>
+                    <a:lnB w="12700" cap="flat" cmpd="sng" algn="ctr">
+                      <a:solidFill>
+                        <a:srgbClr val="CBD5E0"/>
+                      </a:solidFill>
+                      <a:prstDash val="solid"/>
+                      <a:round/>
+                      <a:headEnd type="none" w="med" len="med"/>
+                      <a:tailEnd type="none" w="med" len="med"/>
+                    </a:lnB>
+                    <a:solidFill>
+                      <a:srgbClr val="F3F6F7"/>
+                    </a:solidFill>
+                  </a:tcPr>
+                </a:tc>
+                <a:tc>
+                  <a:txBody>
+                    <a:bodyPr/>
+                    <a:lstStyle/>
+                    <a:p>
+                      <a:pPr algn="r" indent="0" marL="0">
+                        <a:buNone/>
+                      </a:pPr>
+                      <a:r>
+                        <a:rPr lang="en-US" sz="850" dirty="0">
+                          <a:solidFill>
+                            <a:srgbClr val="2B2B2B"/>
+                          </a:solidFill>
+                          <a:latin typeface="맑은 고딕" pitchFamily="34" charset="0"/>
+                          <a:ea typeface="맑은 고딕" pitchFamily="34" charset="-122"/>
+                          <a:cs typeface="맑은 고딕" pitchFamily="34" charset="-120"/>
+                        </a:rPr>
+                        <a:t>-</a:t>
+                      </a:r>
+                      <a:endParaRPr lang="en-US" sz="850" dirty="0">
+                        <a:latin typeface="맑은 고딕" charset="0"/>
+                        <a:ea typeface="맑은 고딕" charset="0"/>
+                        <a:cs typeface="맑은 고딕" charset="0"/>
+                      </a:endParaRPr>
+                    </a:p>
+                  </a:txBody>
+                  <a:tcPr marL="91440" marR="91440" marT="45720" marB="45720" anchor="ctr">
+                    <a:lnL w="12700" cap="flat" cmpd="sng" algn="ctr">
+                      <a:solidFill>
+                        <a:srgbClr val="CBD5E0"/>
+                      </a:solidFill>
+                      <a:prstDash val="solid"/>
+                      <a:round/>
+                      <a:headEnd type="none" w="med" len="med"/>
+                      <a:tailEnd type="none" w="med" len="med"/>
+                    </a:lnL>
+                    <a:lnR w="12700" cap="flat" cmpd="sng" algn="ctr">
+                      <a:solidFill>
+                        <a:srgbClr val="CBD5E0"/>
+                      </a:solidFill>
+                      <a:prstDash val="solid"/>
+                      <a:round/>
+                      <a:headEnd type="none" w="med" len="med"/>
+                      <a:tailEnd type="none" w="med" len="med"/>
+                    </a:lnR>
+                    <a:lnT w="12700" cap="flat" cmpd="sng" algn="ctr">
+                      <a:solidFill>
+                        <a:srgbClr val="CBD5E0"/>
+                      </a:solidFill>
+                      <a:prstDash val="solid"/>
+                      <a:round/>
+                      <a:headEnd type="none" w="med" len="med"/>
+                      <a:tailEnd type="none" w="med" len="med"/>
+                    </a:lnT>
+                    <a:lnB w="12700" cap="flat" cmpd="sng" algn="ctr">
+                      <a:solidFill>
+                        <a:srgbClr val="CBD5E0"/>
+                      </a:solidFill>
+                      <a:prstDash val="solid"/>
+                      <a:round/>
+                      <a:headEnd type="none" w="med" len="med"/>
+                      <a:tailEnd type="none" w="med" len="med"/>
+                    </a:lnB>
+                    <a:solidFill>
+                      <a:srgbClr val="F3F6F7"/>
+                    </a:solidFill>
+                  </a:tcPr>
+                </a:tc>
+                <a:tc>
+                  <a:txBody>
+                    <a:bodyPr/>
+                    <a:lstStyle/>
+                    <a:p>
+                      <a:pPr algn="r" indent="0" marL="0">
+                        <a:buNone/>
+                      </a:pPr>
+                      <a:r>
+                        <a:rPr lang="en-US" sz="850" dirty="0">
+                          <a:solidFill>
+                            <a:srgbClr val="2B2B2B"/>
+                          </a:solidFill>
+                          <a:latin typeface="맑은 고딕" pitchFamily="34" charset="0"/>
+                          <a:ea typeface="맑은 고딕" pitchFamily="34" charset="-122"/>
+                          <a:cs typeface="맑은 고딕" pitchFamily="34" charset="-120"/>
+                        </a:rPr>
+                        <a:t>-</a:t>
                       </a:r>
                       <a:endParaRPr lang="en-US" sz="850" dirty="0">
                         <a:latin typeface="맑은 고딕" charset="0"/>
@@ -12354,7 +12311,7 @@
                     <a:bodyPr/>
                     <a:lstStyle/>
                     <a:p>
-                      <a:pPr algn="r" indent="0" marL="0">
+                      <a:pPr algn="ctr" indent="0" marL="0">
                         <a:buNone/>
                       </a:pPr>
                       <a:r>
@@ -12417,190 +12374,8 @@
                     </a:solidFill>
                   </a:tcPr>
                 </a:tc>
-                <a:tc>
-                  <a:txBody>
-                    <a:bodyPr/>
-                    <a:lstStyle/>
-                    <a:p>
-                      <a:pPr algn="r" indent="0" marL="0">
-                        <a:buNone/>
-                      </a:pPr>
-                      <a:r>
-                        <a:rPr lang="en-US" sz="850" dirty="0">
-                          <a:solidFill>
-                            <a:srgbClr val="2B2B2B"/>
-                          </a:solidFill>
-                          <a:latin typeface="맑은 고딕" pitchFamily="34" charset="0"/>
-                          <a:ea typeface="맑은 고딕" pitchFamily="34" charset="-122"/>
-                          <a:cs typeface="맑은 고딕" pitchFamily="34" charset="-120"/>
-                        </a:rPr>
-                        <a:t>2027-12-31</a:t>
-                      </a:r>
-                      <a:endParaRPr lang="en-US" sz="850" dirty="0">
-                        <a:latin typeface="맑은 고딕" charset="0"/>
-                        <a:ea typeface="맑은 고딕" charset="0"/>
-                        <a:cs typeface="맑은 고딕" charset="0"/>
-                      </a:endParaRPr>
-                    </a:p>
-                  </a:txBody>
-                  <a:tcPr marL="91440" marR="91440" marT="45720" marB="45720" anchor="ctr">
-                    <a:lnL w="12700" cap="flat" cmpd="sng" algn="ctr">
-                      <a:solidFill>
-                        <a:srgbClr val="CBD5E0"/>
-                      </a:solidFill>
-                      <a:prstDash val="solid"/>
-                      <a:round/>
-                      <a:headEnd type="none" w="med" len="med"/>
-                      <a:tailEnd type="none" w="med" len="med"/>
-                    </a:lnL>
-                    <a:lnR w="12700" cap="flat" cmpd="sng" algn="ctr">
-                      <a:solidFill>
-                        <a:srgbClr val="CBD5E0"/>
-                      </a:solidFill>
-                      <a:prstDash val="solid"/>
-                      <a:round/>
-                      <a:headEnd type="none" w="med" len="med"/>
-                      <a:tailEnd type="none" w="med" len="med"/>
-                    </a:lnR>
-                    <a:lnT w="12700" cap="flat" cmpd="sng" algn="ctr">
-                      <a:solidFill>
-                        <a:srgbClr val="CBD5E0"/>
-                      </a:solidFill>
-                      <a:prstDash val="solid"/>
-                      <a:round/>
-                      <a:headEnd type="none" w="med" len="med"/>
-                      <a:tailEnd type="none" w="med" len="med"/>
-                    </a:lnT>
-                    <a:lnB w="12700" cap="flat" cmpd="sng" algn="ctr">
-                      <a:solidFill>
-                        <a:srgbClr val="CBD5E0"/>
-                      </a:solidFill>
-                      <a:prstDash val="solid"/>
-                      <a:round/>
-                      <a:headEnd type="none" w="med" len="med"/>
-                      <a:tailEnd type="none" w="med" len="med"/>
-                    </a:lnB>
-                    <a:solidFill>
-                      <a:srgbClr val="F3F6F7"/>
-                    </a:solidFill>
-                  </a:tcPr>
-                </a:tc>
-                <a:tc>
-                  <a:txBody>
-                    <a:bodyPr/>
-                    <a:lstStyle/>
-                    <a:p>
-                      <a:pPr algn="ctr" indent="0" marL="0">
-                        <a:buNone/>
-                      </a:pPr>
-                      <a:endParaRPr lang="en-US" sz="850" dirty="0">
-                        <a:latin typeface="맑은 고딕" charset="0"/>
-                        <a:ea typeface="맑은 고딕" charset="0"/>
-                        <a:cs typeface="맑은 고딕" charset="0"/>
-                      </a:endParaRPr>
-                    </a:p>
-                  </a:txBody>
-                  <a:tcPr marL="91440" marR="91440" marT="45720" marB="45720" anchor="ctr">
-                    <a:lnL w="12700" cap="flat" cmpd="sng" algn="ctr">
-                      <a:solidFill>
-                        <a:srgbClr val="CBD5E0"/>
-                      </a:solidFill>
-                      <a:prstDash val="solid"/>
-                      <a:round/>
-                      <a:headEnd type="none" w="med" len="med"/>
-                      <a:tailEnd type="none" w="med" len="med"/>
-                    </a:lnL>
-                    <a:lnR w="12700" cap="flat" cmpd="sng" algn="ctr">
-                      <a:solidFill>
-                        <a:srgbClr val="CBD5E0"/>
-                      </a:solidFill>
-                      <a:prstDash val="solid"/>
-                      <a:round/>
-                      <a:headEnd type="none" w="med" len="med"/>
-                      <a:tailEnd type="none" w="med" len="med"/>
-                    </a:lnR>
-                    <a:lnT w="12700" cap="flat" cmpd="sng" algn="ctr">
-                      <a:solidFill>
-                        <a:srgbClr val="CBD5E0"/>
-                      </a:solidFill>
-                      <a:prstDash val="solid"/>
-                      <a:round/>
-                      <a:headEnd type="none" w="med" len="med"/>
-                      <a:tailEnd type="none" w="med" len="med"/>
-                    </a:lnT>
-                    <a:lnB w="12700" cap="flat" cmpd="sng" algn="ctr">
-                      <a:solidFill>
-                        <a:srgbClr val="CBD5E0"/>
-                      </a:solidFill>
-                      <a:prstDash val="solid"/>
-                      <a:round/>
-                      <a:headEnd type="none" w="med" len="med"/>
-                      <a:tailEnd type="none" w="med" len="med"/>
-                    </a:lnB>
-                    <a:solidFill>
-                      <a:srgbClr val="F3F6F7"/>
-                    </a:solidFill>
-                  </a:tcPr>
-                </a:tc>
-                <a:tc>
-                  <a:txBody>
-                    <a:bodyPr/>
-                    <a:lstStyle/>
-                    <a:p>
-                      <a:pPr algn="ctr" indent="0" marL="0">
-                        <a:buNone/>
-                      </a:pPr>
-                      <a:endParaRPr lang="en-US" sz="850" dirty="0">
-                        <a:latin typeface="맑은 고딕" charset="0"/>
-                        <a:ea typeface="맑은 고딕" charset="0"/>
-                        <a:cs typeface="맑은 고딕" charset="0"/>
-                      </a:endParaRPr>
-                    </a:p>
-                  </a:txBody>
-                  <a:tcPr marL="91440" marR="91440" marT="45720" marB="45720" anchor="ctr">
-                    <a:lnL w="12700" cap="flat" cmpd="sng" algn="ctr">
-                      <a:solidFill>
-                        <a:srgbClr val="CBD5E0"/>
-                      </a:solidFill>
-                      <a:prstDash val="solid"/>
-                      <a:round/>
-                      <a:headEnd type="none" w="med" len="med"/>
-                      <a:tailEnd type="none" w="med" len="med"/>
-                    </a:lnL>
-                    <a:lnR w="12700" cap="flat" cmpd="sng" algn="ctr">
-                      <a:solidFill>
-                        <a:srgbClr val="CBD5E0"/>
-                      </a:solidFill>
-                      <a:prstDash val="solid"/>
-                      <a:round/>
-                      <a:headEnd type="none" w="med" len="med"/>
-                      <a:tailEnd type="none" w="med" len="med"/>
-                    </a:lnR>
-                    <a:lnT w="12700" cap="flat" cmpd="sng" algn="ctr">
-                      <a:solidFill>
-                        <a:srgbClr val="CBD5E0"/>
-                      </a:solidFill>
-                      <a:prstDash val="solid"/>
-                      <a:round/>
-                      <a:headEnd type="none" w="med" len="med"/>
-                      <a:tailEnd type="none" w="med" len="med"/>
-                    </a:lnT>
-                    <a:lnB w="12700" cap="flat" cmpd="sng" algn="ctr">
-                      <a:solidFill>
-                        <a:srgbClr val="CBD5E0"/>
-                      </a:solidFill>
-                      <a:prstDash val="solid"/>
-                      <a:round/>
-                      <a:headEnd type="none" w="med" len="med"/>
-                      <a:tailEnd type="none" w="med" len="med"/>
-                    </a:lnB>
-                    <a:solidFill>
-                      <a:srgbClr val="F3F6F7"/>
-                    </a:solidFill>
-                  </a:tcPr>
-                </a:tc>
               </a:tr>
-              <a:tr h="320040">
+              <a:tr h="313509">
                 <a:tc>
                   <a:txBody>
                     <a:bodyPr/>
@@ -12890,7 +12665,143 @@
                           <a:ea typeface="맑은 고딕" pitchFamily="34" charset="-122"/>
                           <a:cs typeface="맑은 고딕" pitchFamily="34" charset="-120"/>
                         </a:rPr>
-                        <a:t>209.6</a:t>
+                        <a:t>-</a:t>
+                      </a:r>
+                      <a:endParaRPr lang="en-US" sz="850" dirty="0">
+                        <a:latin typeface="맑은 고딕" charset="0"/>
+                        <a:ea typeface="맑은 고딕" charset="0"/>
+                        <a:cs typeface="맑은 고딕" charset="0"/>
+                      </a:endParaRPr>
+                    </a:p>
+                  </a:txBody>
+                  <a:tcPr marL="91440" marR="91440" marT="45720" marB="45720" anchor="ctr">
+                    <a:lnL w="12700" cap="flat" cmpd="sng" algn="ctr">
+                      <a:solidFill>
+                        <a:srgbClr val="CBD5E0"/>
+                      </a:solidFill>
+                      <a:prstDash val="solid"/>
+                      <a:round/>
+                      <a:headEnd type="none" w="med" len="med"/>
+                      <a:tailEnd type="none" w="med" len="med"/>
+                    </a:lnL>
+                    <a:lnR w="12700" cap="flat" cmpd="sng" algn="ctr">
+                      <a:solidFill>
+                        <a:srgbClr val="CBD5E0"/>
+                      </a:solidFill>
+                      <a:prstDash val="solid"/>
+                      <a:round/>
+                      <a:headEnd type="none" w="med" len="med"/>
+                      <a:tailEnd type="none" w="med" len="med"/>
+                    </a:lnR>
+                    <a:lnT w="12700" cap="flat" cmpd="sng" algn="ctr">
+                      <a:solidFill>
+                        <a:srgbClr val="CBD5E0"/>
+                      </a:solidFill>
+                      <a:prstDash val="solid"/>
+                      <a:round/>
+                      <a:headEnd type="none" w="med" len="med"/>
+                      <a:tailEnd type="none" w="med" len="med"/>
+                    </a:lnT>
+                    <a:lnB w="12700" cap="flat" cmpd="sng" algn="ctr">
+                      <a:solidFill>
+                        <a:srgbClr val="CBD5E0"/>
+                      </a:solidFill>
+                      <a:prstDash val="solid"/>
+                      <a:round/>
+                      <a:headEnd type="none" w="med" len="med"/>
+                      <a:tailEnd type="none" w="med" len="med"/>
+                    </a:lnB>
+                    <a:solidFill>
+                      <a:srgbClr val="FFFFFF"/>
+                    </a:solidFill>
+                  </a:tcPr>
+                </a:tc>
+                <a:tc>
+                  <a:txBody>
+                    <a:bodyPr/>
+                    <a:lstStyle/>
+                    <a:p>
+                      <a:pPr algn="r" indent="0" marL="0">
+                        <a:buNone/>
+                      </a:pPr>
+                      <a:r>
+                        <a:rPr lang="en-US" sz="850" dirty="0">
+                          <a:solidFill>
+                            <a:srgbClr val="2B2B2B"/>
+                          </a:solidFill>
+                          <a:latin typeface="맑은 고딕" pitchFamily="34" charset="0"/>
+                          <a:ea typeface="맑은 고딕" pitchFamily="34" charset="-122"/>
+                          <a:cs typeface="맑은 고딕" pitchFamily="34" charset="-120"/>
+                        </a:rPr>
+                        <a:t>-</a:t>
+                      </a:r>
+                      <a:endParaRPr lang="en-US" sz="850" dirty="0">
+                        <a:latin typeface="맑은 고딕" charset="0"/>
+                        <a:ea typeface="맑은 고딕" charset="0"/>
+                        <a:cs typeface="맑은 고딕" charset="0"/>
+                      </a:endParaRPr>
+                    </a:p>
+                  </a:txBody>
+                  <a:tcPr marL="91440" marR="91440" marT="45720" marB="45720" anchor="ctr">
+                    <a:lnL w="12700" cap="flat" cmpd="sng" algn="ctr">
+                      <a:solidFill>
+                        <a:srgbClr val="CBD5E0"/>
+                      </a:solidFill>
+                      <a:prstDash val="solid"/>
+                      <a:round/>
+                      <a:headEnd type="none" w="med" len="med"/>
+                      <a:tailEnd type="none" w="med" len="med"/>
+                    </a:lnL>
+                    <a:lnR w="12700" cap="flat" cmpd="sng" algn="ctr">
+                      <a:solidFill>
+                        <a:srgbClr val="CBD5E0"/>
+                      </a:solidFill>
+                      <a:prstDash val="solid"/>
+                      <a:round/>
+                      <a:headEnd type="none" w="med" len="med"/>
+                      <a:tailEnd type="none" w="med" len="med"/>
+                    </a:lnR>
+                    <a:lnT w="12700" cap="flat" cmpd="sng" algn="ctr">
+                      <a:solidFill>
+                        <a:srgbClr val="CBD5E0"/>
+                      </a:solidFill>
+                      <a:prstDash val="solid"/>
+                      <a:round/>
+                      <a:headEnd type="none" w="med" len="med"/>
+                      <a:tailEnd type="none" w="med" len="med"/>
+                    </a:lnT>
+                    <a:lnB w="12700" cap="flat" cmpd="sng" algn="ctr">
+                      <a:solidFill>
+                        <a:srgbClr val="CBD5E0"/>
+                      </a:solidFill>
+                      <a:prstDash val="solid"/>
+                      <a:round/>
+                      <a:headEnd type="none" w="med" len="med"/>
+                      <a:tailEnd type="none" w="med" len="med"/>
+                    </a:lnB>
+                    <a:solidFill>
+                      <a:srgbClr val="FFFFFF"/>
+                    </a:solidFill>
+                  </a:tcPr>
+                </a:tc>
+                <a:tc>
+                  <a:txBody>
+                    <a:bodyPr/>
+                    <a:lstStyle/>
+                    <a:p>
+                      <a:pPr algn="r" indent="0" marL="0">
+                        <a:buNone/>
+                      </a:pPr>
+                      <a:r>
+                        <a:rPr lang="en-US" sz="850" dirty="0">
+                          <a:solidFill>
+                            <a:srgbClr val="2B2B2B"/>
+                          </a:solidFill>
+                          <a:latin typeface="맑은 고딕" pitchFamily="34" charset="0"/>
+                          <a:ea typeface="맑은 고딕" pitchFamily="34" charset="-122"/>
+                          <a:cs typeface="맑은 고딕" pitchFamily="34" charset="-120"/>
+                        </a:rPr>
+                        <a:t>-</a:t>
                       </a:r>
                       <a:endParaRPr lang="en-US" sz="850" dirty="0">
                         <a:latin typeface="맑은 고딕" charset="0"/>
@@ -13014,7 +12925,7 @@
                     <a:bodyPr/>
                     <a:lstStyle/>
                     <a:p>
-                      <a:pPr algn="r" indent="0" marL="0">
+                      <a:pPr algn="ctr" indent="0" marL="0">
                         <a:buNone/>
                       </a:pPr>
                       <a:r>
@@ -13077,190 +12988,8 @@
                     </a:solidFill>
                   </a:tcPr>
                 </a:tc>
-                <a:tc>
-                  <a:txBody>
-                    <a:bodyPr/>
-                    <a:lstStyle/>
-                    <a:p>
-                      <a:pPr algn="r" indent="0" marL="0">
-                        <a:buNone/>
-                      </a:pPr>
-                      <a:r>
-                        <a:rPr lang="en-US" sz="850" dirty="0">
-                          <a:solidFill>
-                            <a:srgbClr val="2B2B2B"/>
-                          </a:solidFill>
-                          <a:latin typeface="맑은 고딕" pitchFamily="34" charset="0"/>
-                          <a:ea typeface="맑은 고딕" pitchFamily="34" charset="-122"/>
-                          <a:cs typeface="맑은 고딕" pitchFamily="34" charset="-120"/>
-                        </a:rPr>
-                        <a:t>2026-05-31</a:t>
-                      </a:r>
-                      <a:endParaRPr lang="en-US" sz="850" dirty="0">
-                        <a:latin typeface="맑은 고딕" charset="0"/>
-                        <a:ea typeface="맑은 고딕" charset="0"/>
-                        <a:cs typeface="맑은 고딕" charset="0"/>
-                      </a:endParaRPr>
-                    </a:p>
-                  </a:txBody>
-                  <a:tcPr marL="91440" marR="91440" marT="45720" marB="45720" anchor="ctr">
-                    <a:lnL w="12700" cap="flat" cmpd="sng" algn="ctr">
-                      <a:solidFill>
-                        <a:srgbClr val="CBD5E0"/>
-                      </a:solidFill>
-                      <a:prstDash val="solid"/>
-                      <a:round/>
-                      <a:headEnd type="none" w="med" len="med"/>
-                      <a:tailEnd type="none" w="med" len="med"/>
-                    </a:lnL>
-                    <a:lnR w="12700" cap="flat" cmpd="sng" algn="ctr">
-                      <a:solidFill>
-                        <a:srgbClr val="CBD5E0"/>
-                      </a:solidFill>
-                      <a:prstDash val="solid"/>
-                      <a:round/>
-                      <a:headEnd type="none" w="med" len="med"/>
-                      <a:tailEnd type="none" w="med" len="med"/>
-                    </a:lnR>
-                    <a:lnT w="12700" cap="flat" cmpd="sng" algn="ctr">
-                      <a:solidFill>
-                        <a:srgbClr val="CBD5E0"/>
-                      </a:solidFill>
-                      <a:prstDash val="solid"/>
-                      <a:round/>
-                      <a:headEnd type="none" w="med" len="med"/>
-                      <a:tailEnd type="none" w="med" len="med"/>
-                    </a:lnT>
-                    <a:lnB w="12700" cap="flat" cmpd="sng" algn="ctr">
-                      <a:solidFill>
-                        <a:srgbClr val="CBD5E0"/>
-                      </a:solidFill>
-                      <a:prstDash val="solid"/>
-                      <a:round/>
-                      <a:headEnd type="none" w="med" len="med"/>
-                      <a:tailEnd type="none" w="med" len="med"/>
-                    </a:lnB>
-                    <a:solidFill>
-                      <a:srgbClr val="FFFFFF"/>
-                    </a:solidFill>
-                  </a:tcPr>
-                </a:tc>
-                <a:tc>
-                  <a:txBody>
-                    <a:bodyPr/>
-                    <a:lstStyle/>
-                    <a:p>
-                      <a:pPr algn="ctr" indent="0" marL="0">
-                        <a:buNone/>
-                      </a:pPr>
-                      <a:endParaRPr lang="en-US" sz="850" dirty="0">
-                        <a:latin typeface="맑은 고딕" charset="0"/>
-                        <a:ea typeface="맑은 고딕" charset="0"/>
-                        <a:cs typeface="맑은 고딕" charset="0"/>
-                      </a:endParaRPr>
-                    </a:p>
-                  </a:txBody>
-                  <a:tcPr marL="91440" marR="91440" marT="45720" marB="45720" anchor="ctr">
-                    <a:lnL w="12700" cap="flat" cmpd="sng" algn="ctr">
-                      <a:solidFill>
-                        <a:srgbClr val="CBD5E0"/>
-                      </a:solidFill>
-                      <a:prstDash val="solid"/>
-                      <a:round/>
-                      <a:headEnd type="none" w="med" len="med"/>
-                      <a:tailEnd type="none" w="med" len="med"/>
-                    </a:lnL>
-                    <a:lnR w="12700" cap="flat" cmpd="sng" algn="ctr">
-                      <a:solidFill>
-                        <a:srgbClr val="CBD5E0"/>
-                      </a:solidFill>
-                      <a:prstDash val="solid"/>
-                      <a:round/>
-                      <a:headEnd type="none" w="med" len="med"/>
-                      <a:tailEnd type="none" w="med" len="med"/>
-                    </a:lnR>
-                    <a:lnT w="12700" cap="flat" cmpd="sng" algn="ctr">
-                      <a:solidFill>
-                        <a:srgbClr val="CBD5E0"/>
-                      </a:solidFill>
-                      <a:prstDash val="solid"/>
-                      <a:round/>
-                      <a:headEnd type="none" w="med" len="med"/>
-                      <a:tailEnd type="none" w="med" len="med"/>
-                    </a:lnT>
-                    <a:lnB w="12700" cap="flat" cmpd="sng" algn="ctr">
-                      <a:solidFill>
-                        <a:srgbClr val="CBD5E0"/>
-                      </a:solidFill>
-                      <a:prstDash val="solid"/>
-                      <a:round/>
-                      <a:headEnd type="none" w="med" len="med"/>
-                      <a:tailEnd type="none" w="med" len="med"/>
-                    </a:lnB>
-                    <a:solidFill>
-                      <a:srgbClr val="FFFFFF"/>
-                    </a:solidFill>
-                  </a:tcPr>
-                </a:tc>
-                <a:tc>
-                  <a:txBody>
-                    <a:bodyPr/>
-                    <a:lstStyle/>
-                    <a:p>
-                      <a:pPr algn="ctr" indent="0" marL="0">
-                        <a:buNone/>
-                      </a:pPr>
-                      <a:endParaRPr lang="en-US" sz="850" dirty="0">
-                        <a:latin typeface="맑은 고딕" charset="0"/>
-                        <a:ea typeface="맑은 고딕" charset="0"/>
-                        <a:cs typeface="맑은 고딕" charset="0"/>
-                      </a:endParaRPr>
-                    </a:p>
-                  </a:txBody>
-                  <a:tcPr marL="91440" marR="91440" marT="45720" marB="45720" anchor="ctr">
-                    <a:lnL w="12700" cap="flat" cmpd="sng" algn="ctr">
-                      <a:solidFill>
-                        <a:srgbClr val="CBD5E0"/>
-                      </a:solidFill>
-                      <a:prstDash val="solid"/>
-                      <a:round/>
-                      <a:headEnd type="none" w="med" len="med"/>
-                      <a:tailEnd type="none" w="med" len="med"/>
-                    </a:lnL>
-                    <a:lnR w="12700" cap="flat" cmpd="sng" algn="ctr">
-                      <a:solidFill>
-                        <a:srgbClr val="CBD5E0"/>
-                      </a:solidFill>
-                      <a:prstDash val="solid"/>
-                      <a:round/>
-                      <a:headEnd type="none" w="med" len="med"/>
-                      <a:tailEnd type="none" w="med" len="med"/>
-                    </a:lnR>
-                    <a:lnT w="12700" cap="flat" cmpd="sng" algn="ctr">
-                      <a:solidFill>
-                        <a:srgbClr val="CBD5E0"/>
-                      </a:solidFill>
-                      <a:prstDash val="solid"/>
-                      <a:round/>
-                      <a:headEnd type="none" w="med" len="med"/>
-                      <a:tailEnd type="none" w="med" len="med"/>
-                    </a:lnT>
-                    <a:lnB w="12700" cap="flat" cmpd="sng" algn="ctr">
-                      <a:solidFill>
-                        <a:srgbClr val="CBD5E0"/>
-                      </a:solidFill>
-                      <a:prstDash val="solid"/>
-                      <a:round/>
-                      <a:headEnd type="none" w="med" len="med"/>
-                      <a:tailEnd type="none" w="med" len="med"/>
-                    </a:lnB>
-                    <a:solidFill>
-                      <a:srgbClr val="FFFFFF"/>
-                    </a:solidFill>
-                  </a:tcPr>
-                </a:tc>
               </a:tr>
-              <a:tr h="320040">
+              <a:tr h="313509">
                 <a:tc>
                   <a:txBody>
                     <a:bodyPr/>
@@ -13550,7 +13279,143 @@
                           <a:ea typeface="맑은 고딕" pitchFamily="34" charset="-122"/>
                           <a:cs typeface="맑은 고딕" pitchFamily="34" charset="-120"/>
                         </a:rPr>
-                        <a:t>209.6</a:t>
+                        <a:t>-</a:t>
+                      </a:r>
+                      <a:endParaRPr lang="en-US" sz="850" dirty="0">
+                        <a:latin typeface="맑은 고딕" charset="0"/>
+                        <a:ea typeface="맑은 고딕" charset="0"/>
+                        <a:cs typeface="맑은 고딕" charset="0"/>
+                      </a:endParaRPr>
+                    </a:p>
+                  </a:txBody>
+                  <a:tcPr marL="91440" marR="91440" marT="45720" marB="45720" anchor="ctr">
+                    <a:lnL w="12700" cap="flat" cmpd="sng" algn="ctr">
+                      <a:solidFill>
+                        <a:srgbClr val="CBD5E0"/>
+                      </a:solidFill>
+                      <a:prstDash val="solid"/>
+                      <a:round/>
+                      <a:headEnd type="none" w="med" len="med"/>
+                      <a:tailEnd type="none" w="med" len="med"/>
+                    </a:lnL>
+                    <a:lnR w="12700" cap="flat" cmpd="sng" algn="ctr">
+                      <a:solidFill>
+                        <a:srgbClr val="CBD5E0"/>
+                      </a:solidFill>
+                      <a:prstDash val="solid"/>
+                      <a:round/>
+                      <a:headEnd type="none" w="med" len="med"/>
+                      <a:tailEnd type="none" w="med" len="med"/>
+                    </a:lnR>
+                    <a:lnT w="12700" cap="flat" cmpd="sng" algn="ctr">
+                      <a:solidFill>
+                        <a:srgbClr val="CBD5E0"/>
+                      </a:solidFill>
+                      <a:prstDash val="solid"/>
+                      <a:round/>
+                      <a:headEnd type="none" w="med" len="med"/>
+                      <a:tailEnd type="none" w="med" len="med"/>
+                    </a:lnT>
+                    <a:lnB w="12700" cap="flat" cmpd="sng" algn="ctr">
+                      <a:solidFill>
+                        <a:srgbClr val="CBD5E0"/>
+                      </a:solidFill>
+                      <a:prstDash val="solid"/>
+                      <a:round/>
+                      <a:headEnd type="none" w="med" len="med"/>
+                      <a:tailEnd type="none" w="med" len="med"/>
+                    </a:lnB>
+                    <a:solidFill>
+                      <a:srgbClr val="F3F6F7"/>
+                    </a:solidFill>
+                  </a:tcPr>
+                </a:tc>
+                <a:tc>
+                  <a:txBody>
+                    <a:bodyPr/>
+                    <a:lstStyle/>
+                    <a:p>
+                      <a:pPr algn="r" indent="0" marL="0">
+                        <a:buNone/>
+                      </a:pPr>
+                      <a:r>
+                        <a:rPr lang="en-US" sz="850" dirty="0">
+                          <a:solidFill>
+                            <a:srgbClr val="2B2B2B"/>
+                          </a:solidFill>
+                          <a:latin typeface="맑은 고딕" pitchFamily="34" charset="0"/>
+                          <a:ea typeface="맑은 고딕" pitchFamily="34" charset="-122"/>
+                          <a:cs typeface="맑은 고딕" pitchFamily="34" charset="-120"/>
+                        </a:rPr>
+                        <a:t>-</a:t>
+                      </a:r>
+                      <a:endParaRPr lang="en-US" sz="850" dirty="0">
+                        <a:latin typeface="맑은 고딕" charset="0"/>
+                        <a:ea typeface="맑은 고딕" charset="0"/>
+                        <a:cs typeface="맑은 고딕" charset="0"/>
+                      </a:endParaRPr>
+                    </a:p>
+                  </a:txBody>
+                  <a:tcPr marL="91440" marR="91440" marT="45720" marB="45720" anchor="ctr">
+                    <a:lnL w="12700" cap="flat" cmpd="sng" algn="ctr">
+                      <a:solidFill>
+                        <a:srgbClr val="CBD5E0"/>
+                      </a:solidFill>
+                      <a:prstDash val="solid"/>
+                      <a:round/>
+                      <a:headEnd type="none" w="med" len="med"/>
+                      <a:tailEnd type="none" w="med" len="med"/>
+                    </a:lnL>
+                    <a:lnR w="12700" cap="flat" cmpd="sng" algn="ctr">
+                      <a:solidFill>
+                        <a:srgbClr val="CBD5E0"/>
+                      </a:solidFill>
+                      <a:prstDash val="solid"/>
+                      <a:round/>
+                      <a:headEnd type="none" w="med" len="med"/>
+                      <a:tailEnd type="none" w="med" len="med"/>
+                    </a:lnR>
+                    <a:lnT w="12700" cap="flat" cmpd="sng" algn="ctr">
+                      <a:solidFill>
+                        <a:srgbClr val="CBD5E0"/>
+                      </a:solidFill>
+                      <a:prstDash val="solid"/>
+                      <a:round/>
+                      <a:headEnd type="none" w="med" len="med"/>
+                      <a:tailEnd type="none" w="med" len="med"/>
+                    </a:lnT>
+                    <a:lnB w="12700" cap="flat" cmpd="sng" algn="ctr">
+                      <a:solidFill>
+                        <a:srgbClr val="CBD5E0"/>
+                      </a:solidFill>
+                      <a:prstDash val="solid"/>
+                      <a:round/>
+                      <a:headEnd type="none" w="med" len="med"/>
+                      <a:tailEnd type="none" w="med" len="med"/>
+                    </a:lnB>
+                    <a:solidFill>
+                      <a:srgbClr val="F3F6F7"/>
+                    </a:solidFill>
+                  </a:tcPr>
+                </a:tc>
+                <a:tc>
+                  <a:txBody>
+                    <a:bodyPr/>
+                    <a:lstStyle/>
+                    <a:p>
+                      <a:pPr algn="r" indent="0" marL="0">
+                        <a:buNone/>
+                      </a:pPr>
+                      <a:r>
+                        <a:rPr lang="en-US" sz="850" dirty="0">
+                          <a:solidFill>
+                            <a:srgbClr val="2B2B2B"/>
+                          </a:solidFill>
+                          <a:latin typeface="맑은 고딕" pitchFamily="34" charset="0"/>
+                          <a:ea typeface="맑은 고딕" pitchFamily="34" charset="-122"/>
+                          <a:cs typeface="맑은 고딕" pitchFamily="34" charset="-120"/>
+                        </a:rPr>
+                        <a:t>-</a:t>
                       </a:r>
                       <a:endParaRPr lang="en-US" sz="850" dirty="0">
                         <a:latin typeface="맑은 고딕" charset="0"/>
@@ -13674,7 +13539,7 @@
                     <a:bodyPr/>
                     <a:lstStyle/>
                     <a:p>
-                      <a:pPr algn="r" indent="0" marL="0">
+                      <a:pPr algn="ctr" indent="0" marL="0">
                         <a:buNone/>
                       </a:pPr>
                       <a:r>
@@ -13737,190 +13602,8 @@
                     </a:solidFill>
                   </a:tcPr>
                 </a:tc>
-                <a:tc>
-                  <a:txBody>
-                    <a:bodyPr/>
-                    <a:lstStyle/>
-                    <a:p>
-                      <a:pPr algn="r" indent="0" marL="0">
-                        <a:buNone/>
-                      </a:pPr>
-                      <a:r>
-                        <a:rPr lang="en-US" sz="850" dirty="0">
-                          <a:solidFill>
-                            <a:srgbClr val="2B2B2B"/>
-                          </a:solidFill>
-                          <a:latin typeface="맑은 고딕" pitchFamily="34" charset="0"/>
-                          <a:ea typeface="맑은 고딕" pitchFamily="34" charset="-122"/>
-                          <a:cs typeface="맑은 고딕" pitchFamily="34" charset="-120"/>
-                        </a:rPr>
-                        <a:t>2027-08-31</a:t>
-                      </a:r>
-                      <a:endParaRPr lang="en-US" sz="850" dirty="0">
-                        <a:latin typeface="맑은 고딕" charset="0"/>
-                        <a:ea typeface="맑은 고딕" charset="0"/>
-                        <a:cs typeface="맑은 고딕" charset="0"/>
-                      </a:endParaRPr>
-                    </a:p>
-                  </a:txBody>
-                  <a:tcPr marL="91440" marR="91440" marT="45720" marB="45720" anchor="ctr">
-                    <a:lnL w="12700" cap="flat" cmpd="sng" algn="ctr">
-                      <a:solidFill>
-                        <a:srgbClr val="CBD5E0"/>
-                      </a:solidFill>
-                      <a:prstDash val="solid"/>
-                      <a:round/>
-                      <a:headEnd type="none" w="med" len="med"/>
-                      <a:tailEnd type="none" w="med" len="med"/>
-                    </a:lnL>
-                    <a:lnR w="12700" cap="flat" cmpd="sng" algn="ctr">
-                      <a:solidFill>
-                        <a:srgbClr val="CBD5E0"/>
-                      </a:solidFill>
-                      <a:prstDash val="solid"/>
-                      <a:round/>
-                      <a:headEnd type="none" w="med" len="med"/>
-                      <a:tailEnd type="none" w="med" len="med"/>
-                    </a:lnR>
-                    <a:lnT w="12700" cap="flat" cmpd="sng" algn="ctr">
-                      <a:solidFill>
-                        <a:srgbClr val="CBD5E0"/>
-                      </a:solidFill>
-                      <a:prstDash val="solid"/>
-                      <a:round/>
-                      <a:headEnd type="none" w="med" len="med"/>
-                      <a:tailEnd type="none" w="med" len="med"/>
-                    </a:lnT>
-                    <a:lnB w="12700" cap="flat" cmpd="sng" algn="ctr">
-                      <a:solidFill>
-                        <a:srgbClr val="CBD5E0"/>
-                      </a:solidFill>
-                      <a:prstDash val="solid"/>
-                      <a:round/>
-                      <a:headEnd type="none" w="med" len="med"/>
-                      <a:tailEnd type="none" w="med" len="med"/>
-                    </a:lnB>
-                    <a:solidFill>
-                      <a:srgbClr val="F3F6F7"/>
-                    </a:solidFill>
-                  </a:tcPr>
-                </a:tc>
-                <a:tc>
-                  <a:txBody>
-                    <a:bodyPr/>
-                    <a:lstStyle/>
-                    <a:p>
-                      <a:pPr algn="ctr" indent="0" marL="0">
-                        <a:buNone/>
-                      </a:pPr>
-                      <a:endParaRPr lang="en-US" sz="850" dirty="0">
-                        <a:latin typeface="맑은 고딕" charset="0"/>
-                        <a:ea typeface="맑은 고딕" charset="0"/>
-                        <a:cs typeface="맑은 고딕" charset="0"/>
-                      </a:endParaRPr>
-                    </a:p>
-                  </a:txBody>
-                  <a:tcPr marL="91440" marR="91440" marT="45720" marB="45720" anchor="ctr">
-                    <a:lnL w="12700" cap="flat" cmpd="sng" algn="ctr">
-                      <a:solidFill>
-                        <a:srgbClr val="CBD5E0"/>
-                      </a:solidFill>
-                      <a:prstDash val="solid"/>
-                      <a:round/>
-                      <a:headEnd type="none" w="med" len="med"/>
-                      <a:tailEnd type="none" w="med" len="med"/>
-                    </a:lnL>
-                    <a:lnR w="12700" cap="flat" cmpd="sng" algn="ctr">
-                      <a:solidFill>
-                        <a:srgbClr val="CBD5E0"/>
-                      </a:solidFill>
-                      <a:prstDash val="solid"/>
-                      <a:round/>
-                      <a:headEnd type="none" w="med" len="med"/>
-                      <a:tailEnd type="none" w="med" len="med"/>
-                    </a:lnR>
-                    <a:lnT w="12700" cap="flat" cmpd="sng" algn="ctr">
-                      <a:solidFill>
-                        <a:srgbClr val="CBD5E0"/>
-                      </a:solidFill>
-                      <a:prstDash val="solid"/>
-                      <a:round/>
-                      <a:headEnd type="none" w="med" len="med"/>
-                      <a:tailEnd type="none" w="med" len="med"/>
-                    </a:lnT>
-                    <a:lnB w="12700" cap="flat" cmpd="sng" algn="ctr">
-                      <a:solidFill>
-                        <a:srgbClr val="CBD5E0"/>
-                      </a:solidFill>
-                      <a:prstDash val="solid"/>
-                      <a:round/>
-                      <a:headEnd type="none" w="med" len="med"/>
-                      <a:tailEnd type="none" w="med" len="med"/>
-                    </a:lnB>
-                    <a:solidFill>
-                      <a:srgbClr val="F3F6F7"/>
-                    </a:solidFill>
-                  </a:tcPr>
-                </a:tc>
-                <a:tc>
-                  <a:txBody>
-                    <a:bodyPr/>
-                    <a:lstStyle/>
-                    <a:p>
-                      <a:pPr algn="ctr" indent="0" marL="0">
-                        <a:buNone/>
-                      </a:pPr>
-                      <a:endParaRPr lang="en-US" sz="850" dirty="0">
-                        <a:latin typeface="맑은 고딕" charset="0"/>
-                        <a:ea typeface="맑은 고딕" charset="0"/>
-                        <a:cs typeface="맑은 고딕" charset="0"/>
-                      </a:endParaRPr>
-                    </a:p>
-                  </a:txBody>
-                  <a:tcPr marL="91440" marR="91440" marT="45720" marB="45720" anchor="ctr">
-                    <a:lnL w="12700" cap="flat" cmpd="sng" algn="ctr">
-                      <a:solidFill>
-                        <a:srgbClr val="CBD5E0"/>
-                      </a:solidFill>
-                      <a:prstDash val="solid"/>
-                      <a:round/>
-                      <a:headEnd type="none" w="med" len="med"/>
-                      <a:tailEnd type="none" w="med" len="med"/>
-                    </a:lnL>
-                    <a:lnR w="12700" cap="flat" cmpd="sng" algn="ctr">
-                      <a:solidFill>
-                        <a:srgbClr val="CBD5E0"/>
-                      </a:solidFill>
-                      <a:prstDash val="solid"/>
-                      <a:round/>
-                      <a:headEnd type="none" w="med" len="med"/>
-                      <a:tailEnd type="none" w="med" len="med"/>
-                    </a:lnR>
-                    <a:lnT w="12700" cap="flat" cmpd="sng" algn="ctr">
-                      <a:solidFill>
-                        <a:srgbClr val="CBD5E0"/>
-                      </a:solidFill>
-                      <a:prstDash val="solid"/>
-                      <a:round/>
-                      <a:headEnd type="none" w="med" len="med"/>
-                      <a:tailEnd type="none" w="med" len="med"/>
-                    </a:lnT>
-                    <a:lnB w="12700" cap="flat" cmpd="sng" algn="ctr">
-                      <a:solidFill>
-                        <a:srgbClr val="CBD5E0"/>
-                      </a:solidFill>
-                      <a:prstDash val="solid"/>
-                      <a:round/>
-                      <a:headEnd type="none" w="med" len="med"/>
-                      <a:tailEnd type="none" w="med" len="med"/>
-                    </a:lnB>
-                    <a:solidFill>
-                      <a:srgbClr val="F3F6F7"/>
-                    </a:solidFill>
-                  </a:tcPr>
-                </a:tc>
               </a:tr>
-              <a:tr h="320040">
+              <a:tr h="313509">
                 <a:tc>
                   <a:txBody>
                     <a:bodyPr/>
@@ -14210,7 +13893,143 @@
                           <a:ea typeface="맑은 고딕" pitchFamily="34" charset="-122"/>
                           <a:cs typeface="맑은 고딕" pitchFamily="34" charset="-120"/>
                         </a:rPr>
-                        <a:t>209.6</a:t>
+                        <a:t>-</a:t>
+                      </a:r>
+                      <a:endParaRPr lang="en-US" sz="850" dirty="0">
+                        <a:latin typeface="맑은 고딕" charset="0"/>
+                        <a:ea typeface="맑은 고딕" charset="0"/>
+                        <a:cs typeface="맑은 고딕" charset="0"/>
+                      </a:endParaRPr>
+                    </a:p>
+                  </a:txBody>
+                  <a:tcPr marL="91440" marR="91440" marT="45720" marB="45720" anchor="ctr">
+                    <a:lnL w="12700" cap="flat" cmpd="sng" algn="ctr">
+                      <a:solidFill>
+                        <a:srgbClr val="CBD5E0"/>
+                      </a:solidFill>
+                      <a:prstDash val="solid"/>
+                      <a:round/>
+                      <a:headEnd type="none" w="med" len="med"/>
+                      <a:tailEnd type="none" w="med" len="med"/>
+                    </a:lnL>
+                    <a:lnR w="12700" cap="flat" cmpd="sng" algn="ctr">
+                      <a:solidFill>
+                        <a:srgbClr val="CBD5E0"/>
+                      </a:solidFill>
+                      <a:prstDash val="solid"/>
+                      <a:round/>
+                      <a:headEnd type="none" w="med" len="med"/>
+                      <a:tailEnd type="none" w="med" len="med"/>
+                    </a:lnR>
+                    <a:lnT w="12700" cap="flat" cmpd="sng" algn="ctr">
+                      <a:solidFill>
+                        <a:srgbClr val="CBD5E0"/>
+                      </a:solidFill>
+                      <a:prstDash val="solid"/>
+                      <a:round/>
+                      <a:headEnd type="none" w="med" len="med"/>
+                      <a:tailEnd type="none" w="med" len="med"/>
+                    </a:lnT>
+                    <a:lnB w="12700" cap="flat" cmpd="sng" algn="ctr">
+                      <a:solidFill>
+                        <a:srgbClr val="CBD5E0"/>
+                      </a:solidFill>
+                      <a:prstDash val="solid"/>
+                      <a:round/>
+                      <a:headEnd type="none" w="med" len="med"/>
+                      <a:tailEnd type="none" w="med" len="med"/>
+                    </a:lnB>
+                    <a:solidFill>
+                      <a:srgbClr val="FFFFFF"/>
+                    </a:solidFill>
+                  </a:tcPr>
+                </a:tc>
+                <a:tc>
+                  <a:txBody>
+                    <a:bodyPr/>
+                    <a:lstStyle/>
+                    <a:p>
+                      <a:pPr algn="r" indent="0" marL="0">
+                        <a:buNone/>
+                      </a:pPr>
+                      <a:r>
+                        <a:rPr lang="en-US" sz="850" dirty="0">
+                          <a:solidFill>
+                            <a:srgbClr val="2B2B2B"/>
+                          </a:solidFill>
+                          <a:latin typeface="맑은 고딕" pitchFamily="34" charset="0"/>
+                          <a:ea typeface="맑은 고딕" pitchFamily="34" charset="-122"/>
+                          <a:cs typeface="맑은 고딕" pitchFamily="34" charset="-120"/>
+                        </a:rPr>
+                        <a:t>-</a:t>
+                      </a:r>
+                      <a:endParaRPr lang="en-US" sz="850" dirty="0">
+                        <a:latin typeface="맑은 고딕" charset="0"/>
+                        <a:ea typeface="맑은 고딕" charset="0"/>
+                        <a:cs typeface="맑은 고딕" charset="0"/>
+                      </a:endParaRPr>
+                    </a:p>
+                  </a:txBody>
+                  <a:tcPr marL="91440" marR="91440" marT="45720" marB="45720" anchor="ctr">
+                    <a:lnL w="12700" cap="flat" cmpd="sng" algn="ctr">
+                      <a:solidFill>
+                        <a:srgbClr val="CBD5E0"/>
+                      </a:solidFill>
+                      <a:prstDash val="solid"/>
+                      <a:round/>
+                      <a:headEnd type="none" w="med" len="med"/>
+                      <a:tailEnd type="none" w="med" len="med"/>
+                    </a:lnL>
+                    <a:lnR w="12700" cap="flat" cmpd="sng" algn="ctr">
+                      <a:solidFill>
+                        <a:srgbClr val="CBD5E0"/>
+                      </a:solidFill>
+                      <a:prstDash val="solid"/>
+                      <a:round/>
+                      <a:headEnd type="none" w="med" len="med"/>
+                      <a:tailEnd type="none" w="med" len="med"/>
+                    </a:lnR>
+                    <a:lnT w="12700" cap="flat" cmpd="sng" algn="ctr">
+                      <a:solidFill>
+                        <a:srgbClr val="CBD5E0"/>
+                      </a:solidFill>
+                      <a:prstDash val="solid"/>
+                      <a:round/>
+                      <a:headEnd type="none" w="med" len="med"/>
+                      <a:tailEnd type="none" w="med" len="med"/>
+                    </a:lnT>
+                    <a:lnB w="12700" cap="flat" cmpd="sng" algn="ctr">
+                      <a:solidFill>
+                        <a:srgbClr val="CBD5E0"/>
+                      </a:solidFill>
+                      <a:prstDash val="solid"/>
+                      <a:round/>
+                      <a:headEnd type="none" w="med" len="med"/>
+                      <a:tailEnd type="none" w="med" len="med"/>
+                    </a:lnB>
+                    <a:solidFill>
+                      <a:srgbClr val="FFFFFF"/>
+                    </a:solidFill>
+                  </a:tcPr>
+                </a:tc>
+                <a:tc>
+                  <a:txBody>
+                    <a:bodyPr/>
+                    <a:lstStyle/>
+                    <a:p>
+                      <a:pPr algn="r" indent="0" marL="0">
+                        <a:buNone/>
+                      </a:pPr>
+                      <a:r>
+                        <a:rPr lang="en-US" sz="850" dirty="0">
+                          <a:solidFill>
+                            <a:srgbClr val="2B2B2B"/>
+                          </a:solidFill>
+                          <a:latin typeface="맑은 고딕" pitchFamily="34" charset="0"/>
+                          <a:ea typeface="맑은 고딕" pitchFamily="34" charset="-122"/>
+                          <a:cs typeface="맑은 고딕" pitchFamily="34" charset="-120"/>
+                        </a:rPr>
+                        <a:t>-</a:t>
                       </a:r>
                       <a:endParaRPr lang="en-US" sz="850" dirty="0">
                         <a:latin typeface="맑은 고딕" charset="0"/>
@@ -14334,7 +14153,7 @@
                     <a:bodyPr/>
                     <a:lstStyle/>
                     <a:p>
-                      <a:pPr algn="r" indent="0" marL="0">
+                      <a:pPr algn="ctr" indent="0" marL="0">
                         <a:buNone/>
                       </a:pPr>
                       <a:r>
@@ -14397,190 +14216,8 @@
                     </a:solidFill>
                   </a:tcPr>
                 </a:tc>
-                <a:tc>
-                  <a:txBody>
-                    <a:bodyPr/>
-                    <a:lstStyle/>
-                    <a:p>
-                      <a:pPr algn="r" indent="0" marL="0">
-                        <a:buNone/>
-                      </a:pPr>
-                      <a:r>
-                        <a:rPr lang="en-US" sz="850" dirty="0">
-                          <a:solidFill>
-                            <a:srgbClr val="2B2B2B"/>
-                          </a:solidFill>
-                          <a:latin typeface="맑은 고딕" pitchFamily="34" charset="0"/>
-                          <a:ea typeface="맑은 고딕" pitchFamily="34" charset="-122"/>
-                          <a:cs typeface="맑은 고딕" pitchFamily="34" charset="-120"/>
-                        </a:rPr>
-                        <a:t>2027-12-31</a:t>
-                      </a:r>
-                      <a:endParaRPr lang="en-US" sz="850" dirty="0">
-                        <a:latin typeface="맑은 고딕" charset="0"/>
-                        <a:ea typeface="맑은 고딕" charset="0"/>
-                        <a:cs typeface="맑은 고딕" charset="0"/>
-                      </a:endParaRPr>
-                    </a:p>
-                  </a:txBody>
-                  <a:tcPr marL="91440" marR="91440" marT="45720" marB="45720" anchor="ctr">
-                    <a:lnL w="12700" cap="flat" cmpd="sng" algn="ctr">
-                      <a:solidFill>
-                        <a:srgbClr val="CBD5E0"/>
-                      </a:solidFill>
-                      <a:prstDash val="solid"/>
-                      <a:round/>
-                      <a:headEnd type="none" w="med" len="med"/>
-                      <a:tailEnd type="none" w="med" len="med"/>
-                    </a:lnL>
-                    <a:lnR w="12700" cap="flat" cmpd="sng" algn="ctr">
-                      <a:solidFill>
-                        <a:srgbClr val="CBD5E0"/>
-                      </a:solidFill>
-                      <a:prstDash val="solid"/>
-                      <a:round/>
-                      <a:headEnd type="none" w="med" len="med"/>
-                      <a:tailEnd type="none" w="med" len="med"/>
-                    </a:lnR>
-                    <a:lnT w="12700" cap="flat" cmpd="sng" algn="ctr">
-                      <a:solidFill>
-                        <a:srgbClr val="CBD5E0"/>
-                      </a:solidFill>
-                      <a:prstDash val="solid"/>
-                      <a:round/>
-                      <a:headEnd type="none" w="med" len="med"/>
-                      <a:tailEnd type="none" w="med" len="med"/>
-                    </a:lnT>
-                    <a:lnB w="12700" cap="flat" cmpd="sng" algn="ctr">
-                      <a:solidFill>
-                        <a:srgbClr val="CBD5E0"/>
-                      </a:solidFill>
-                      <a:prstDash val="solid"/>
-                      <a:round/>
-                      <a:headEnd type="none" w="med" len="med"/>
-                      <a:tailEnd type="none" w="med" len="med"/>
-                    </a:lnB>
-                    <a:solidFill>
-                      <a:srgbClr val="FFFFFF"/>
-                    </a:solidFill>
-                  </a:tcPr>
-                </a:tc>
-                <a:tc>
-                  <a:txBody>
-                    <a:bodyPr/>
-                    <a:lstStyle/>
-                    <a:p>
-                      <a:pPr algn="ctr" indent="0" marL="0">
-                        <a:buNone/>
-                      </a:pPr>
-                      <a:endParaRPr lang="en-US" sz="850" dirty="0">
-                        <a:latin typeface="맑은 고딕" charset="0"/>
-                        <a:ea typeface="맑은 고딕" charset="0"/>
-                        <a:cs typeface="맑은 고딕" charset="0"/>
-                      </a:endParaRPr>
-                    </a:p>
-                  </a:txBody>
-                  <a:tcPr marL="91440" marR="91440" marT="45720" marB="45720" anchor="ctr">
-                    <a:lnL w="12700" cap="flat" cmpd="sng" algn="ctr">
-                      <a:solidFill>
-                        <a:srgbClr val="CBD5E0"/>
-                      </a:solidFill>
-                      <a:prstDash val="solid"/>
-                      <a:round/>
-                      <a:headEnd type="none" w="med" len="med"/>
-                      <a:tailEnd type="none" w="med" len="med"/>
-                    </a:lnL>
-                    <a:lnR w="12700" cap="flat" cmpd="sng" algn="ctr">
-                      <a:solidFill>
-                        <a:srgbClr val="CBD5E0"/>
-                      </a:solidFill>
-                      <a:prstDash val="solid"/>
-                      <a:round/>
-                      <a:headEnd type="none" w="med" len="med"/>
-                      <a:tailEnd type="none" w="med" len="med"/>
-                    </a:lnR>
-                    <a:lnT w="12700" cap="flat" cmpd="sng" algn="ctr">
-                      <a:solidFill>
-                        <a:srgbClr val="CBD5E0"/>
-                      </a:solidFill>
-                      <a:prstDash val="solid"/>
-                      <a:round/>
-                      <a:headEnd type="none" w="med" len="med"/>
-                      <a:tailEnd type="none" w="med" len="med"/>
-                    </a:lnT>
-                    <a:lnB w="12700" cap="flat" cmpd="sng" algn="ctr">
-                      <a:solidFill>
-                        <a:srgbClr val="CBD5E0"/>
-                      </a:solidFill>
-                      <a:prstDash val="solid"/>
-                      <a:round/>
-                      <a:headEnd type="none" w="med" len="med"/>
-                      <a:tailEnd type="none" w="med" len="med"/>
-                    </a:lnB>
-                    <a:solidFill>
-                      <a:srgbClr val="FFFFFF"/>
-                    </a:solidFill>
-                  </a:tcPr>
-                </a:tc>
-                <a:tc>
-                  <a:txBody>
-                    <a:bodyPr/>
-                    <a:lstStyle/>
-                    <a:p>
-                      <a:pPr algn="ctr" indent="0" marL="0">
-                        <a:buNone/>
-                      </a:pPr>
-                      <a:endParaRPr lang="en-US" sz="850" dirty="0">
-                        <a:latin typeface="맑은 고딕" charset="0"/>
-                        <a:ea typeface="맑은 고딕" charset="0"/>
-                        <a:cs typeface="맑은 고딕" charset="0"/>
-                      </a:endParaRPr>
-                    </a:p>
-                  </a:txBody>
-                  <a:tcPr marL="91440" marR="91440" marT="45720" marB="45720" anchor="ctr">
-                    <a:lnL w="12700" cap="flat" cmpd="sng" algn="ctr">
-                      <a:solidFill>
-                        <a:srgbClr val="CBD5E0"/>
-                      </a:solidFill>
-                      <a:prstDash val="solid"/>
-                      <a:round/>
-                      <a:headEnd type="none" w="med" len="med"/>
-                      <a:tailEnd type="none" w="med" len="med"/>
-                    </a:lnL>
-                    <a:lnR w="12700" cap="flat" cmpd="sng" algn="ctr">
-                      <a:solidFill>
-                        <a:srgbClr val="CBD5E0"/>
-                      </a:solidFill>
-                      <a:prstDash val="solid"/>
-                      <a:round/>
-                      <a:headEnd type="none" w="med" len="med"/>
-                      <a:tailEnd type="none" w="med" len="med"/>
-                    </a:lnR>
-                    <a:lnT w="12700" cap="flat" cmpd="sng" algn="ctr">
-                      <a:solidFill>
-                        <a:srgbClr val="CBD5E0"/>
-                      </a:solidFill>
-                      <a:prstDash val="solid"/>
-                      <a:round/>
-                      <a:headEnd type="none" w="med" len="med"/>
-                      <a:tailEnd type="none" w="med" len="med"/>
-                    </a:lnT>
-                    <a:lnB w="12700" cap="flat" cmpd="sng" algn="ctr">
-                      <a:solidFill>
-                        <a:srgbClr val="CBD5E0"/>
-                      </a:solidFill>
-                      <a:prstDash val="solid"/>
-                      <a:round/>
-                      <a:headEnd type="none" w="med" len="med"/>
-                      <a:tailEnd type="none" w="med" len="med"/>
-                    </a:lnB>
-                    <a:solidFill>
-                      <a:srgbClr val="FFFFFF"/>
-                    </a:solidFill>
-                  </a:tcPr>
-                </a:tc>
               </a:tr>
-              <a:tr h="320040">
+              <a:tr h="313509">
                 <a:tc>
                   <a:txBody>
                     <a:bodyPr/>
@@ -14870,7 +14507,143 @@
                           <a:ea typeface="맑은 고딕" pitchFamily="34" charset="-122"/>
                           <a:cs typeface="맑은 고딕" pitchFamily="34" charset="-120"/>
                         </a:rPr>
-                        <a:t>209.6</a:t>
+                        <a:t>-</a:t>
+                      </a:r>
+                      <a:endParaRPr lang="en-US" sz="850" dirty="0">
+                        <a:latin typeface="맑은 고딕" charset="0"/>
+                        <a:ea typeface="맑은 고딕" charset="0"/>
+                        <a:cs typeface="맑은 고딕" charset="0"/>
+                      </a:endParaRPr>
+                    </a:p>
+                  </a:txBody>
+                  <a:tcPr marL="91440" marR="91440" marT="45720" marB="45720" anchor="ctr">
+                    <a:lnL w="12700" cap="flat" cmpd="sng" algn="ctr">
+                      <a:solidFill>
+                        <a:srgbClr val="CBD5E0"/>
+                      </a:solidFill>
+                      <a:prstDash val="solid"/>
+                      <a:round/>
+                      <a:headEnd type="none" w="med" len="med"/>
+                      <a:tailEnd type="none" w="med" len="med"/>
+                    </a:lnL>
+                    <a:lnR w="12700" cap="flat" cmpd="sng" algn="ctr">
+                      <a:solidFill>
+                        <a:srgbClr val="CBD5E0"/>
+                      </a:solidFill>
+                      <a:prstDash val="solid"/>
+                      <a:round/>
+                      <a:headEnd type="none" w="med" len="med"/>
+                      <a:tailEnd type="none" w="med" len="med"/>
+                    </a:lnR>
+                    <a:lnT w="12700" cap="flat" cmpd="sng" algn="ctr">
+                      <a:solidFill>
+                        <a:srgbClr val="CBD5E0"/>
+                      </a:solidFill>
+                      <a:prstDash val="solid"/>
+                      <a:round/>
+                      <a:headEnd type="none" w="med" len="med"/>
+                      <a:tailEnd type="none" w="med" len="med"/>
+                    </a:lnT>
+                    <a:lnB w="12700" cap="flat" cmpd="sng" algn="ctr">
+                      <a:solidFill>
+                        <a:srgbClr val="CBD5E0"/>
+                      </a:solidFill>
+                      <a:prstDash val="solid"/>
+                      <a:round/>
+                      <a:headEnd type="none" w="med" len="med"/>
+                      <a:tailEnd type="none" w="med" len="med"/>
+                    </a:lnB>
+                    <a:solidFill>
+                      <a:srgbClr val="F3F6F7"/>
+                    </a:solidFill>
+                  </a:tcPr>
+                </a:tc>
+                <a:tc>
+                  <a:txBody>
+                    <a:bodyPr/>
+                    <a:lstStyle/>
+                    <a:p>
+                      <a:pPr algn="r" indent="0" marL="0">
+                        <a:buNone/>
+                      </a:pPr>
+                      <a:r>
+                        <a:rPr lang="en-US" sz="850" dirty="0">
+                          <a:solidFill>
+                            <a:srgbClr val="2B2B2B"/>
+                          </a:solidFill>
+                          <a:latin typeface="맑은 고딕" pitchFamily="34" charset="0"/>
+                          <a:ea typeface="맑은 고딕" pitchFamily="34" charset="-122"/>
+                          <a:cs typeface="맑은 고딕" pitchFamily="34" charset="-120"/>
+                        </a:rPr>
+                        <a:t>-</a:t>
+                      </a:r>
+                      <a:endParaRPr lang="en-US" sz="850" dirty="0">
+                        <a:latin typeface="맑은 고딕" charset="0"/>
+                        <a:ea typeface="맑은 고딕" charset="0"/>
+                        <a:cs typeface="맑은 고딕" charset="0"/>
+                      </a:endParaRPr>
+                    </a:p>
+                  </a:txBody>
+                  <a:tcPr marL="91440" marR="91440" marT="45720" marB="45720" anchor="ctr">
+                    <a:lnL w="12700" cap="flat" cmpd="sng" algn="ctr">
+                      <a:solidFill>
+                        <a:srgbClr val="CBD5E0"/>
+                      </a:solidFill>
+                      <a:prstDash val="solid"/>
+                      <a:round/>
+                      <a:headEnd type="none" w="med" len="med"/>
+                      <a:tailEnd type="none" w="med" len="med"/>
+                    </a:lnL>
+                    <a:lnR w="12700" cap="flat" cmpd="sng" algn="ctr">
+                      <a:solidFill>
+                        <a:srgbClr val="CBD5E0"/>
+                      </a:solidFill>
+                      <a:prstDash val="solid"/>
+                      <a:round/>
+                      <a:headEnd type="none" w="med" len="med"/>
+                      <a:tailEnd type="none" w="med" len="med"/>
+                    </a:lnR>
+                    <a:lnT w="12700" cap="flat" cmpd="sng" algn="ctr">
+                      <a:solidFill>
+                        <a:srgbClr val="CBD5E0"/>
+                      </a:solidFill>
+                      <a:prstDash val="solid"/>
+                      <a:round/>
+                      <a:headEnd type="none" w="med" len="med"/>
+                      <a:tailEnd type="none" w="med" len="med"/>
+                    </a:lnT>
+                    <a:lnB w="12700" cap="flat" cmpd="sng" algn="ctr">
+                      <a:solidFill>
+                        <a:srgbClr val="CBD5E0"/>
+                      </a:solidFill>
+                      <a:prstDash val="solid"/>
+                      <a:round/>
+                      <a:headEnd type="none" w="med" len="med"/>
+                      <a:tailEnd type="none" w="med" len="med"/>
+                    </a:lnB>
+                    <a:solidFill>
+                      <a:srgbClr val="F3F6F7"/>
+                    </a:solidFill>
+                  </a:tcPr>
+                </a:tc>
+                <a:tc>
+                  <a:txBody>
+                    <a:bodyPr/>
+                    <a:lstStyle/>
+                    <a:p>
+                      <a:pPr algn="r" indent="0" marL="0">
+                        <a:buNone/>
+                      </a:pPr>
+                      <a:r>
+                        <a:rPr lang="en-US" sz="850" dirty="0">
+                          <a:solidFill>
+                            <a:srgbClr val="2B2B2B"/>
+                          </a:solidFill>
+                          <a:latin typeface="맑은 고딕" pitchFamily="34" charset="0"/>
+                          <a:ea typeface="맑은 고딕" pitchFamily="34" charset="-122"/>
+                          <a:cs typeface="맑은 고딕" pitchFamily="34" charset="-120"/>
+                        </a:rPr>
+                        <a:t>-</a:t>
                       </a:r>
                       <a:endParaRPr lang="en-US" sz="850" dirty="0">
                         <a:latin typeface="맑은 고딕" charset="0"/>
@@ -14994,7 +14767,7 @@
                     <a:bodyPr/>
                     <a:lstStyle/>
                     <a:p>
-                      <a:pPr algn="r" indent="0" marL="0">
+                      <a:pPr algn="ctr" indent="0" marL="0">
                         <a:buNone/>
                       </a:pPr>
                       <a:r>
@@ -15057,190 +14830,8 @@
                     </a:solidFill>
                   </a:tcPr>
                 </a:tc>
-                <a:tc>
-                  <a:txBody>
-                    <a:bodyPr/>
-                    <a:lstStyle/>
-                    <a:p>
-                      <a:pPr algn="r" indent="0" marL="0">
-                        <a:buNone/>
-                      </a:pPr>
-                      <a:r>
-                        <a:rPr lang="en-US" sz="850" dirty="0">
-                          <a:solidFill>
-                            <a:srgbClr val="2B2B2B"/>
-                          </a:solidFill>
-                          <a:latin typeface="맑은 고딕" pitchFamily="34" charset="0"/>
-                          <a:ea typeface="맑은 고딕" pitchFamily="34" charset="-122"/>
-                          <a:cs typeface="맑은 고딕" pitchFamily="34" charset="-120"/>
-                        </a:rPr>
-                        <a:t>2027-06-30</a:t>
-                      </a:r>
-                      <a:endParaRPr lang="en-US" sz="850" dirty="0">
-                        <a:latin typeface="맑은 고딕" charset="0"/>
-                        <a:ea typeface="맑은 고딕" charset="0"/>
-                        <a:cs typeface="맑은 고딕" charset="0"/>
-                      </a:endParaRPr>
-                    </a:p>
-                  </a:txBody>
-                  <a:tcPr marL="91440" marR="91440" marT="45720" marB="45720" anchor="ctr">
-                    <a:lnL w="12700" cap="flat" cmpd="sng" algn="ctr">
-                      <a:solidFill>
-                        <a:srgbClr val="CBD5E0"/>
-                      </a:solidFill>
-                      <a:prstDash val="solid"/>
-                      <a:round/>
-                      <a:headEnd type="none" w="med" len="med"/>
-                      <a:tailEnd type="none" w="med" len="med"/>
-                    </a:lnL>
-                    <a:lnR w="12700" cap="flat" cmpd="sng" algn="ctr">
-                      <a:solidFill>
-                        <a:srgbClr val="CBD5E0"/>
-                      </a:solidFill>
-                      <a:prstDash val="solid"/>
-                      <a:round/>
-                      <a:headEnd type="none" w="med" len="med"/>
-                      <a:tailEnd type="none" w="med" len="med"/>
-                    </a:lnR>
-                    <a:lnT w="12700" cap="flat" cmpd="sng" algn="ctr">
-                      <a:solidFill>
-                        <a:srgbClr val="CBD5E0"/>
-                      </a:solidFill>
-                      <a:prstDash val="solid"/>
-                      <a:round/>
-                      <a:headEnd type="none" w="med" len="med"/>
-                      <a:tailEnd type="none" w="med" len="med"/>
-                    </a:lnT>
-                    <a:lnB w="12700" cap="flat" cmpd="sng" algn="ctr">
-                      <a:solidFill>
-                        <a:srgbClr val="CBD5E0"/>
-                      </a:solidFill>
-                      <a:prstDash val="solid"/>
-                      <a:round/>
-                      <a:headEnd type="none" w="med" len="med"/>
-                      <a:tailEnd type="none" w="med" len="med"/>
-                    </a:lnB>
-                    <a:solidFill>
-                      <a:srgbClr val="F3F6F7"/>
-                    </a:solidFill>
-                  </a:tcPr>
-                </a:tc>
-                <a:tc>
-                  <a:txBody>
-                    <a:bodyPr/>
-                    <a:lstStyle/>
-                    <a:p>
-                      <a:pPr algn="ctr" indent="0" marL="0">
-                        <a:buNone/>
-                      </a:pPr>
-                      <a:endParaRPr lang="en-US" sz="850" dirty="0">
-                        <a:latin typeface="맑은 고딕" charset="0"/>
-                        <a:ea typeface="맑은 고딕" charset="0"/>
-                        <a:cs typeface="맑은 고딕" charset="0"/>
-                      </a:endParaRPr>
-                    </a:p>
-                  </a:txBody>
-                  <a:tcPr marL="91440" marR="91440" marT="45720" marB="45720" anchor="ctr">
-                    <a:lnL w="12700" cap="flat" cmpd="sng" algn="ctr">
-                      <a:solidFill>
-                        <a:srgbClr val="CBD5E0"/>
-                      </a:solidFill>
-                      <a:prstDash val="solid"/>
-                      <a:round/>
-                      <a:headEnd type="none" w="med" len="med"/>
-                      <a:tailEnd type="none" w="med" len="med"/>
-                    </a:lnL>
-                    <a:lnR w="12700" cap="flat" cmpd="sng" algn="ctr">
-                      <a:solidFill>
-                        <a:srgbClr val="CBD5E0"/>
-                      </a:solidFill>
-                      <a:prstDash val="solid"/>
-                      <a:round/>
-                      <a:headEnd type="none" w="med" len="med"/>
-                      <a:tailEnd type="none" w="med" len="med"/>
-                    </a:lnR>
-                    <a:lnT w="12700" cap="flat" cmpd="sng" algn="ctr">
-                      <a:solidFill>
-                        <a:srgbClr val="CBD5E0"/>
-                      </a:solidFill>
-                      <a:prstDash val="solid"/>
-                      <a:round/>
-                      <a:headEnd type="none" w="med" len="med"/>
-                      <a:tailEnd type="none" w="med" len="med"/>
-                    </a:lnT>
-                    <a:lnB w="12700" cap="flat" cmpd="sng" algn="ctr">
-                      <a:solidFill>
-                        <a:srgbClr val="CBD5E0"/>
-                      </a:solidFill>
-                      <a:prstDash val="solid"/>
-                      <a:round/>
-                      <a:headEnd type="none" w="med" len="med"/>
-                      <a:tailEnd type="none" w="med" len="med"/>
-                    </a:lnB>
-                    <a:solidFill>
-                      <a:srgbClr val="F3F6F7"/>
-                    </a:solidFill>
-                  </a:tcPr>
-                </a:tc>
-                <a:tc>
-                  <a:txBody>
-                    <a:bodyPr/>
-                    <a:lstStyle/>
-                    <a:p>
-                      <a:pPr algn="ctr" indent="0" marL="0">
-                        <a:buNone/>
-                      </a:pPr>
-                      <a:endParaRPr lang="en-US" sz="850" dirty="0">
-                        <a:latin typeface="맑은 고딕" charset="0"/>
-                        <a:ea typeface="맑은 고딕" charset="0"/>
-                        <a:cs typeface="맑은 고딕" charset="0"/>
-                      </a:endParaRPr>
-                    </a:p>
-                  </a:txBody>
-                  <a:tcPr marL="91440" marR="91440" marT="45720" marB="45720" anchor="ctr">
-                    <a:lnL w="12700" cap="flat" cmpd="sng" algn="ctr">
-                      <a:solidFill>
-                        <a:srgbClr val="CBD5E0"/>
-                      </a:solidFill>
-                      <a:prstDash val="solid"/>
-                      <a:round/>
-                      <a:headEnd type="none" w="med" len="med"/>
-                      <a:tailEnd type="none" w="med" len="med"/>
-                    </a:lnL>
-                    <a:lnR w="12700" cap="flat" cmpd="sng" algn="ctr">
-                      <a:solidFill>
-                        <a:srgbClr val="CBD5E0"/>
-                      </a:solidFill>
-                      <a:prstDash val="solid"/>
-                      <a:round/>
-                      <a:headEnd type="none" w="med" len="med"/>
-                      <a:tailEnd type="none" w="med" len="med"/>
-                    </a:lnR>
-                    <a:lnT w="12700" cap="flat" cmpd="sng" algn="ctr">
-                      <a:solidFill>
-                        <a:srgbClr val="CBD5E0"/>
-                      </a:solidFill>
-                      <a:prstDash val="solid"/>
-                      <a:round/>
-                      <a:headEnd type="none" w="med" len="med"/>
-                      <a:tailEnd type="none" w="med" len="med"/>
-                    </a:lnT>
-                    <a:lnB w="12700" cap="flat" cmpd="sng" algn="ctr">
-                      <a:solidFill>
-                        <a:srgbClr val="CBD5E0"/>
-                      </a:solidFill>
-                      <a:prstDash val="solid"/>
-                      <a:round/>
-                      <a:headEnd type="none" w="med" len="med"/>
-                      <a:tailEnd type="none" w="med" len="med"/>
-                    </a:lnB>
-                    <a:solidFill>
-                      <a:srgbClr val="F3F6F7"/>
-                    </a:solidFill>
-                  </a:tcPr>
-                </a:tc>
               </a:tr>
-              <a:tr h="320040">
+              <a:tr h="313509">
                 <a:tc>
                   <a:txBody>
                     <a:bodyPr/>
@@ -15530,7 +15121,143 @@
                           <a:ea typeface="맑은 고딕" pitchFamily="34" charset="-122"/>
                           <a:cs typeface="맑은 고딕" pitchFamily="34" charset="-120"/>
                         </a:rPr>
-                        <a:t>209.6</a:t>
+                        <a:t>-</a:t>
+                      </a:r>
+                      <a:endParaRPr lang="en-US" sz="850" dirty="0">
+                        <a:latin typeface="맑은 고딕" charset="0"/>
+                        <a:ea typeface="맑은 고딕" charset="0"/>
+                        <a:cs typeface="맑은 고딕" charset="0"/>
+                      </a:endParaRPr>
+                    </a:p>
+                  </a:txBody>
+                  <a:tcPr marL="91440" marR="91440" marT="45720" marB="45720" anchor="ctr">
+                    <a:lnL w="12700" cap="flat" cmpd="sng" algn="ctr">
+                      <a:solidFill>
+                        <a:srgbClr val="CBD5E0"/>
+                      </a:solidFill>
+                      <a:prstDash val="solid"/>
+                      <a:round/>
+                      <a:headEnd type="none" w="med" len="med"/>
+                      <a:tailEnd type="none" w="med" len="med"/>
+                    </a:lnL>
+                    <a:lnR w="12700" cap="flat" cmpd="sng" algn="ctr">
+                      <a:solidFill>
+                        <a:srgbClr val="CBD5E0"/>
+                      </a:solidFill>
+                      <a:prstDash val="solid"/>
+                      <a:round/>
+                      <a:headEnd type="none" w="med" len="med"/>
+                      <a:tailEnd type="none" w="med" len="med"/>
+                    </a:lnR>
+                    <a:lnT w="12700" cap="flat" cmpd="sng" algn="ctr">
+                      <a:solidFill>
+                        <a:srgbClr val="CBD5E0"/>
+                      </a:solidFill>
+                      <a:prstDash val="solid"/>
+                      <a:round/>
+                      <a:headEnd type="none" w="med" len="med"/>
+                      <a:tailEnd type="none" w="med" len="med"/>
+                    </a:lnT>
+                    <a:lnB w="12700" cap="flat" cmpd="sng" algn="ctr">
+                      <a:solidFill>
+                        <a:srgbClr val="CBD5E0"/>
+                      </a:solidFill>
+                      <a:prstDash val="solid"/>
+                      <a:round/>
+                      <a:headEnd type="none" w="med" len="med"/>
+                      <a:tailEnd type="none" w="med" len="med"/>
+                    </a:lnB>
+                    <a:solidFill>
+                      <a:srgbClr val="FFFFFF"/>
+                    </a:solidFill>
+                  </a:tcPr>
+                </a:tc>
+                <a:tc>
+                  <a:txBody>
+                    <a:bodyPr/>
+                    <a:lstStyle/>
+                    <a:p>
+                      <a:pPr algn="r" indent="0" marL="0">
+                        <a:buNone/>
+                      </a:pPr>
+                      <a:r>
+                        <a:rPr lang="en-US" sz="850" dirty="0">
+                          <a:solidFill>
+                            <a:srgbClr val="2B2B2B"/>
+                          </a:solidFill>
+                          <a:latin typeface="맑은 고딕" pitchFamily="34" charset="0"/>
+                          <a:ea typeface="맑은 고딕" pitchFamily="34" charset="-122"/>
+                          <a:cs typeface="맑은 고딕" pitchFamily="34" charset="-120"/>
+                        </a:rPr>
+                        <a:t>-</a:t>
+                      </a:r>
+                      <a:endParaRPr lang="en-US" sz="850" dirty="0">
+                        <a:latin typeface="맑은 고딕" charset="0"/>
+                        <a:ea typeface="맑은 고딕" charset="0"/>
+                        <a:cs typeface="맑은 고딕" charset="0"/>
+                      </a:endParaRPr>
+                    </a:p>
+                  </a:txBody>
+                  <a:tcPr marL="91440" marR="91440" marT="45720" marB="45720" anchor="ctr">
+                    <a:lnL w="12700" cap="flat" cmpd="sng" algn="ctr">
+                      <a:solidFill>
+                        <a:srgbClr val="CBD5E0"/>
+                      </a:solidFill>
+                      <a:prstDash val="solid"/>
+                      <a:round/>
+                      <a:headEnd type="none" w="med" len="med"/>
+                      <a:tailEnd type="none" w="med" len="med"/>
+                    </a:lnL>
+                    <a:lnR w="12700" cap="flat" cmpd="sng" algn="ctr">
+                      <a:solidFill>
+                        <a:srgbClr val="CBD5E0"/>
+                      </a:solidFill>
+                      <a:prstDash val="solid"/>
+                      <a:round/>
+                      <a:headEnd type="none" w="med" len="med"/>
+                      <a:tailEnd type="none" w="med" len="med"/>
+                    </a:lnR>
+                    <a:lnT w="12700" cap="flat" cmpd="sng" algn="ctr">
+                      <a:solidFill>
+                        <a:srgbClr val="CBD5E0"/>
+                      </a:solidFill>
+                      <a:prstDash val="solid"/>
+                      <a:round/>
+                      <a:headEnd type="none" w="med" len="med"/>
+                      <a:tailEnd type="none" w="med" len="med"/>
+                    </a:lnT>
+                    <a:lnB w="12700" cap="flat" cmpd="sng" algn="ctr">
+                      <a:solidFill>
+                        <a:srgbClr val="CBD5E0"/>
+                      </a:solidFill>
+                      <a:prstDash val="solid"/>
+                      <a:round/>
+                      <a:headEnd type="none" w="med" len="med"/>
+                      <a:tailEnd type="none" w="med" len="med"/>
+                    </a:lnB>
+                    <a:solidFill>
+                      <a:srgbClr val="FFFFFF"/>
+                    </a:solidFill>
+                  </a:tcPr>
+                </a:tc>
+                <a:tc>
+                  <a:txBody>
+                    <a:bodyPr/>
+                    <a:lstStyle/>
+                    <a:p>
+                      <a:pPr algn="r" indent="0" marL="0">
+                        <a:buNone/>
+                      </a:pPr>
+                      <a:r>
+                        <a:rPr lang="en-US" sz="850" dirty="0">
+                          <a:solidFill>
+                            <a:srgbClr val="2B2B2B"/>
+                          </a:solidFill>
+                          <a:latin typeface="맑은 고딕" pitchFamily="34" charset="0"/>
+                          <a:ea typeface="맑은 고딕" pitchFamily="34" charset="-122"/>
+                          <a:cs typeface="맑은 고딕" pitchFamily="34" charset="-120"/>
+                        </a:rPr>
+                        <a:t>-</a:t>
                       </a:r>
                       <a:endParaRPr lang="en-US" sz="850" dirty="0">
                         <a:latin typeface="맑은 고딕" charset="0"/>
@@ -15654,7 +15381,7 @@
                     <a:bodyPr/>
                     <a:lstStyle/>
                     <a:p>
-                      <a:pPr algn="r" indent="0" marL="0">
+                      <a:pPr algn="ctr" indent="0" marL="0">
                         <a:buNone/>
                       </a:pPr>
                       <a:r>
@@ -15717,190 +15444,8 @@
                     </a:solidFill>
                   </a:tcPr>
                 </a:tc>
-                <a:tc>
-                  <a:txBody>
-                    <a:bodyPr/>
-                    <a:lstStyle/>
-                    <a:p>
-                      <a:pPr algn="r" indent="0" marL="0">
-                        <a:buNone/>
-                      </a:pPr>
-                      <a:r>
-                        <a:rPr lang="en-US" sz="850" dirty="0">
-                          <a:solidFill>
-                            <a:srgbClr val="2B2B2B"/>
-                          </a:solidFill>
-                          <a:latin typeface="맑은 고딕" pitchFamily="34" charset="0"/>
-                          <a:ea typeface="맑은 고딕" pitchFamily="34" charset="-122"/>
-                          <a:cs typeface="맑은 고딕" pitchFamily="34" charset="-120"/>
-                        </a:rPr>
-                        <a:t>2028-02-28</a:t>
-                      </a:r>
-                      <a:endParaRPr lang="en-US" sz="850" dirty="0">
-                        <a:latin typeface="맑은 고딕" charset="0"/>
-                        <a:ea typeface="맑은 고딕" charset="0"/>
-                        <a:cs typeface="맑은 고딕" charset="0"/>
-                      </a:endParaRPr>
-                    </a:p>
-                  </a:txBody>
-                  <a:tcPr marL="91440" marR="91440" marT="45720" marB="45720" anchor="ctr">
-                    <a:lnL w="12700" cap="flat" cmpd="sng" algn="ctr">
-                      <a:solidFill>
-                        <a:srgbClr val="CBD5E0"/>
-                      </a:solidFill>
-                      <a:prstDash val="solid"/>
-                      <a:round/>
-                      <a:headEnd type="none" w="med" len="med"/>
-                      <a:tailEnd type="none" w="med" len="med"/>
-                    </a:lnL>
-                    <a:lnR w="12700" cap="flat" cmpd="sng" algn="ctr">
-                      <a:solidFill>
-                        <a:srgbClr val="CBD5E0"/>
-                      </a:solidFill>
-                      <a:prstDash val="solid"/>
-                      <a:round/>
-                      <a:headEnd type="none" w="med" len="med"/>
-                      <a:tailEnd type="none" w="med" len="med"/>
-                    </a:lnR>
-                    <a:lnT w="12700" cap="flat" cmpd="sng" algn="ctr">
-                      <a:solidFill>
-                        <a:srgbClr val="CBD5E0"/>
-                      </a:solidFill>
-                      <a:prstDash val="solid"/>
-                      <a:round/>
-                      <a:headEnd type="none" w="med" len="med"/>
-                      <a:tailEnd type="none" w="med" len="med"/>
-                    </a:lnT>
-                    <a:lnB w="12700" cap="flat" cmpd="sng" algn="ctr">
-                      <a:solidFill>
-                        <a:srgbClr val="CBD5E0"/>
-                      </a:solidFill>
-                      <a:prstDash val="solid"/>
-                      <a:round/>
-                      <a:headEnd type="none" w="med" len="med"/>
-                      <a:tailEnd type="none" w="med" len="med"/>
-                    </a:lnB>
-                    <a:solidFill>
-                      <a:srgbClr val="FFFFFF"/>
-                    </a:solidFill>
-                  </a:tcPr>
-                </a:tc>
-                <a:tc>
-                  <a:txBody>
-                    <a:bodyPr/>
-                    <a:lstStyle/>
-                    <a:p>
-                      <a:pPr algn="ctr" indent="0" marL="0">
-                        <a:buNone/>
-                      </a:pPr>
-                      <a:endParaRPr lang="en-US" sz="850" dirty="0">
-                        <a:latin typeface="맑은 고딕" charset="0"/>
-                        <a:ea typeface="맑은 고딕" charset="0"/>
-                        <a:cs typeface="맑은 고딕" charset="0"/>
-                      </a:endParaRPr>
-                    </a:p>
-                  </a:txBody>
-                  <a:tcPr marL="91440" marR="91440" marT="45720" marB="45720" anchor="ctr">
-                    <a:lnL w="12700" cap="flat" cmpd="sng" algn="ctr">
-                      <a:solidFill>
-                        <a:srgbClr val="CBD5E0"/>
-                      </a:solidFill>
-                      <a:prstDash val="solid"/>
-                      <a:round/>
-                      <a:headEnd type="none" w="med" len="med"/>
-                      <a:tailEnd type="none" w="med" len="med"/>
-                    </a:lnL>
-                    <a:lnR w="12700" cap="flat" cmpd="sng" algn="ctr">
-                      <a:solidFill>
-                        <a:srgbClr val="CBD5E0"/>
-                      </a:solidFill>
-                      <a:prstDash val="solid"/>
-                      <a:round/>
-                      <a:headEnd type="none" w="med" len="med"/>
-                      <a:tailEnd type="none" w="med" len="med"/>
-                    </a:lnR>
-                    <a:lnT w="12700" cap="flat" cmpd="sng" algn="ctr">
-                      <a:solidFill>
-                        <a:srgbClr val="CBD5E0"/>
-                      </a:solidFill>
-                      <a:prstDash val="solid"/>
-                      <a:round/>
-                      <a:headEnd type="none" w="med" len="med"/>
-                      <a:tailEnd type="none" w="med" len="med"/>
-                    </a:lnT>
-                    <a:lnB w="12700" cap="flat" cmpd="sng" algn="ctr">
-                      <a:solidFill>
-                        <a:srgbClr val="CBD5E0"/>
-                      </a:solidFill>
-                      <a:prstDash val="solid"/>
-                      <a:round/>
-                      <a:headEnd type="none" w="med" len="med"/>
-                      <a:tailEnd type="none" w="med" len="med"/>
-                    </a:lnB>
-                    <a:solidFill>
-                      <a:srgbClr val="FFFFFF"/>
-                    </a:solidFill>
-                  </a:tcPr>
-                </a:tc>
-                <a:tc>
-                  <a:txBody>
-                    <a:bodyPr/>
-                    <a:lstStyle/>
-                    <a:p>
-                      <a:pPr algn="ctr" indent="0" marL="0">
-                        <a:buNone/>
-                      </a:pPr>
-                      <a:endParaRPr lang="en-US" sz="850" dirty="0">
-                        <a:latin typeface="맑은 고딕" charset="0"/>
-                        <a:ea typeface="맑은 고딕" charset="0"/>
-                        <a:cs typeface="맑은 고딕" charset="0"/>
-                      </a:endParaRPr>
-                    </a:p>
-                  </a:txBody>
-                  <a:tcPr marL="91440" marR="91440" marT="45720" marB="45720" anchor="ctr">
-                    <a:lnL w="12700" cap="flat" cmpd="sng" algn="ctr">
-                      <a:solidFill>
-                        <a:srgbClr val="CBD5E0"/>
-                      </a:solidFill>
-                      <a:prstDash val="solid"/>
-                      <a:round/>
-                      <a:headEnd type="none" w="med" len="med"/>
-                      <a:tailEnd type="none" w="med" len="med"/>
-                    </a:lnL>
-                    <a:lnR w="12700" cap="flat" cmpd="sng" algn="ctr">
-                      <a:solidFill>
-                        <a:srgbClr val="CBD5E0"/>
-                      </a:solidFill>
-                      <a:prstDash val="solid"/>
-                      <a:round/>
-                      <a:headEnd type="none" w="med" len="med"/>
-                      <a:tailEnd type="none" w="med" len="med"/>
-                    </a:lnR>
-                    <a:lnT w="12700" cap="flat" cmpd="sng" algn="ctr">
-                      <a:solidFill>
-                        <a:srgbClr val="CBD5E0"/>
-                      </a:solidFill>
-                      <a:prstDash val="solid"/>
-                      <a:round/>
-                      <a:headEnd type="none" w="med" len="med"/>
-                      <a:tailEnd type="none" w="med" len="med"/>
-                    </a:lnT>
-                    <a:lnB w="12700" cap="flat" cmpd="sng" algn="ctr">
-                      <a:solidFill>
-                        <a:srgbClr val="CBD5E0"/>
-                      </a:solidFill>
-                      <a:prstDash val="solid"/>
-                      <a:round/>
-                      <a:headEnd type="none" w="med" len="med"/>
-                      <a:tailEnd type="none" w="med" len="med"/>
-                    </a:lnB>
-                    <a:solidFill>
-                      <a:srgbClr val="FFFFFF"/>
-                    </a:solidFill>
-                  </a:tcPr>
-                </a:tc>
               </a:tr>
-              <a:tr h="320040">
+              <a:tr h="313509">
                 <a:tc>
                   <a:txBody>
                     <a:bodyPr/>
@@ -16190,7 +15735,143 @@
                           <a:ea typeface="맑은 고딕" pitchFamily="34" charset="-122"/>
                           <a:cs typeface="맑은 고딕" pitchFamily="34" charset="-120"/>
                         </a:rPr>
-                        <a:t>105.8</a:t>
+                        <a:t>-</a:t>
+                      </a:r>
+                      <a:endParaRPr lang="en-US" sz="850" dirty="0">
+                        <a:latin typeface="맑은 고딕" charset="0"/>
+                        <a:ea typeface="맑은 고딕" charset="0"/>
+                        <a:cs typeface="맑은 고딕" charset="0"/>
+                      </a:endParaRPr>
+                    </a:p>
+                  </a:txBody>
+                  <a:tcPr marL="91440" marR="91440" marT="45720" marB="45720" anchor="ctr">
+                    <a:lnL w="12700" cap="flat" cmpd="sng" algn="ctr">
+                      <a:solidFill>
+                        <a:srgbClr val="CBD5E0"/>
+                      </a:solidFill>
+                      <a:prstDash val="solid"/>
+                      <a:round/>
+                      <a:headEnd type="none" w="med" len="med"/>
+                      <a:tailEnd type="none" w="med" len="med"/>
+                    </a:lnL>
+                    <a:lnR w="12700" cap="flat" cmpd="sng" algn="ctr">
+                      <a:solidFill>
+                        <a:srgbClr val="CBD5E0"/>
+                      </a:solidFill>
+                      <a:prstDash val="solid"/>
+                      <a:round/>
+                      <a:headEnd type="none" w="med" len="med"/>
+                      <a:tailEnd type="none" w="med" len="med"/>
+                    </a:lnR>
+                    <a:lnT w="12700" cap="flat" cmpd="sng" algn="ctr">
+                      <a:solidFill>
+                        <a:srgbClr val="CBD5E0"/>
+                      </a:solidFill>
+                      <a:prstDash val="solid"/>
+                      <a:round/>
+                      <a:headEnd type="none" w="med" len="med"/>
+                      <a:tailEnd type="none" w="med" len="med"/>
+                    </a:lnT>
+                    <a:lnB w="12700" cap="flat" cmpd="sng" algn="ctr">
+                      <a:solidFill>
+                        <a:srgbClr val="CBD5E0"/>
+                      </a:solidFill>
+                      <a:prstDash val="solid"/>
+                      <a:round/>
+                      <a:headEnd type="none" w="med" len="med"/>
+                      <a:tailEnd type="none" w="med" len="med"/>
+                    </a:lnB>
+                    <a:solidFill>
+                      <a:srgbClr val="F3F6F7"/>
+                    </a:solidFill>
+                  </a:tcPr>
+                </a:tc>
+                <a:tc>
+                  <a:txBody>
+                    <a:bodyPr/>
+                    <a:lstStyle/>
+                    <a:p>
+                      <a:pPr algn="r" indent="0" marL="0">
+                        <a:buNone/>
+                      </a:pPr>
+                      <a:r>
+                        <a:rPr lang="en-US" sz="850" dirty="0">
+                          <a:solidFill>
+                            <a:srgbClr val="2B2B2B"/>
+                          </a:solidFill>
+                          <a:latin typeface="맑은 고딕" pitchFamily="34" charset="0"/>
+                          <a:ea typeface="맑은 고딕" pitchFamily="34" charset="-122"/>
+                          <a:cs typeface="맑은 고딕" pitchFamily="34" charset="-120"/>
+                        </a:rPr>
+                        <a:t>-</a:t>
+                      </a:r>
+                      <a:endParaRPr lang="en-US" sz="850" dirty="0">
+                        <a:latin typeface="맑은 고딕" charset="0"/>
+                        <a:ea typeface="맑은 고딕" charset="0"/>
+                        <a:cs typeface="맑은 고딕" charset="0"/>
+                      </a:endParaRPr>
+                    </a:p>
+                  </a:txBody>
+                  <a:tcPr marL="91440" marR="91440" marT="45720" marB="45720" anchor="ctr">
+                    <a:lnL w="12700" cap="flat" cmpd="sng" algn="ctr">
+                      <a:solidFill>
+                        <a:srgbClr val="CBD5E0"/>
+                      </a:solidFill>
+                      <a:prstDash val="solid"/>
+                      <a:round/>
+                      <a:headEnd type="none" w="med" len="med"/>
+                      <a:tailEnd type="none" w="med" len="med"/>
+                    </a:lnL>
+                    <a:lnR w="12700" cap="flat" cmpd="sng" algn="ctr">
+                      <a:solidFill>
+                        <a:srgbClr val="CBD5E0"/>
+                      </a:solidFill>
+                      <a:prstDash val="solid"/>
+                      <a:round/>
+                      <a:headEnd type="none" w="med" len="med"/>
+                      <a:tailEnd type="none" w="med" len="med"/>
+                    </a:lnR>
+                    <a:lnT w="12700" cap="flat" cmpd="sng" algn="ctr">
+                      <a:solidFill>
+                        <a:srgbClr val="CBD5E0"/>
+                      </a:solidFill>
+                      <a:prstDash val="solid"/>
+                      <a:round/>
+                      <a:headEnd type="none" w="med" len="med"/>
+                      <a:tailEnd type="none" w="med" len="med"/>
+                    </a:lnT>
+                    <a:lnB w="12700" cap="flat" cmpd="sng" algn="ctr">
+                      <a:solidFill>
+                        <a:srgbClr val="CBD5E0"/>
+                      </a:solidFill>
+                      <a:prstDash val="solid"/>
+                      <a:round/>
+                      <a:headEnd type="none" w="med" len="med"/>
+                      <a:tailEnd type="none" w="med" len="med"/>
+                    </a:lnB>
+                    <a:solidFill>
+                      <a:srgbClr val="F3F6F7"/>
+                    </a:solidFill>
+                  </a:tcPr>
+                </a:tc>
+                <a:tc>
+                  <a:txBody>
+                    <a:bodyPr/>
+                    <a:lstStyle/>
+                    <a:p>
+                      <a:pPr algn="r" indent="0" marL="0">
+                        <a:buNone/>
+                      </a:pPr>
+                      <a:r>
+                        <a:rPr lang="en-US" sz="850" dirty="0">
+                          <a:solidFill>
+                            <a:srgbClr val="2B2B2B"/>
+                          </a:solidFill>
+                          <a:latin typeface="맑은 고딕" pitchFamily="34" charset="0"/>
+                          <a:ea typeface="맑은 고딕" pitchFamily="34" charset="-122"/>
+                          <a:cs typeface="맑은 고딕" pitchFamily="34" charset="-120"/>
+                        </a:rPr>
+                        <a:t>-</a:t>
                       </a:r>
                       <a:endParaRPr lang="en-US" sz="850" dirty="0">
                         <a:latin typeface="맑은 고딕" charset="0"/>
@@ -16314,6 +15995,348 @@
                     <a:bodyPr/>
                     <a:lstStyle/>
                     <a:p>
+                      <a:pPr algn="ctr" indent="0" marL="0">
+                        <a:buNone/>
+                      </a:pPr>
+                      <a:r>
+                        <a:rPr lang="en-US" sz="850" dirty="0">
+                          <a:solidFill>
+                            <a:srgbClr val="2B2B2B"/>
+                          </a:solidFill>
+                          <a:latin typeface="맑은 고딕" pitchFamily="34" charset="0"/>
+                          <a:ea typeface="맑은 고딕" pitchFamily="34" charset="-122"/>
+                          <a:cs typeface="맑은 고딕" pitchFamily="34" charset="-120"/>
+                        </a:rPr>
+                        <a:t>250</a:t>
+                      </a:r>
+                      <a:endParaRPr lang="en-US" sz="850" dirty="0">
+                        <a:latin typeface="맑은 고딕" charset="0"/>
+                        <a:ea typeface="맑은 고딕" charset="0"/>
+                        <a:cs typeface="맑은 고딕" charset="0"/>
+                      </a:endParaRPr>
+                    </a:p>
+                  </a:txBody>
+                  <a:tcPr marL="91440" marR="91440" marT="45720" marB="45720" anchor="ctr">
+                    <a:lnL w="12700" cap="flat" cmpd="sng" algn="ctr">
+                      <a:solidFill>
+                        <a:srgbClr val="CBD5E0"/>
+                      </a:solidFill>
+                      <a:prstDash val="solid"/>
+                      <a:round/>
+                      <a:headEnd type="none" w="med" len="med"/>
+                      <a:tailEnd type="none" w="med" len="med"/>
+                    </a:lnL>
+                    <a:lnR w="12700" cap="flat" cmpd="sng" algn="ctr">
+                      <a:solidFill>
+                        <a:srgbClr val="CBD5E0"/>
+                      </a:solidFill>
+                      <a:prstDash val="solid"/>
+                      <a:round/>
+                      <a:headEnd type="none" w="med" len="med"/>
+                      <a:tailEnd type="none" w="med" len="med"/>
+                    </a:lnR>
+                    <a:lnT w="12700" cap="flat" cmpd="sng" algn="ctr">
+                      <a:solidFill>
+                        <a:srgbClr val="CBD5E0"/>
+                      </a:solidFill>
+                      <a:prstDash val="solid"/>
+                      <a:round/>
+                      <a:headEnd type="none" w="med" len="med"/>
+                      <a:tailEnd type="none" w="med" len="med"/>
+                    </a:lnT>
+                    <a:lnB w="12700" cap="flat" cmpd="sng" algn="ctr">
+                      <a:solidFill>
+                        <a:srgbClr val="CBD5E0"/>
+                      </a:solidFill>
+                      <a:prstDash val="solid"/>
+                      <a:round/>
+                      <a:headEnd type="none" w="med" len="med"/>
+                      <a:tailEnd type="none" w="med" len="med"/>
+                    </a:lnB>
+                    <a:solidFill>
+                      <a:srgbClr val="F3F6F7"/>
+                    </a:solidFill>
+                  </a:tcPr>
+                </a:tc>
+              </a:tr>
+              <a:tr h="313509">
+                <a:tc>
+                  <a:txBody>
+                    <a:bodyPr/>
+                    <a:lstStyle/>
+                    <a:p>
+                      <a:pPr algn="ctr" indent="0" marL="0">
+                        <a:buNone/>
+                      </a:pPr>
+                      <a:r>
+                        <a:rPr lang="en-US" sz="850" dirty="0">
+                          <a:solidFill>
+                            <a:srgbClr val="2B2B2B"/>
+                          </a:solidFill>
+                          <a:latin typeface="맑은 고딕" pitchFamily="34" charset="0"/>
+                          <a:ea typeface="맑은 고딕" pitchFamily="34" charset="-122"/>
+                          <a:cs typeface="맑은 고딕" pitchFamily="34" charset="-120"/>
+                        </a:rPr>
+                        <a:t>9F-B</a:t>
+                      </a:r>
+                      <a:endParaRPr lang="en-US" sz="850" dirty="0">
+                        <a:latin typeface="맑은 고딕" charset="0"/>
+                        <a:ea typeface="맑은 고딕" charset="0"/>
+                        <a:cs typeface="맑은 고딕" charset="0"/>
+                      </a:endParaRPr>
+                    </a:p>
+                  </a:txBody>
+                  <a:tcPr marL="91440" marR="91440" marT="45720" marB="45720" anchor="ctr">
+                    <a:lnL w="12700" cap="flat" cmpd="sng" algn="ctr">
+                      <a:solidFill>
+                        <a:srgbClr val="CBD5E0"/>
+                      </a:solidFill>
+                      <a:prstDash val="solid"/>
+                      <a:round/>
+                      <a:headEnd type="none" w="med" len="med"/>
+                      <a:tailEnd type="none" w="med" len="med"/>
+                    </a:lnL>
+                    <a:lnR w="12700" cap="flat" cmpd="sng" algn="ctr">
+                      <a:solidFill>
+                        <a:srgbClr val="CBD5E0"/>
+                      </a:solidFill>
+                      <a:prstDash val="solid"/>
+                      <a:round/>
+                      <a:headEnd type="none" w="med" len="med"/>
+                      <a:tailEnd type="none" w="med" len="med"/>
+                    </a:lnR>
+                    <a:lnT w="12700" cap="flat" cmpd="sng" algn="ctr">
+                      <a:solidFill>
+                        <a:srgbClr val="CBD5E0"/>
+                      </a:solidFill>
+                      <a:prstDash val="solid"/>
+                      <a:round/>
+                      <a:headEnd type="none" w="med" len="med"/>
+                      <a:tailEnd type="none" w="med" len="med"/>
+                    </a:lnT>
+                    <a:lnB w="12700" cap="flat" cmpd="sng" algn="ctr">
+                      <a:solidFill>
+                        <a:srgbClr val="CBD5E0"/>
+                      </a:solidFill>
+                      <a:prstDash val="solid"/>
+                      <a:round/>
+                      <a:headEnd type="none" w="med" len="med"/>
+                      <a:tailEnd type="none" w="med" len="med"/>
+                    </a:lnB>
+                    <a:solidFill>
+                      <a:srgbClr val="FFFFFF"/>
+                    </a:solidFill>
+                  </a:tcPr>
+                </a:tc>
+                <a:tc>
+                  <a:txBody>
+                    <a:bodyPr/>
+                    <a:lstStyle/>
+                    <a:p>
+                      <a:pPr algn="ctr" indent="0" marL="0">
+                        <a:buNone/>
+                      </a:pPr>
+                      <a:r>
+                        <a:rPr lang="en-US" sz="850" dirty="0">
+                          <a:solidFill>
+                            <a:srgbClr val="2B2B2B"/>
+                          </a:solidFill>
+                          <a:latin typeface="맑은 고딕" pitchFamily="34" charset="0"/>
+                          <a:ea typeface="맑은 고딕" pitchFamily="34" charset="-122"/>
+                          <a:cs typeface="맑은 고딕" pitchFamily="34" charset="-120"/>
+                        </a:rPr>
+                        <a:t>-</a:t>
+                      </a:r>
+                      <a:endParaRPr lang="en-US" sz="850" dirty="0">
+                        <a:latin typeface="맑은 고딕" charset="0"/>
+                        <a:ea typeface="맑은 고딕" charset="0"/>
+                        <a:cs typeface="맑은 고딕" charset="0"/>
+                      </a:endParaRPr>
+                    </a:p>
+                  </a:txBody>
+                  <a:tcPr marL="91440" marR="91440" marT="45720" marB="45720" anchor="ctr">
+                    <a:lnL w="12700" cap="flat" cmpd="sng" algn="ctr">
+                      <a:solidFill>
+                        <a:srgbClr val="CBD5E0"/>
+                      </a:solidFill>
+                      <a:prstDash val="solid"/>
+                      <a:round/>
+                      <a:headEnd type="none" w="med" len="med"/>
+                      <a:tailEnd type="none" w="med" len="med"/>
+                    </a:lnL>
+                    <a:lnR w="12700" cap="flat" cmpd="sng" algn="ctr">
+                      <a:solidFill>
+                        <a:srgbClr val="CBD5E0"/>
+                      </a:solidFill>
+                      <a:prstDash val="solid"/>
+                      <a:round/>
+                      <a:headEnd type="none" w="med" len="med"/>
+                      <a:tailEnd type="none" w="med" len="med"/>
+                    </a:lnR>
+                    <a:lnT w="12700" cap="flat" cmpd="sng" algn="ctr">
+                      <a:solidFill>
+                        <a:srgbClr val="CBD5E0"/>
+                      </a:solidFill>
+                      <a:prstDash val="solid"/>
+                      <a:round/>
+                      <a:headEnd type="none" w="med" len="med"/>
+                      <a:tailEnd type="none" w="med" len="med"/>
+                    </a:lnT>
+                    <a:lnB w="12700" cap="flat" cmpd="sng" algn="ctr">
+                      <a:solidFill>
+                        <a:srgbClr val="CBD5E0"/>
+                      </a:solidFill>
+                      <a:prstDash val="solid"/>
+                      <a:round/>
+                      <a:headEnd type="none" w="med" len="med"/>
+                      <a:tailEnd type="none" w="med" len="med"/>
+                    </a:lnB>
+                    <a:solidFill>
+                      <a:srgbClr val="FFFFFF"/>
+                    </a:solidFill>
+                  </a:tcPr>
+                </a:tc>
+                <a:tc>
+                  <a:txBody>
+                    <a:bodyPr/>
+                    <a:lstStyle/>
+                    <a:p>
+                      <a:pPr algn="ctr" indent="0" marL="0">
+                        <a:buNone/>
+                      </a:pPr>
+                      <a:r>
+                        <a:rPr lang="en-US" sz="850" dirty="0">
+                          <a:solidFill>
+                            <a:srgbClr val="2B2B2B"/>
+                          </a:solidFill>
+                          <a:latin typeface="맑은 고딕" pitchFamily="34" charset="0"/>
+                          <a:ea typeface="맑은 고딕" pitchFamily="34" charset="-122"/>
+                          <a:cs typeface="맑은 고딕" pitchFamily="34" charset="-120"/>
+                        </a:rPr>
+                        <a:t>세무사</a:t>
+                      </a:r>
+                      <a:endParaRPr lang="en-US" sz="850" dirty="0">
+                        <a:latin typeface="맑은 고딕" charset="0"/>
+                        <a:ea typeface="맑은 고딕" charset="0"/>
+                        <a:cs typeface="맑은 고딕" charset="0"/>
+                      </a:endParaRPr>
+                    </a:p>
+                  </a:txBody>
+                  <a:tcPr marL="91440" marR="91440" marT="45720" marB="45720" anchor="ctr">
+                    <a:lnL w="12700" cap="flat" cmpd="sng" algn="ctr">
+                      <a:solidFill>
+                        <a:srgbClr val="CBD5E0"/>
+                      </a:solidFill>
+                      <a:prstDash val="solid"/>
+                      <a:round/>
+                      <a:headEnd type="none" w="med" len="med"/>
+                      <a:tailEnd type="none" w="med" len="med"/>
+                    </a:lnL>
+                    <a:lnR w="12700" cap="flat" cmpd="sng" algn="ctr">
+                      <a:solidFill>
+                        <a:srgbClr val="CBD5E0"/>
+                      </a:solidFill>
+                      <a:prstDash val="solid"/>
+                      <a:round/>
+                      <a:headEnd type="none" w="med" len="med"/>
+                      <a:tailEnd type="none" w="med" len="med"/>
+                    </a:lnR>
+                    <a:lnT w="12700" cap="flat" cmpd="sng" algn="ctr">
+                      <a:solidFill>
+                        <a:srgbClr val="CBD5E0"/>
+                      </a:solidFill>
+                      <a:prstDash val="solid"/>
+                      <a:round/>
+                      <a:headEnd type="none" w="med" len="med"/>
+                      <a:tailEnd type="none" w="med" len="med"/>
+                    </a:lnT>
+                    <a:lnB w="12700" cap="flat" cmpd="sng" algn="ctr">
+                      <a:solidFill>
+                        <a:srgbClr val="CBD5E0"/>
+                      </a:solidFill>
+                      <a:prstDash val="solid"/>
+                      <a:round/>
+                      <a:headEnd type="none" w="med" len="med"/>
+                      <a:tailEnd type="none" w="med" len="med"/>
+                    </a:lnB>
+                    <a:solidFill>
+                      <a:srgbClr val="FFFFFF"/>
+                    </a:solidFill>
+                  </a:tcPr>
+                </a:tc>
+                <a:tc>
+                  <a:txBody>
+                    <a:bodyPr/>
+                    <a:lstStyle/>
+                    <a:p>
+                      <a:pPr algn="ctr" indent="0" marL="0">
+                        <a:buNone/>
+                      </a:pPr>
+                      <a:r>
+                        <a:rPr lang="en-US" sz="850" dirty="0">
+                          <a:solidFill>
+                            <a:srgbClr val="2B2B2B"/>
+                          </a:solidFill>
+                          <a:latin typeface="맑은 고딕" pitchFamily="34" charset="0"/>
+                          <a:ea typeface="맑은 고딕" pitchFamily="34" charset="-122"/>
+                          <a:cs typeface="맑은 고딕" pitchFamily="34" charset="-120"/>
+                        </a:rPr>
+                        <a:t>세무사</a:t>
+                      </a:r>
+                      <a:endParaRPr lang="en-US" sz="850" dirty="0">
+                        <a:latin typeface="맑은 고딕" charset="0"/>
+                        <a:ea typeface="맑은 고딕" charset="0"/>
+                        <a:cs typeface="맑은 고딕" charset="0"/>
+                      </a:endParaRPr>
+                    </a:p>
+                  </a:txBody>
+                  <a:tcPr marL="91440" marR="91440" marT="45720" marB="45720" anchor="ctr">
+                    <a:lnL w="12700" cap="flat" cmpd="sng" algn="ctr">
+                      <a:solidFill>
+                        <a:srgbClr val="CBD5E0"/>
+                      </a:solidFill>
+                      <a:prstDash val="solid"/>
+                      <a:round/>
+                      <a:headEnd type="none" w="med" len="med"/>
+                      <a:tailEnd type="none" w="med" len="med"/>
+                    </a:lnL>
+                    <a:lnR w="12700" cap="flat" cmpd="sng" algn="ctr">
+                      <a:solidFill>
+                        <a:srgbClr val="CBD5E0"/>
+                      </a:solidFill>
+                      <a:prstDash val="solid"/>
+                      <a:round/>
+                      <a:headEnd type="none" w="med" len="med"/>
+                      <a:tailEnd type="none" w="med" len="med"/>
+                    </a:lnR>
+                    <a:lnT w="12700" cap="flat" cmpd="sng" algn="ctr">
+                      <a:solidFill>
+                        <a:srgbClr val="CBD5E0"/>
+                      </a:solidFill>
+                      <a:prstDash val="solid"/>
+                      <a:round/>
+                      <a:headEnd type="none" w="med" len="med"/>
+                      <a:tailEnd type="none" w="med" len="med"/>
+                    </a:lnT>
+                    <a:lnB w="12700" cap="flat" cmpd="sng" algn="ctr">
+                      <a:solidFill>
+                        <a:srgbClr val="CBD5E0"/>
+                      </a:solidFill>
+                      <a:prstDash val="solid"/>
+                      <a:round/>
+                      <a:headEnd type="none" w="med" len="med"/>
+                      <a:tailEnd type="none" w="med" len="med"/>
+                    </a:lnB>
+                    <a:solidFill>
+                      <a:srgbClr val="FFFFFF"/>
+                    </a:solidFill>
+                  </a:tcPr>
+                </a:tc>
+                <a:tc>
+                  <a:txBody>
+                    <a:bodyPr/>
+                    <a:lstStyle/>
+                    <a:p>
                       <a:pPr algn="r" indent="0" marL="0">
                         <a:buNone/>
                       </a:pPr>
@@ -16326,7 +16349,553 @@
                           <a:ea typeface="맑은 고딕" pitchFamily="34" charset="-122"/>
                           <a:cs typeface="맑은 고딕" pitchFamily="34" charset="-120"/>
                         </a:rPr>
-                        <a:t>250</a:t>
+                        <a:t>-</a:t>
+                      </a:r>
+                      <a:endParaRPr lang="en-US" sz="850" dirty="0">
+                        <a:latin typeface="맑은 고딕" charset="0"/>
+                        <a:ea typeface="맑은 고딕" charset="0"/>
+                        <a:cs typeface="맑은 고딕" charset="0"/>
+                      </a:endParaRPr>
+                    </a:p>
+                  </a:txBody>
+                  <a:tcPr marL="91440" marR="91440" marT="45720" marB="45720" anchor="ctr">
+                    <a:lnL w="12700" cap="flat" cmpd="sng" algn="ctr">
+                      <a:solidFill>
+                        <a:srgbClr val="CBD5E0"/>
+                      </a:solidFill>
+                      <a:prstDash val="solid"/>
+                      <a:round/>
+                      <a:headEnd type="none" w="med" len="med"/>
+                      <a:tailEnd type="none" w="med" len="med"/>
+                    </a:lnL>
+                    <a:lnR w="12700" cap="flat" cmpd="sng" algn="ctr">
+                      <a:solidFill>
+                        <a:srgbClr val="CBD5E0"/>
+                      </a:solidFill>
+                      <a:prstDash val="solid"/>
+                      <a:round/>
+                      <a:headEnd type="none" w="med" len="med"/>
+                      <a:tailEnd type="none" w="med" len="med"/>
+                    </a:lnR>
+                    <a:lnT w="12700" cap="flat" cmpd="sng" algn="ctr">
+                      <a:solidFill>
+                        <a:srgbClr val="CBD5E0"/>
+                      </a:solidFill>
+                      <a:prstDash val="solid"/>
+                      <a:round/>
+                      <a:headEnd type="none" w="med" len="med"/>
+                      <a:tailEnd type="none" w="med" len="med"/>
+                    </a:lnT>
+                    <a:lnB w="12700" cap="flat" cmpd="sng" algn="ctr">
+                      <a:solidFill>
+                        <a:srgbClr val="CBD5E0"/>
+                      </a:solidFill>
+                      <a:prstDash val="solid"/>
+                      <a:round/>
+                      <a:headEnd type="none" w="med" len="med"/>
+                      <a:tailEnd type="none" w="med" len="med"/>
+                    </a:lnB>
+                    <a:solidFill>
+                      <a:srgbClr val="FFFFFF"/>
+                    </a:solidFill>
+                  </a:tcPr>
+                </a:tc>
+                <a:tc>
+                  <a:txBody>
+                    <a:bodyPr/>
+                    <a:lstStyle/>
+                    <a:p>
+                      <a:pPr algn="r" indent="0" marL="0">
+                        <a:buNone/>
+                      </a:pPr>
+                      <a:r>
+                        <a:rPr lang="en-US" sz="850" dirty="0">
+                          <a:solidFill>
+                            <a:srgbClr val="2B2B2B"/>
+                          </a:solidFill>
+                          <a:latin typeface="맑은 고딕" pitchFamily="34" charset="0"/>
+                          <a:ea typeface="맑은 고딕" pitchFamily="34" charset="-122"/>
+                          <a:cs typeface="맑은 고딕" pitchFamily="34" charset="-120"/>
+                        </a:rPr>
+                        <a:t>-</a:t>
+                      </a:r>
+                      <a:endParaRPr lang="en-US" sz="850" dirty="0">
+                        <a:latin typeface="맑은 고딕" charset="0"/>
+                        <a:ea typeface="맑은 고딕" charset="0"/>
+                        <a:cs typeface="맑은 고딕" charset="0"/>
+                      </a:endParaRPr>
+                    </a:p>
+                  </a:txBody>
+                  <a:tcPr marL="91440" marR="91440" marT="45720" marB="45720" anchor="ctr">
+                    <a:lnL w="12700" cap="flat" cmpd="sng" algn="ctr">
+                      <a:solidFill>
+                        <a:srgbClr val="CBD5E0"/>
+                      </a:solidFill>
+                      <a:prstDash val="solid"/>
+                      <a:round/>
+                      <a:headEnd type="none" w="med" len="med"/>
+                      <a:tailEnd type="none" w="med" len="med"/>
+                    </a:lnL>
+                    <a:lnR w="12700" cap="flat" cmpd="sng" algn="ctr">
+                      <a:solidFill>
+                        <a:srgbClr val="CBD5E0"/>
+                      </a:solidFill>
+                      <a:prstDash val="solid"/>
+                      <a:round/>
+                      <a:headEnd type="none" w="med" len="med"/>
+                      <a:tailEnd type="none" w="med" len="med"/>
+                    </a:lnR>
+                    <a:lnT w="12700" cap="flat" cmpd="sng" algn="ctr">
+                      <a:solidFill>
+                        <a:srgbClr val="CBD5E0"/>
+                      </a:solidFill>
+                      <a:prstDash val="solid"/>
+                      <a:round/>
+                      <a:headEnd type="none" w="med" len="med"/>
+                      <a:tailEnd type="none" w="med" len="med"/>
+                    </a:lnT>
+                    <a:lnB w="12700" cap="flat" cmpd="sng" algn="ctr">
+                      <a:solidFill>
+                        <a:srgbClr val="CBD5E0"/>
+                      </a:solidFill>
+                      <a:prstDash val="solid"/>
+                      <a:round/>
+                      <a:headEnd type="none" w="med" len="med"/>
+                      <a:tailEnd type="none" w="med" len="med"/>
+                    </a:lnB>
+                    <a:solidFill>
+                      <a:srgbClr val="FFFFFF"/>
+                    </a:solidFill>
+                  </a:tcPr>
+                </a:tc>
+                <a:tc>
+                  <a:txBody>
+                    <a:bodyPr/>
+                    <a:lstStyle/>
+                    <a:p>
+                      <a:pPr algn="r" indent="0" marL="0">
+                        <a:buNone/>
+                      </a:pPr>
+                      <a:r>
+                        <a:rPr lang="en-US" sz="850" dirty="0">
+                          <a:solidFill>
+                            <a:srgbClr val="2B2B2B"/>
+                          </a:solidFill>
+                          <a:latin typeface="맑은 고딕" pitchFamily="34" charset="0"/>
+                          <a:ea typeface="맑은 고딕" pitchFamily="34" charset="-122"/>
+                          <a:cs typeface="맑은 고딕" pitchFamily="34" charset="-120"/>
+                        </a:rPr>
+                        <a:t>-</a:t>
+                      </a:r>
+                      <a:endParaRPr lang="en-US" sz="850" dirty="0">
+                        <a:latin typeface="맑은 고딕" charset="0"/>
+                        <a:ea typeface="맑은 고딕" charset="0"/>
+                        <a:cs typeface="맑은 고딕" charset="0"/>
+                      </a:endParaRPr>
+                    </a:p>
+                  </a:txBody>
+                  <a:tcPr marL="91440" marR="91440" marT="45720" marB="45720" anchor="ctr">
+                    <a:lnL w="12700" cap="flat" cmpd="sng" algn="ctr">
+                      <a:solidFill>
+                        <a:srgbClr val="CBD5E0"/>
+                      </a:solidFill>
+                      <a:prstDash val="solid"/>
+                      <a:round/>
+                      <a:headEnd type="none" w="med" len="med"/>
+                      <a:tailEnd type="none" w="med" len="med"/>
+                    </a:lnL>
+                    <a:lnR w="12700" cap="flat" cmpd="sng" algn="ctr">
+                      <a:solidFill>
+                        <a:srgbClr val="CBD5E0"/>
+                      </a:solidFill>
+                      <a:prstDash val="solid"/>
+                      <a:round/>
+                      <a:headEnd type="none" w="med" len="med"/>
+                      <a:tailEnd type="none" w="med" len="med"/>
+                    </a:lnR>
+                    <a:lnT w="12700" cap="flat" cmpd="sng" algn="ctr">
+                      <a:solidFill>
+                        <a:srgbClr val="CBD5E0"/>
+                      </a:solidFill>
+                      <a:prstDash val="solid"/>
+                      <a:round/>
+                      <a:headEnd type="none" w="med" len="med"/>
+                      <a:tailEnd type="none" w="med" len="med"/>
+                    </a:lnT>
+                    <a:lnB w="12700" cap="flat" cmpd="sng" algn="ctr">
+                      <a:solidFill>
+                        <a:srgbClr val="CBD5E0"/>
+                      </a:solidFill>
+                      <a:prstDash val="solid"/>
+                      <a:round/>
+                      <a:headEnd type="none" w="med" len="med"/>
+                      <a:tailEnd type="none" w="med" len="med"/>
+                    </a:lnB>
+                    <a:solidFill>
+                      <a:srgbClr val="FFFFFF"/>
+                    </a:solidFill>
+                  </a:tcPr>
+                </a:tc>
+                <a:tc>
+                  <a:txBody>
+                    <a:bodyPr/>
+                    <a:lstStyle/>
+                    <a:p>
+                      <a:pPr algn="r" indent="0" marL="0">
+                        <a:buNone/>
+                      </a:pPr>
+                      <a:r>
+                        <a:rPr lang="en-US" sz="850" dirty="0">
+                          <a:solidFill>
+                            <a:srgbClr val="2B2B2B"/>
+                          </a:solidFill>
+                          <a:latin typeface="맑은 고딕" pitchFamily="34" charset="0"/>
+                          <a:ea typeface="맑은 고딕" pitchFamily="34" charset="-122"/>
+                          <a:cs typeface="맑은 고딕" pitchFamily="34" charset="-120"/>
+                        </a:rPr>
+                        <a:t>2,400</a:t>
+                      </a:r>
+                      <a:endParaRPr lang="en-US" sz="850" dirty="0">
+                        <a:latin typeface="맑은 고딕" charset="0"/>
+                        <a:ea typeface="맑은 고딕" charset="0"/>
+                        <a:cs typeface="맑은 고딕" charset="0"/>
+                      </a:endParaRPr>
+                    </a:p>
+                  </a:txBody>
+                  <a:tcPr marL="91440" marR="91440" marT="45720" marB="45720" anchor="ctr">
+                    <a:lnL w="12700" cap="flat" cmpd="sng" algn="ctr">
+                      <a:solidFill>
+                        <a:srgbClr val="CBD5E0"/>
+                      </a:solidFill>
+                      <a:prstDash val="solid"/>
+                      <a:round/>
+                      <a:headEnd type="none" w="med" len="med"/>
+                      <a:tailEnd type="none" w="med" len="med"/>
+                    </a:lnL>
+                    <a:lnR w="12700" cap="flat" cmpd="sng" algn="ctr">
+                      <a:solidFill>
+                        <a:srgbClr val="CBD5E0"/>
+                      </a:solidFill>
+                      <a:prstDash val="solid"/>
+                      <a:round/>
+                      <a:headEnd type="none" w="med" len="med"/>
+                      <a:tailEnd type="none" w="med" len="med"/>
+                    </a:lnR>
+                    <a:lnT w="12700" cap="flat" cmpd="sng" algn="ctr">
+                      <a:solidFill>
+                        <a:srgbClr val="CBD5E0"/>
+                      </a:solidFill>
+                      <a:prstDash val="solid"/>
+                      <a:round/>
+                      <a:headEnd type="none" w="med" len="med"/>
+                      <a:tailEnd type="none" w="med" len="med"/>
+                    </a:lnT>
+                    <a:lnB w="12700" cap="flat" cmpd="sng" algn="ctr">
+                      <a:solidFill>
+                        <a:srgbClr val="CBD5E0"/>
+                      </a:solidFill>
+                      <a:prstDash val="solid"/>
+                      <a:round/>
+                      <a:headEnd type="none" w="med" len="med"/>
+                      <a:tailEnd type="none" w="med" len="med"/>
+                    </a:lnB>
+                    <a:solidFill>
+                      <a:srgbClr val="FFFFFF"/>
+                    </a:solidFill>
+                  </a:tcPr>
+                </a:tc>
+                <a:tc>
+                  <a:txBody>
+                    <a:bodyPr/>
+                    <a:lstStyle/>
+                    <a:p>
+                      <a:pPr algn="ctr" indent="0" marL="0">
+                        <a:buNone/>
+                      </a:pPr>
+                      <a:r>
+                        <a:rPr lang="en-US" sz="850" dirty="0">
+                          <a:solidFill>
+                            <a:srgbClr val="2B2B2B"/>
+                          </a:solidFill>
+                          <a:latin typeface="맑은 고딕" pitchFamily="34" charset="0"/>
+                          <a:ea typeface="맑은 고딕" pitchFamily="34" charset="-122"/>
+                          <a:cs typeface="맑은 고딕" pitchFamily="34" charset="-120"/>
+                        </a:rPr>
+                        <a:t>245</a:t>
+                      </a:r>
+                      <a:endParaRPr lang="en-US" sz="850" dirty="0">
+                        <a:latin typeface="맑은 고딕" charset="0"/>
+                        <a:ea typeface="맑은 고딕" charset="0"/>
+                        <a:cs typeface="맑은 고딕" charset="0"/>
+                      </a:endParaRPr>
+                    </a:p>
+                  </a:txBody>
+                  <a:tcPr marL="91440" marR="91440" marT="45720" marB="45720" anchor="ctr">
+                    <a:lnL w="12700" cap="flat" cmpd="sng" algn="ctr">
+                      <a:solidFill>
+                        <a:srgbClr val="CBD5E0"/>
+                      </a:solidFill>
+                      <a:prstDash val="solid"/>
+                      <a:round/>
+                      <a:headEnd type="none" w="med" len="med"/>
+                      <a:tailEnd type="none" w="med" len="med"/>
+                    </a:lnL>
+                    <a:lnR w="12700" cap="flat" cmpd="sng" algn="ctr">
+                      <a:solidFill>
+                        <a:srgbClr val="CBD5E0"/>
+                      </a:solidFill>
+                      <a:prstDash val="solid"/>
+                      <a:round/>
+                      <a:headEnd type="none" w="med" len="med"/>
+                      <a:tailEnd type="none" w="med" len="med"/>
+                    </a:lnR>
+                    <a:lnT w="12700" cap="flat" cmpd="sng" algn="ctr">
+                      <a:solidFill>
+                        <a:srgbClr val="CBD5E0"/>
+                      </a:solidFill>
+                      <a:prstDash val="solid"/>
+                      <a:round/>
+                      <a:headEnd type="none" w="med" len="med"/>
+                      <a:tailEnd type="none" w="med" len="med"/>
+                    </a:lnT>
+                    <a:lnB w="12700" cap="flat" cmpd="sng" algn="ctr">
+                      <a:solidFill>
+                        <a:srgbClr val="CBD5E0"/>
+                      </a:solidFill>
+                      <a:prstDash val="solid"/>
+                      <a:round/>
+                      <a:headEnd type="none" w="med" len="med"/>
+                      <a:tailEnd type="none" w="med" len="med"/>
+                    </a:lnB>
+                    <a:solidFill>
+                      <a:srgbClr val="FFFFFF"/>
+                    </a:solidFill>
+                  </a:tcPr>
+                </a:tc>
+              </a:tr>
+              <a:tr h="313509">
+                <a:tc>
+                  <a:txBody>
+                    <a:bodyPr/>
+                    <a:lstStyle/>
+                    <a:p>
+                      <a:pPr algn="ctr" indent="0" marL="0">
+                        <a:buNone/>
+                      </a:pPr>
+                      <a:r>
+                        <a:rPr lang="en-US" sz="850" dirty="0">
+                          <a:solidFill>
+                            <a:srgbClr val="2B2B2B"/>
+                          </a:solidFill>
+                          <a:latin typeface="맑은 고딕" pitchFamily="34" charset="0"/>
+                          <a:ea typeface="맑은 고딕" pitchFamily="34" charset="-122"/>
+                          <a:cs typeface="맑은 고딕" pitchFamily="34" charset="-120"/>
+                        </a:rPr>
+                        <a:t>10F</a:t>
+                      </a:r>
+                      <a:endParaRPr lang="en-US" sz="850" dirty="0">
+                        <a:latin typeface="맑은 고딕" charset="0"/>
+                        <a:ea typeface="맑은 고딕" charset="0"/>
+                        <a:cs typeface="맑은 고딕" charset="0"/>
+                      </a:endParaRPr>
+                    </a:p>
+                  </a:txBody>
+                  <a:tcPr marL="91440" marR="91440" marT="45720" marB="45720" anchor="ctr">
+                    <a:lnL w="12700" cap="flat" cmpd="sng" algn="ctr">
+                      <a:solidFill>
+                        <a:srgbClr val="CBD5E0"/>
+                      </a:solidFill>
+                      <a:prstDash val="solid"/>
+                      <a:round/>
+                      <a:headEnd type="none" w="med" len="med"/>
+                      <a:tailEnd type="none" w="med" len="med"/>
+                    </a:lnL>
+                    <a:lnR w="12700" cap="flat" cmpd="sng" algn="ctr">
+                      <a:solidFill>
+                        <a:srgbClr val="CBD5E0"/>
+                      </a:solidFill>
+                      <a:prstDash val="solid"/>
+                      <a:round/>
+                      <a:headEnd type="none" w="med" len="med"/>
+                      <a:tailEnd type="none" w="med" len="med"/>
+                    </a:lnR>
+                    <a:lnT w="12700" cap="flat" cmpd="sng" algn="ctr">
+                      <a:solidFill>
+                        <a:srgbClr val="CBD5E0"/>
+                      </a:solidFill>
+                      <a:prstDash val="solid"/>
+                      <a:round/>
+                      <a:headEnd type="none" w="med" len="med"/>
+                      <a:tailEnd type="none" w="med" len="med"/>
+                    </a:lnT>
+                    <a:lnB w="12700" cap="flat" cmpd="sng" algn="ctr">
+                      <a:solidFill>
+                        <a:srgbClr val="CBD5E0"/>
+                      </a:solidFill>
+                      <a:prstDash val="solid"/>
+                      <a:round/>
+                      <a:headEnd type="none" w="med" len="med"/>
+                      <a:tailEnd type="none" w="med" len="med"/>
+                    </a:lnB>
+                    <a:solidFill>
+                      <a:srgbClr val="F3F6F7"/>
+                    </a:solidFill>
+                  </a:tcPr>
+                </a:tc>
+                <a:tc>
+                  <a:txBody>
+                    <a:bodyPr/>
+                    <a:lstStyle/>
+                    <a:p>
+                      <a:pPr algn="ctr" indent="0" marL="0">
+                        <a:buNone/>
+                      </a:pPr>
+                      <a:r>
+                        <a:rPr lang="en-US" sz="850" dirty="0">
+                          <a:solidFill>
+                            <a:srgbClr val="2B2B2B"/>
+                          </a:solidFill>
+                          <a:latin typeface="맑은 고딕" pitchFamily="34" charset="0"/>
+                          <a:ea typeface="맑은 고딕" pitchFamily="34" charset="-122"/>
+                          <a:cs typeface="맑은 고딕" pitchFamily="34" charset="-120"/>
+                        </a:rPr>
+                        <a:t>-</a:t>
+                      </a:r>
+                      <a:endParaRPr lang="en-US" sz="850" dirty="0">
+                        <a:latin typeface="맑은 고딕" charset="0"/>
+                        <a:ea typeface="맑은 고딕" charset="0"/>
+                        <a:cs typeface="맑은 고딕" charset="0"/>
+                      </a:endParaRPr>
+                    </a:p>
+                  </a:txBody>
+                  <a:tcPr marL="91440" marR="91440" marT="45720" marB="45720" anchor="ctr">
+                    <a:lnL w="12700" cap="flat" cmpd="sng" algn="ctr">
+                      <a:solidFill>
+                        <a:srgbClr val="CBD5E0"/>
+                      </a:solidFill>
+                      <a:prstDash val="solid"/>
+                      <a:round/>
+                      <a:headEnd type="none" w="med" len="med"/>
+                      <a:tailEnd type="none" w="med" len="med"/>
+                    </a:lnL>
+                    <a:lnR w="12700" cap="flat" cmpd="sng" algn="ctr">
+                      <a:solidFill>
+                        <a:srgbClr val="CBD5E0"/>
+                      </a:solidFill>
+                      <a:prstDash val="solid"/>
+                      <a:round/>
+                      <a:headEnd type="none" w="med" len="med"/>
+                      <a:tailEnd type="none" w="med" len="med"/>
+                    </a:lnR>
+                    <a:lnT w="12700" cap="flat" cmpd="sng" algn="ctr">
+                      <a:solidFill>
+                        <a:srgbClr val="CBD5E0"/>
+                      </a:solidFill>
+                      <a:prstDash val="solid"/>
+                      <a:round/>
+                      <a:headEnd type="none" w="med" len="med"/>
+                      <a:tailEnd type="none" w="med" len="med"/>
+                    </a:lnT>
+                    <a:lnB w="12700" cap="flat" cmpd="sng" algn="ctr">
+                      <a:solidFill>
+                        <a:srgbClr val="CBD5E0"/>
+                      </a:solidFill>
+                      <a:prstDash val="solid"/>
+                      <a:round/>
+                      <a:headEnd type="none" w="med" len="med"/>
+                      <a:tailEnd type="none" w="med" len="med"/>
+                    </a:lnB>
+                    <a:solidFill>
+                      <a:srgbClr val="F3F6F7"/>
+                    </a:solidFill>
+                  </a:tcPr>
+                </a:tc>
+                <a:tc>
+                  <a:txBody>
+                    <a:bodyPr/>
+                    <a:lstStyle/>
+                    <a:p>
+                      <a:pPr algn="ctr" indent="0" marL="0">
+                        <a:buNone/>
+                      </a:pPr>
+                      <a:r>
+                        <a:rPr lang="en-US" sz="850" dirty="0">
+                          <a:solidFill>
+                            <a:srgbClr val="2B2B2B"/>
+                          </a:solidFill>
+                          <a:latin typeface="맑은 고딕" pitchFamily="34" charset="0"/>
+                          <a:ea typeface="맑은 고딕" pitchFamily="34" charset="-122"/>
+                          <a:cs typeface="맑은 고딕" pitchFamily="34" charset="-120"/>
+                        </a:rPr>
+                        <a:t>건축설계사무소</a:t>
+                      </a:r>
+                      <a:endParaRPr lang="en-US" sz="850" dirty="0">
+                        <a:latin typeface="맑은 고딕" charset="0"/>
+                        <a:ea typeface="맑은 고딕" charset="0"/>
+                        <a:cs typeface="맑은 고딕" charset="0"/>
+                      </a:endParaRPr>
+                    </a:p>
+                  </a:txBody>
+                  <a:tcPr marL="91440" marR="91440" marT="45720" marB="45720" anchor="ctr">
+                    <a:lnL w="12700" cap="flat" cmpd="sng" algn="ctr">
+                      <a:solidFill>
+                        <a:srgbClr val="CBD5E0"/>
+                      </a:solidFill>
+                      <a:prstDash val="solid"/>
+                      <a:round/>
+                      <a:headEnd type="none" w="med" len="med"/>
+                      <a:tailEnd type="none" w="med" len="med"/>
+                    </a:lnL>
+                    <a:lnR w="12700" cap="flat" cmpd="sng" algn="ctr">
+                      <a:solidFill>
+                        <a:srgbClr val="CBD5E0"/>
+                      </a:solidFill>
+                      <a:prstDash val="solid"/>
+                      <a:round/>
+                      <a:headEnd type="none" w="med" len="med"/>
+                      <a:tailEnd type="none" w="med" len="med"/>
+                    </a:lnR>
+                    <a:lnT w="12700" cap="flat" cmpd="sng" algn="ctr">
+                      <a:solidFill>
+                        <a:srgbClr val="CBD5E0"/>
+                      </a:solidFill>
+                      <a:prstDash val="solid"/>
+                      <a:round/>
+                      <a:headEnd type="none" w="med" len="med"/>
+                      <a:tailEnd type="none" w="med" len="med"/>
+                    </a:lnT>
+                    <a:lnB w="12700" cap="flat" cmpd="sng" algn="ctr">
+                      <a:solidFill>
+                        <a:srgbClr val="CBD5E0"/>
+                      </a:solidFill>
+                      <a:prstDash val="solid"/>
+                      <a:round/>
+                      <a:headEnd type="none" w="med" len="med"/>
+                      <a:tailEnd type="none" w="med" len="med"/>
+                    </a:lnB>
+                    <a:solidFill>
+                      <a:srgbClr val="F3F6F7"/>
+                    </a:solidFill>
+                  </a:tcPr>
+                </a:tc>
+                <a:tc>
+                  <a:txBody>
+                    <a:bodyPr/>
+                    <a:lstStyle/>
+                    <a:p>
+                      <a:pPr algn="ctr" indent="0" marL="0">
+                        <a:buNone/>
+                      </a:pPr>
+                      <a:r>
+                        <a:rPr lang="en-US" sz="850" dirty="0">
+                          <a:solidFill>
+                            <a:srgbClr val="2B2B2B"/>
+                          </a:solidFill>
+                          <a:latin typeface="맑은 고딕" pitchFamily="34" charset="0"/>
+                          <a:ea typeface="맑은 고딕" pitchFamily="34" charset="-122"/>
+                          <a:cs typeface="맑은 고딕" pitchFamily="34" charset="-120"/>
+                        </a:rPr>
+                        <a:t>건축설계사무소</a:t>
                       </a:r>
                       <a:endParaRPr lang="en-US" sz="850" dirty="0">
                         <a:latin typeface="맑은 고딕" charset="0"/>
@@ -16394,7 +16963,211 @@
                           <a:ea typeface="맑은 고딕" pitchFamily="34" charset="-122"/>
                           <a:cs typeface="맑은 고딕" pitchFamily="34" charset="-120"/>
                         </a:rPr>
-                        <a:t>2028-12-31</a:t>
+                        <a:t>-</a:t>
+                      </a:r>
+                      <a:endParaRPr lang="en-US" sz="850" dirty="0">
+                        <a:latin typeface="맑은 고딕" charset="0"/>
+                        <a:ea typeface="맑은 고딕" charset="0"/>
+                        <a:cs typeface="맑은 고딕" charset="0"/>
+                      </a:endParaRPr>
+                    </a:p>
+                  </a:txBody>
+                  <a:tcPr marL="91440" marR="91440" marT="45720" marB="45720" anchor="ctr">
+                    <a:lnL w="12700" cap="flat" cmpd="sng" algn="ctr">
+                      <a:solidFill>
+                        <a:srgbClr val="CBD5E0"/>
+                      </a:solidFill>
+                      <a:prstDash val="solid"/>
+                      <a:round/>
+                      <a:headEnd type="none" w="med" len="med"/>
+                      <a:tailEnd type="none" w="med" len="med"/>
+                    </a:lnL>
+                    <a:lnR w="12700" cap="flat" cmpd="sng" algn="ctr">
+                      <a:solidFill>
+                        <a:srgbClr val="CBD5E0"/>
+                      </a:solidFill>
+                      <a:prstDash val="solid"/>
+                      <a:round/>
+                      <a:headEnd type="none" w="med" len="med"/>
+                      <a:tailEnd type="none" w="med" len="med"/>
+                    </a:lnR>
+                    <a:lnT w="12700" cap="flat" cmpd="sng" algn="ctr">
+                      <a:solidFill>
+                        <a:srgbClr val="CBD5E0"/>
+                      </a:solidFill>
+                      <a:prstDash val="solid"/>
+                      <a:round/>
+                      <a:headEnd type="none" w="med" len="med"/>
+                      <a:tailEnd type="none" w="med" len="med"/>
+                    </a:lnT>
+                    <a:lnB w="12700" cap="flat" cmpd="sng" algn="ctr">
+                      <a:solidFill>
+                        <a:srgbClr val="CBD5E0"/>
+                      </a:solidFill>
+                      <a:prstDash val="solid"/>
+                      <a:round/>
+                      <a:headEnd type="none" w="med" len="med"/>
+                      <a:tailEnd type="none" w="med" len="med"/>
+                    </a:lnB>
+                    <a:solidFill>
+                      <a:srgbClr val="F3F6F7"/>
+                    </a:solidFill>
+                  </a:tcPr>
+                </a:tc>
+                <a:tc>
+                  <a:txBody>
+                    <a:bodyPr/>
+                    <a:lstStyle/>
+                    <a:p>
+                      <a:pPr algn="r" indent="0" marL="0">
+                        <a:buNone/>
+                      </a:pPr>
+                      <a:r>
+                        <a:rPr lang="en-US" sz="850" dirty="0">
+                          <a:solidFill>
+                            <a:srgbClr val="2B2B2B"/>
+                          </a:solidFill>
+                          <a:latin typeface="맑은 고딕" pitchFamily="34" charset="0"/>
+                          <a:ea typeface="맑은 고딕" pitchFamily="34" charset="-122"/>
+                          <a:cs typeface="맑은 고딕" pitchFamily="34" charset="-120"/>
+                        </a:rPr>
+                        <a:t>-</a:t>
+                      </a:r>
+                      <a:endParaRPr lang="en-US" sz="850" dirty="0">
+                        <a:latin typeface="맑은 고딕" charset="0"/>
+                        <a:ea typeface="맑은 고딕" charset="0"/>
+                        <a:cs typeface="맑은 고딕" charset="0"/>
+                      </a:endParaRPr>
+                    </a:p>
+                  </a:txBody>
+                  <a:tcPr marL="91440" marR="91440" marT="45720" marB="45720" anchor="ctr">
+                    <a:lnL w="12700" cap="flat" cmpd="sng" algn="ctr">
+                      <a:solidFill>
+                        <a:srgbClr val="CBD5E0"/>
+                      </a:solidFill>
+                      <a:prstDash val="solid"/>
+                      <a:round/>
+                      <a:headEnd type="none" w="med" len="med"/>
+                      <a:tailEnd type="none" w="med" len="med"/>
+                    </a:lnL>
+                    <a:lnR w="12700" cap="flat" cmpd="sng" algn="ctr">
+                      <a:solidFill>
+                        <a:srgbClr val="CBD5E0"/>
+                      </a:solidFill>
+                      <a:prstDash val="solid"/>
+                      <a:round/>
+                      <a:headEnd type="none" w="med" len="med"/>
+                      <a:tailEnd type="none" w="med" len="med"/>
+                    </a:lnR>
+                    <a:lnT w="12700" cap="flat" cmpd="sng" algn="ctr">
+                      <a:solidFill>
+                        <a:srgbClr val="CBD5E0"/>
+                      </a:solidFill>
+                      <a:prstDash val="solid"/>
+                      <a:round/>
+                      <a:headEnd type="none" w="med" len="med"/>
+                      <a:tailEnd type="none" w="med" len="med"/>
+                    </a:lnT>
+                    <a:lnB w="12700" cap="flat" cmpd="sng" algn="ctr">
+                      <a:solidFill>
+                        <a:srgbClr val="CBD5E0"/>
+                      </a:solidFill>
+                      <a:prstDash val="solid"/>
+                      <a:round/>
+                      <a:headEnd type="none" w="med" len="med"/>
+                      <a:tailEnd type="none" w="med" len="med"/>
+                    </a:lnB>
+                    <a:solidFill>
+                      <a:srgbClr val="F3F6F7"/>
+                    </a:solidFill>
+                  </a:tcPr>
+                </a:tc>
+                <a:tc>
+                  <a:txBody>
+                    <a:bodyPr/>
+                    <a:lstStyle/>
+                    <a:p>
+                      <a:pPr algn="r" indent="0" marL="0">
+                        <a:buNone/>
+                      </a:pPr>
+                      <a:r>
+                        <a:rPr lang="en-US" sz="850" dirty="0">
+                          <a:solidFill>
+                            <a:srgbClr val="2B2B2B"/>
+                          </a:solidFill>
+                          <a:latin typeface="맑은 고딕" pitchFamily="34" charset="0"/>
+                          <a:ea typeface="맑은 고딕" pitchFamily="34" charset="-122"/>
+                          <a:cs typeface="맑은 고딕" pitchFamily="34" charset="-120"/>
+                        </a:rPr>
+                        <a:t>-</a:t>
+                      </a:r>
+                      <a:endParaRPr lang="en-US" sz="850" dirty="0">
+                        <a:latin typeface="맑은 고딕" charset="0"/>
+                        <a:ea typeface="맑은 고딕" charset="0"/>
+                        <a:cs typeface="맑은 고딕" charset="0"/>
+                      </a:endParaRPr>
+                    </a:p>
+                  </a:txBody>
+                  <a:tcPr marL="91440" marR="91440" marT="45720" marB="45720" anchor="ctr">
+                    <a:lnL w="12700" cap="flat" cmpd="sng" algn="ctr">
+                      <a:solidFill>
+                        <a:srgbClr val="CBD5E0"/>
+                      </a:solidFill>
+                      <a:prstDash val="solid"/>
+                      <a:round/>
+                      <a:headEnd type="none" w="med" len="med"/>
+                      <a:tailEnd type="none" w="med" len="med"/>
+                    </a:lnL>
+                    <a:lnR w="12700" cap="flat" cmpd="sng" algn="ctr">
+                      <a:solidFill>
+                        <a:srgbClr val="CBD5E0"/>
+                      </a:solidFill>
+                      <a:prstDash val="solid"/>
+                      <a:round/>
+                      <a:headEnd type="none" w="med" len="med"/>
+                      <a:tailEnd type="none" w="med" len="med"/>
+                    </a:lnR>
+                    <a:lnT w="12700" cap="flat" cmpd="sng" algn="ctr">
+                      <a:solidFill>
+                        <a:srgbClr val="CBD5E0"/>
+                      </a:solidFill>
+                      <a:prstDash val="solid"/>
+                      <a:round/>
+                      <a:headEnd type="none" w="med" len="med"/>
+                      <a:tailEnd type="none" w="med" len="med"/>
+                    </a:lnT>
+                    <a:lnB w="12700" cap="flat" cmpd="sng" algn="ctr">
+                      <a:solidFill>
+                        <a:srgbClr val="CBD5E0"/>
+                      </a:solidFill>
+                      <a:prstDash val="solid"/>
+                      <a:round/>
+                      <a:headEnd type="none" w="med" len="med"/>
+                      <a:tailEnd type="none" w="med" len="med"/>
+                    </a:lnB>
+                    <a:solidFill>
+                      <a:srgbClr val="F3F6F7"/>
+                    </a:solidFill>
+                  </a:tcPr>
+                </a:tc>
+                <a:tc>
+                  <a:txBody>
+                    <a:bodyPr/>
+                    <a:lstStyle/>
+                    <a:p>
+                      <a:pPr algn="r" indent="0" marL="0">
+                        <a:buNone/>
+                      </a:pPr>
+                      <a:r>
+                        <a:rPr lang="en-US" sz="850" dirty="0">
+                          <a:solidFill>
+                            <a:srgbClr val="2B2B2B"/>
+                          </a:solidFill>
+                          <a:latin typeface="맑은 고딕" pitchFamily="34" charset="0"/>
+                          <a:ea typeface="맑은 고딕" pitchFamily="34" charset="-122"/>
+                          <a:cs typeface="맑은 고딕" pitchFamily="34" charset="-120"/>
+                        </a:rPr>
+                        <a:t>5,000</a:t>
                       </a:r>
                       <a:endParaRPr lang="en-US" sz="850" dirty="0">
                         <a:latin typeface="맑은 고딕" charset="0"/>
@@ -16462,7 +17235,7 @@
                           <a:ea typeface="맑은 고딕" pitchFamily="34" charset="-122"/>
                           <a:cs typeface="맑은 고딕" pitchFamily="34" charset="-120"/>
                         </a:rPr>
-                        <a:t>분할임대</a:t>
+                        <a:t>490</a:t>
                       </a:r>
                       <a:endParaRPr lang="en-US" sz="850" dirty="0">
                         <a:latin typeface="맑은 고딕" charset="0"/>
@@ -16510,6 +17283,76 @@
                     </a:lnB>
                     <a:solidFill>
                       <a:srgbClr val="F3F6F7"/>
+                    </a:solidFill>
+                  </a:tcPr>
+                </a:tc>
+              </a:tr>
+              <a:tr h="313509">
+                <a:tc>
+                  <a:txBody>
+                    <a:bodyPr/>
+                    <a:lstStyle/>
+                    <a:p>
+                      <a:pPr algn="ctr" indent="0" marL="0">
+                        <a:buNone/>
+                      </a:pPr>
+                      <a:r>
+                        <a:rPr lang="en-US" sz="850" dirty="0">
+                          <a:solidFill>
+                            <a:srgbClr val="2B2B2B"/>
+                          </a:solidFill>
+                          <a:latin typeface="맑은 고딕" pitchFamily="34" charset="0"/>
+                          <a:ea typeface="맑은 고딕" pitchFamily="34" charset="-122"/>
+                          <a:cs typeface="맑은 고딕" pitchFamily="34" charset="-120"/>
+                        </a:rPr>
+                        <a:t>합계</a:t>
+                      </a:r>
+                      <a:endParaRPr lang="en-US" sz="850" dirty="0">
+                        <a:latin typeface="맑은 고딕" charset="0"/>
+                        <a:ea typeface="맑은 고딕" charset="0"/>
+                        <a:cs typeface="맑은 고딕" charset="0"/>
+                      </a:endParaRPr>
+                    </a:p>
+                  </a:txBody>
+                  <a:tcPr marL="91440" marR="91440" marT="45720" marB="45720" anchor="ctr">
+                    <a:lnL w="12700" cap="flat" cmpd="sng" algn="ctr">
+                      <a:solidFill>
+                        <a:srgbClr val="CBD5E0"/>
+                      </a:solidFill>
+                      <a:prstDash val="solid"/>
+                      <a:round/>
+                      <a:headEnd type="none" w="med" len="med"/>
+                      <a:tailEnd type="none" w="med" len="med"/>
+                    </a:lnL>
+                    <a:lnR w="12700" cap="flat" cmpd="sng" algn="ctr">
+                      <a:solidFill>
+                        <a:srgbClr val="CBD5E0"/>
+                      </a:solidFill>
+                      <a:prstDash val="solid"/>
+                      <a:round/>
+                      <a:headEnd type="none" w="med" len="med"/>
+                      <a:tailEnd type="none" w="med" len="med"/>
+                    </a:lnR>
+                    <a:lnT w="12700" cap="flat" cmpd="sng" algn="ctr">
+                      <a:solidFill>
+                        <a:srgbClr val="CBD5E0"/>
+                      </a:solidFill>
+                      <a:prstDash val="solid"/>
+                      <a:round/>
+                      <a:headEnd type="none" w="med" len="med"/>
+                      <a:tailEnd type="none" w="med" len="med"/>
+                    </a:lnT>
+                    <a:lnB w="12700" cap="flat" cmpd="sng" algn="ctr">
+                      <a:solidFill>
+                        <a:srgbClr val="CBD5E0"/>
+                      </a:solidFill>
+                      <a:prstDash val="solid"/>
+                      <a:round/>
+                      <a:headEnd type="none" w="med" len="med"/>
+                      <a:tailEnd type="none" w="med" len="med"/>
+                    </a:lnB>
+                    <a:solidFill>
+                      <a:srgbClr val="FFFFFF"/>
                     </a:solidFill>
                   </a:tcPr>
                 </a:tc>
@@ -16566,7 +17409,472 @@
                       <a:tailEnd type="none" w="med" len="med"/>
                     </a:lnB>
                     <a:solidFill>
-                      <a:srgbClr val="F3F6F7"/>
+                      <a:srgbClr val="FFFFFF"/>
+                    </a:solidFill>
+                  </a:tcPr>
+                </a:tc>
+                <a:tc>
+                  <a:txBody>
+                    <a:bodyPr/>
+                    <a:lstStyle/>
+                    <a:p>
+                      <a:pPr algn="ctr" indent="0" marL="0">
+                        <a:buNone/>
+                      </a:pPr>
+                      <a:endParaRPr lang="en-US" sz="850" dirty="0">
+                        <a:latin typeface="맑은 고딕" charset="0"/>
+                        <a:ea typeface="맑은 고딕" charset="0"/>
+                        <a:cs typeface="맑은 고딕" charset="0"/>
+                      </a:endParaRPr>
+                    </a:p>
+                  </a:txBody>
+                  <a:tcPr marL="91440" marR="91440" marT="45720" marB="45720" anchor="ctr">
+                    <a:lnL w="12700" cap="flat" cmpd="sng" algn="ctr">
+                      <a:solidFill>
+                        <a:srgbClr val="CBD5E0"/>
+                      </a:solidFill>
+                      <a:prstDash val="solid"/>
+                      <a:round/>
+                      <a:headEnd type="none" w="med" len="med"/>
+                      <a:tailEnd type="none" w="med" len="med"/>
+                    </a:lnL>
+                    <a:lnR w="12700" cap="flat" cmpd="sng" algn="ctr">
+                      <a:solidFill>
+                        <a:srgbClr val="CBD5E0"/>
+                      </a:solidFill>
+                      <a:prstDash val="solid"/>
+                      <a:round/>
+                      <a:headEnd type="none" w="med" len="med"/>
+                      <a:tailEnd type="none" w="med" len="med"/>
+                    </a:lnR>
+                    <a:lnT w="12700" cap="flat" cmpd="sng" algn="ctr">
+                      <a:solidFill>
+                        <a:srgbClr val="CBD5E0"/>
+                      </a:solidFill>
+                      <a:prstDash val="solid"/>
+                      <a:round/>
+                      <a:headEnd type="none" w="med" len="med"/>
+                      <a:tailEnd type="none" w="med" len="med"/>
+                    </a:lnT>
+                    <a:lnB w="12700" cap="flat" cmpd="sng" algn="ctr">
+                      <a:solidFill>
+                        <a:srgbClr val="CBD5E0"/>
+                      </a:solidFill>
+                      <a:prstDash val="solid"/>
+                      <a:round/>
+                      <a:headEnd type="none" w="med" len="med"/>
+                      <a:tailEnd type="none" w="med" len="med"/>
+                    </a:lnB>
+                    <a:solidFill>
+                      <a:srgbClr val="FFFFFF"/>
+                    </a:solidFill>
+                  </a:tcPr>
+                </a:tc>
+                <a:tc>
+                  <a:txBody>
+                    <a:bodyPr/>
+                    <a:lstStyle/>
+                    <a:p>
+                      <a:pPr algn="ctr" indent="0" marL="0">
+                        <a:buNone/>
+                      </a:pPr>
+                      <a:r>
+                        <a:rPr lang="en-US" sz="850" dirty="0">
+                          <a:solidFill>
+                            <a:srgbClr val="2B2B2B"/>
+                          </a:solidFill>
+                          <a:latin typeface="맑은 고딕" pitchFamily="34" charset="0"/>
+                          <a:ea typeface="맑은 고딕" pitchFamily="34" charset="-122"/>
+                          <a:cs typeface="맑은 고딕" pitchFamily="34" charset="-120"/>
+                        </a:rPr>
+                        <a:t>12개 호실</a:t>
+                      </a:r>
+                      <a:endParaRPr lang="en-US" sz="850" dirty="0">
+                        <a:latin typeface="맑은 고딕" charset="0"/>
+                        <a:ea typeface="맑은 고딕" charset="0"/>
+                        <a:cs typeface="맑은 고딕" charset="0"/>
+                      </a:endParaRPr>
+                    </a:p>
+                  </a:txBody>
+                  <a:tcPr marL="91440" marR="91440" marT="45720" marB="45720" anchor="ctr">
+                    <a:lnL w="12700" cap="flat" cmpd="sng" algn="ctr">
+                      <a:solidFill>
+                        <a:srgbClr val="CBD5E0"/>
+                      </a:solidFill>
+                      <a:prstDash val="solid"/>
+                      <a:round/>
+                      <a:headEnd type="none" w="med" len="med"/>
+                      <a:tailEnd type="none" w="med" len="med"/>
+                    </a:lnL>
+                    <a:lnR w="12700" cap="flat" cmpd="sng" algn="ctr">
+                      <a:solidFill>
+                        <a:srgbClr val="CBD5E0"/>
+                      </a:solidFill>
+                      <a:prstDash val="solid"/>
+                      <a:round/>
+                      <a:headEnd type="none" w="med" len="med"/>
+                      <a:tailEnd type="none" w="med" len="med"/>
+                    </a:lnR>
+                    <a:lnT w="12700" cap="flat" cmpd="sng" algn="ctr">
+                      <a:solidFill>
+                        <a:srgbClr val="CBD5E0"/>
+                      </a:solidFill>
+                      <a:prstDash val="solid"/>
+                      <a:round/>
+                      <a:headEnd type="none" w="med" len="med"/>
+                      <a:tailEnd type="none" w="med" len="med"/>
+                    </a:lnT>
+                    <a:lnB w="12700" cap="flat" cmpd="sng" algn="ctr">
+                      <a:solidFill>
+                        <a:srgbClr val="CBD5E0"/>
+                      </a:solidFill>
+                      <a:prstDash val="solid"/>
+                      <a:round/>
+                      <a:headEnd type="none" w="med" len="med"/>
+                      <a:tailEnd type="none" w="med" len="med"/>
+                    </a:lnB>
+                    <a:solidFill>
+                      <a:srgbClr val="FFFFFF"/>
+                    </a:solidFill>
+                  </a:tcPr>
+                </a:tc>
+                <a:tc>
+                  <a:txBody>
+                    <a:bodyPr/>
+                    <a:lstStyle/>
+                    <a:p>
+                      <a:pPr algn="r" indent="0" marL="0">
+                        <a:buNone/>
+                      </a:pPr>
+                      <a:r>
+                        <a:rPr lang="en-US" sz="850" dirty="0">
+                          <a:solidFill>
+                            <a:srgbClr val="2B2B2B"/>
+                          </a:solidFill>
+                          <a:latin typeface="맑은 고딕" pitchFamily="34" charset="0"/>
+                          <a:ea typeface="맑은 고딕" pitchFamily="34" charset="-122"/>
+                          <a:cs typeface="맑은 고딕" pitchFamily="34" charset="-120"/>
+                        </a:rPr>
+                        <a:t>-</a:t>
+                      </a:r>
+                      <a:endParaRPr lang="en-US" sz="850" dirty="0">
+                        <a:latin typeface="맑은 고딕" charset="0"/>
+                        <a:ea typeface="맑은 고딕" charset="0"/>
+                        <a:cs typeface="맑은 고딕" charset="0"/>
+                      </a:endParaRPr>
+                    </a:p>
+                  </a:txBody>
+                  <a:tcPr marL="91440" marR="91440" marT="45720" marB="45720" anchor="ctr">
+                    <a:lnL w="12700" cap="flat" cmpd="sng" algn="ctr">
+                      <a:solidFill>
+                        <a:srgbClr val="CBD5E0"/>
+                      </a:solidFill>
+                      <a:prstDash val="solid"/>
+                      <a:round/>
+                      <a:headEnd type="none" w="med" len="med"/>
+                      <a:tailEnd type="none" w="med" len="med"/>
+                    </a:lnL>
+                    <a:lnR w="12700" cap="flat" cmpd="sng" algn="ctr">
+                      <a:solidFill>
+                        <a:srgbClr val="CBD5E0"/>
+                      </a:solidFill>
+                      <a:prstDash val="solid"/>
+                      <a:round/>
+                      <a:headEnd type="none" w="med" len="med"/>
+                      <a:tailEnd type="none" w="med" len="med"/>
+                    </a:lnR>
+                    <a:lnT w="12700" cap="flat" cmpd="sng" algn="ctr">
+                      <a:solidFill>
+                        <a:srgbClr val="CBD5E0"/>
+                      </a:solidFill>
+                      <a:prstDash val="solid"/>
+                      <a:round/>
+                      <a:headEnd type="none" w="med" len="med"/>
+                      <a:tailEnd type="none" w="med" len="med"/>
+                    </a:lnT>
+                    <a:lnB w="12700" cap="flat" cmpd="sng" algn="ctr">
+                      <a:solidFill>
+                        <a:srgbClr val="CBD5E0"/>
+                      </a:solidFill>
+                      <a:prstDash val="solid"/>
+                      <a:round/>
+                      <a:headEnd type="none" w="med" len="med"/>
+                      <a:tailEnd type="none" w="med" len="med"/>
+                    </a:lnB>
+                    <a:solidFill>
+                      <a:srgbClr val="FFFFFF"/>
+                    </a:solidFill>
+                  </a:tcPr>
+                </a:tc>
+                <a:tc>
+                  <a:txBody>
+                    <a:bodyPr/>
+                    <a:lstStyle/>
+                    <a:p>
+                      <a:pPr algn="r" indent="0" marL="0">
+                        <a:buNone/>
+                      </a:pPr>
+                      <a:r>
+                        <a:rPr lang="en-US" sz="850" dirty="0">
+                          <a:solidFill>
+                            <a:srgbClr val="2B2B2B"/>
+                          </a:solidFill>
+                          <a:latin typeface="맑은 고딕" pitchFamily="34" charset="0"/>
+                          <a:ea typeface="맑은 고딕" pitchFamily="34" charset="-122"/>
+                          <a:cs typeface="맑은 고딕" pitchFamily="34" charset="-120"/>
+                        </a:rPr>
+                        <a:t>-</a:t>
+                      </a:r>
+                      <a:endParaRPr lang="en-US" sz="850" dirty="0">
+                        <a:latin typeface="맑은 고딕" charset="0"/>
+                        <a:ea typeface="맑은 고딕" charset="0"/>
+                        <a:cs typeface="맑은 고딕" charset="0"/>
+                      </a:endParaRPr>
+                    </a:p>
+                  </a:txBody>
+                  <a:tcPr marL="91440" marR="91440" marT="45720" marB="45720" anchor="ctr">
+                    <a:lnL w="12700" cap="flat" cmpd="sng" algn="ctr">
+                      <a:solidFill>
+                        <a:srgbClr val="CBD5E0"/>
+                      </a:solidFill>
+                      <a:prstDash val="solid"/>
+                      <a:round/>
+                      <a:headEnd type="none" w="med" len="med"/>
+                      <a:tailEnd type="none" w="med" len="med"/>
+                    </a:lnL>
+                    <a:lnR w="12700" cap="flat" cmpd="sng" algn="ctr">
+                      <a:solidFill>
+                        <a:srgbClr val="CBD5E0"/>
+                      </a:solidFill>
+                      <a:prstDash val="solid"/>
+                      <a:round/>
+                      <a:headEnd type="none" w="med" len="med"/>
+                      <a:tailEnd type="none" w="med" len="med"/>
+                    </a:lnR>
+                    <a:lnT w="12700" cap="flat" cmpd="sng" algn="ctr">
+                      <a:solidFill>
+                        <a:srgbClr val="CBD5E0"/>
+                      </a:solidFill>
+                      <a:prstDash val="solid"/>
+                      <a:round/>
+                      <a:headEnd type="none" w="med" len="med"/>
+                      <a:tailEnd type="none" w="med" len="med"/>
+                    </a:lnT>
+                    <a:lnB w="12700" cap="flat" cmpd="sng" algn="ctr">
+                      <a:solidFill>
+                        <a:srgbClr val="CBD5E0"/>
+                      </a:solidFill>
+                      <a:prstDash val="solid"/>
+                      <a:round/>
+                      <a:headEnd type="none" w="med" len="med"/>
+                      <a:tailEnd type="none" w="med" len="med"/>
+                    </a:lnB>
+                    <a:solidFill>
+                      <a:srgbClr val="FFFFFF"/>
+                    </a:solidFill>
+                  </a:tcPr>
+                </a:tc>
+                <a:tc>
+                  <a:txBody>
+                    <a:bodyPr/>
+                    <a:lstStyle/>
+                    <a:p>
+                      <a:pPr algn="r" indent="0" marL="0">
+                        <a:buNone/>
+                      </a:pPr>
+                      <a:r>
+                        <a:rPr lang="en-US" sz="850" dirty="0">
+                          <a:solidFill>
+                            <a:srgbClr val="2B2B2B"/>
+                          </a:solidFill>
+                          <a:latin typeface="맑은 고딕" pitchFamily="34" charset="0"/>
+                          <a:ea typeface="맑은 고딕" pitchFamily="34" charset="-122"/>
+                          <a:cs typeface="맑은 고딕" pitchFamily="34" charset="-120"/>
+                        </a:rPr>
+                        <a:t>-</a:t>
+                      </a:r>
+                      <a:endParaRPr lang="en-US" sz="850" dirty="0">
+                        <a:latin typeface="맑은 고딕" charset="0"/>
+                        <a:ea typeface="맑은 고딕" charset="0"/>
+                        <a:cs typeface="맑은 고딕" charset="0"/>
+                      </a:endParaRPr>
+                    </a:p>
+                  </a:txBody>
+                  <a:tcPr marL="91440" marR="91440" marT="45720" marB="45720" anchor="ctr">
+                    <a:lnL w="12700" cap="flat" cmpd="sng" algn="ctr">
+                      <a:solidFill>
+                        <a:srgbClr val="CBD5E0"/>
+                      </a:solidFill>
+                      <a:prstDash val="solid"/>
+                      <a:round/>
+                      <a:headEnd type="none" w="med" len="med"/>
+                      <a:tailEnd type="none" w="med" len="med"/>
+                    </a:lnL>
+                    <a:lnR w="12700" cap="flat" cmpd="sng" algn="ctr">
+                      <a:solidFill>
+                        <a:srgbClr val="CBD5E0"/>
+                      </a:solidFill>
+                      <a:prstDash val="solid"/>
+                      <a:round/>
+                      <a:headEnd type="none" w="med" len="med"/>
+                      <a:tailEnd type="none" w="med" len="med"/>
+                    </a:lnR>
+                    <a:lnT w="12700" cap="flat" cmpd="sng" algn="ctr">
+                      <a:solidFill>
+                        <a:srgbClr val="CBD5E0"/>
+                      </a:solidFill>
+                      <a:prstDash val="solid"/>
+                      <a:round/>
+                      <a:headEnd type="none" w="med" len="med"/>
+                      <a:tailEnd type="none" w="med" len="med"/>
+                    </a:lnT>
+                    <a:lnB w="12700" cap="flat" cmpd="sng" algn="ctr">
+                      <a:solidFill>
+                        <a:srgbClr val="CBD5E0"/>
+                      </a:solidFill>
+                      <a:prstDash val="solid"/>
+                      <a:round/>
+                      <a:headEnd type="none" w="med" len="med"/>
+                      <a:tailEnd type="none" w="med" len="med"/>
+                    </a:lnB>
+                    <a:solidFill>
+                      <a:srgbClr val="FFFFFF"/>
+                    </a:solidFill>
+                  </a:tcPr>
+                </a:tc>
+                <a:tc>
+                  <a:txBody>
+                    <a:bodyPr/>
+                    <a:lstStyle/>
+                    <a:p>
+                      <a:pPr algn="r" indent="0" marL="0">
+                        <a:buNone/>
+                      </a:pPr>
+                      <a:r>
+                        <a:rPr lang="en-US" sz="850" dirty="0">
+                          <a:solidFill>
+                            <a:srgbClr val="2B2B2B"/>
+                          </a:solidFill>
+                          <a:latin typeface="맑은 고딕" pitchFamily="34" charset="0"/>
+                          <a:ea typeface="맑은 고딕" pitchFamily="34" charset="-122"/>
+                          <a:cs typeface="맑은 고딕" pitchFamily="34" charset="-120"/>
+                        </a:rPr>
+                        <a:t>53,700</a:t>
+                      </a:r>
+                      <a:endParaRPr lang="en-US" sz="850" dirty="0">
+                        <a:latin typeface="맑은 고딕" charset="0"/>
+                        <a:ea typeface="맑은 고딕" charset="0"/>
+                        <a:cs typeface="맑은 고딕" charset="0"/>
+                      </a:endParaRPr>
+                    </a:p>
+                  </a:txBody>
+                  <a:tcPr marL="91440" marR="91440" marT="45720" marB="45720" anchor="ctr">
+                    <a:lnL w="12700" cap="flat" cmpd="sng" algn="ctr">
+                      <a:solidFill>
+                        <a:srgbClr val="CBD5E0"/>
+                      </a:solidFill>
+                      <a:prstDash val="solid"/>
+                      <a:round/>
+                      <a:headEnd type="none" w="med" len="med"/>
+                      <a:tailEnd type="none" w="med" len="med"/>
+                    </a:lnL>
+                    <a:lnR w="12700" cap="flat" cmpd="sng" algn="ctr">
+                      <a:solidFill>
+                        <a:srgbClr val="CBD5E0"/>
+                      </a:solidFill>
+                      <a:prstDash val="solid"/>
+                      <a:round/>
+                      <a:headEnd type="none" w="med" len="med"/>
+                      <a:tailEnd type="none" w="med" len="med"/>
+                    </a:lnR>
+                    <a:lnT w="12700" cap="flat" cmpd="sng" algn="ctr">
+                      <a:solidFill>
+                        <a:srgbClr val="CBD5E0"/>
+                      </a:solidFill>
+                      <a:prstDash val="solid"/>
+                      <a:round/>
+                      <a:headEnd type="none" w="med" len="med"/>
+                      <a:tailEnd type="none" w="med" len="med"/>
+                    </a:lnT>
+                    <a:lnB w="12700" cap="flat" cmpd="sng" algn="ctr">
+                      <a:solidFill>
+                        <a:srgbClr val="CBD5E0"/>
+                      </a:solidFill>
+                      <a:prstDash val="solid"/>
+                      <a:round/>
+                      <a:headEnd type="none" w="med" len="med"/>
+                      <a:tailEnd type="none" w="med" len="med"/>
+                    </a:lnB>
+                    <a:solidFill>
+                      <a:srgbClr val="FFFFFF"/>
+                    </a:solidFill>
+                  </a:tcPr>
+                </a:tc>
+                <a:tc>
+                  <a:txBody>
+                    <a:bodyPr/>
+                    <a:lstStyle/>
+                    <a:p>
+                      <a:pPr algn="ctr" indent="0" marL="0">
+                        <a:buNone/>
+                      </a:pPr>
+                      <a:r>
+                        <a:rPr lang="en-US" sz="850" dirty="0">
+                          <a:solidFill>
+                            <a:srgbClr val="2B2B2B"/>
+                          </a:solidFill>
+                          <a:latin typeface="맑은 고딕" pitchFamily="34" charset="0"/>
+                          <a:ea typeface="맑은 고딕" pitchFamily="34" charset="-122"/>
+                          <a:cs typeface="맑은 고딕" pitchFamily="34" charset="-120"/>
+                        </a:rPr>
+                        <a:t>5,147</a:t>
+                      </a:r>
+                      <a:endParaRPr lang="en-US" sz="850" dirty="0">
+                        <a:latin typeface="맑은 고딕" charset="0"/>
+                        <a:ea typeface="맑은 고딕" charset="0"/>
+                        <a:cs typeface="맑은 고딕" charset="0"/>
+                      </a:endParaRPr>
+                    </a:p>
+                  </a:txBody>
+                  <a:tcPr marL="91440" marR="91440" marT="45720" marB="45720" anchor="ctr">
+                    <a:lnL w="12700" cap="flat" cmpd="sng" algn="ctr">
+                      <a:solidFill>
+                        <a:srgbClr val="CBD5E0"/>
+                      </a:solidFill>
+                      <a:prstDash val="solid"/>
+                      <a:round/>
+                      <a:headEnd type="none" w="med" len="med"/>
+                      <a:tailEnd type="none" w="med" len="med"/>
+                    </a:lnL>
+                    <a:lnR w="12700" cap="flat" cmpd="sng" algn="ctr">
+                      <a:solidFill>
+                        <a:srgbClr val="CBD5E0"/>
+                      </a:solidFill>
+                      <a:prstDash val="solid"/>
+                      <a:round/>
+                      <a:headEnd type="none" w="med" len="med"/>
+                      <a:tailEnd type="none" w="med" len="med"/>
+                    </a:lnR>
+                    <a:lnT w="12700" cap="flat" cmpd="sng" algn="ctr">
+                      <a:solidFill>
+                        <a:srgbClr val="CBD5E0"/>
+                      </a:solidFill>
+                      <a:prstDash val="solid"/>
+                      <a:round/>
+                      <a:headEnd type="none" w="med" len="med"/>
+                      <a:tailEnd type="none" w="med" len="med"/>
+                    </a:lnT>
+                    <a:lnB w="12700" cap="flat" cmpd="sng" algn="ctr">
+                      <a:solidFill>
+                        <a:srgbClr val="CBD5E0"/>
+                      </a:solidFill>
+                      <a:prstDash val="solid"/>
+                      <a:round/>
+                      <a:headEnd type="none" w="med" len="med"/>
+                      <a:tailEnd type="none" w="med" len="med"/>
+                    </a:lnB>
+                    <a:solidFill>
+                      <a:srgbClr val="FFFFFF"/>
                     </a:solidFill>
                   </a:tcPr>
                 </a:tc>
@@ -16577,46 +17885,7 @@
       </p:graphicFrame>
       <p:sp>
         <p:nvSpPr>
-          <p:cNvPr id="55" name="Text 52"/>
-          <p:cNvSpPr/>
-          <p:nvPr/>
-        </p:nvSpPr>
-        <p:spPr>
-          <a:xfrm>
-            <a:off x="3749040" y="5257800"/>
-            <a:ext cx="6805879" cy="182880"/>
-          </a:xfrm>
-          <a:prstGeom prst="rect">
-            <a:avLst/>
-          </a:prstGeom>
-          <a:noFill/>
-          <a:ln/>
-        </p:spPr>
-        <p:txBody>
-          <a:bodyPr wrap="square" rtlCol="0" anchor="ctr"/>
-          <a:lstStyle/>
-          <a:p>
-            <a:pPr algn="r" indent="0" marL="0">
-              <a:buNone/>
-            </a:pPr>
-            <a:r>
-              <a:rPr lang="en-US" sz="900" dirty="0">
-                <a:solidFill>
-                  <a:srgbClr val="7A8794"/>
-                </a:solidFill>
-                <a:latin typeface="맑은 고딕" pitchFamily="34" charset="0"/>
-                <a:ea typeface="맑은 고딕" pitchFamily="34" charset="-122"/>
-                <a:cs typeface="맑은 고딕" pitchFamily="34" charset="-120"/>
-              </a:rPr>
-              <a:t>(전체 13건 중 10건 표시)</a:t>
-            </a:r>
-            <a:endParaRPr lang="en-US" sz="900" dirty="0"/>
-          </a:p>
-        </p:txBody>
-      </p:sp>
-      <p:sp>
-        <p:nvSpPr>
-          <p:cNvPr id="56" name="Text 53"/>
+          <p:cNvPr id="48" name="Text 45"/>
           <p:cNvSpPr/>
           <p:nvPr/>
         </p:nvSpPr>
@@ -16655,7 +17924,7 @@
       </p:sp>
       <p:sp>
         <p:nvSpPr>
-          <p:cNvPr id="57" name="Text 54"/>
+          <p:cNvPr id="49" name="Text 46"/>
           <p:cNvSpPr/>
           <p:nvPr/>
         </p:nvSpPr>
@@ -16870,231 +18139,11 @@
         <p:spPr>
           <a:xfrm>
             <a:off x="502920" y="1371600"/>
-            <a:ext cx="11057839" cy="1188720"/>
+            <a:ext cx="11057839" cy="4389120"/>
           </a:xfrm>
           <a:prstGeom prst="roundRect">
             <a:avLst>
-              <a:gd name="adj" fmla="val 6154"/>
-            </a:avLst>
-          </a:prstGeom>
-          <a:solidFill>
-            <a:srgbClr val="F7FAFC"/>
-          </a:solidFill>
-          <a:ln w="9525">
-            <a:solidFill>
-              <a:srgbClr val="CBD5E0"/>
-            </a:solidFill>
-            <a:prstDash val="solid"/>
-          </a:ln>
-        </p:spPr>
-      </p:sp>
-      <p:sp>
-        <p:nvSpPr>
-          <p:cNvPr id="7" name="Text 5"/>
-          <p:cNvSpPr/>
-          <p:nvPr/>
-        </p:nvSpPr>
-        <p:spPr>
-          <a:xfrm>
-            <a:off x="868680" y="1508760"/>
-            <a:ext cx="3200400" cy="822960"/>
-          </a:xfrm>
-          <a:prstGeom prst="rect">
-            <a:avLst/>
-          </a:prstGeom>
-          <a:noFill/>
-          <a:ln/>
-        </p:spPr>
-        <p:txBody>
-          <a:bodyPr wrap="square" rtlCol="0" anchor="ctr"/>
-          <a:lstStyle/>
-          <a:p>
-            <a:pPr indent="0" marL="0">
-              <a:buNone/>
-            </a:pPr>
-            <a:r>
-              <a:rPr lang="en-US" sz="1600" b="1" dirty="0">
-                <a:solidFill>
-                  <a:srgbClr val="132A3A"/>
-                </a:solidFill>
-                <a:latin typeface="맑은 고딕" pitchFamily="34" charset="0"/>
-                <a:ea typeface="맑은 고딕" pitchFamily="34" charset="-122"/>
-                <a:cs typeface="맑은 고딕" pitchFamily="34" charset="-120"/>
-              </a:rPr>
-              <a:t>표면 임대수익률  =</a:t>
-            </a:r>
-            <a:endParaRPr lang="en-US" sz="1600" dirty="0"/>
-          </a:p>
-        </p:txBody>
-      </p:sp>
-      <p:sp>
-        <p:nvSpPr>
-          <p:cNvPr id="8" name="Text 6"/>
-          <p:cNvSpPr/>
-          <p:nvPr/>
-        </p:nvSpPr>
-        <p:spPr>
-          <a:xfrm>
-            <a:off x="4343400" y="1508760"/>
-            <a:ext cx="4572000" cy="365760"/>
-          </a:xfrm>
-          <a:prstGeom prst="rect">
-            <a:avLst/>
-          </a:prstGeom>
-          <a:noFill/>
-          <a:ln/>
-        </p:spPr>
-        <p:txBody>
-          <a:bodyPr wrap="square" rtlCol="0" anchor="b"/>
-          <a:lstStyle/>
-          <a:p>
-            <a:pPr algn="ctr" indent="0" marL="0">
-              <a:buNone/>
-            </a:pPr>
-            <a:r>
-              <a:rPr lang="en-US" sz="1300" b="1" dirty="0">
-                <a:solidFill>
-                  <a:srgbClr val="132A3A"/>
-                </a:solidFill>
-                <a:latin typeface="맑은 고딕" pitchFamily="34" charset="0"/>
-                <a:ea typeface="맑은 고딕" pitchFamily="34" charset="-122"/>
-                <a:cs typeface="맑은 고딕" pitchFamily="34" charset="-120"/>
-              </a:rPr>
-              <a:t>연간 임대료 합계 (관리비 제외)</a:t>
-            </a:r>
-            <a:endParaRPr lang="en-US" sz="1300" dirty="0"/>
-          </a:p>
-        </p:txBody>
-      </p:sp>
-      <p:sp>
-        <p:nvSpPr>
-          <p:cNvPr id="9" name="Shape 7"/>
-          <p:cNvSpPr/>
-          <p:nvPr/>
-        </p:nvSpPr>
-        <p:spPr>
-          <a:xfrm>
-            <a:off x="4526280" y="1920240"/>
-            <a:ext cx="4206240" cy="0"/>
-          </a:xfrm>
-          <a:prstGeom prst="line">
-            <a:avLst/>
-          </a:prstGeom>
-          <a:noFill/>
-          <a:ln w="25400">
-            <a:solidFill>
-              <a:srgbClr val="B8860B"/>
-            </a:solidFill>
-            <a:prstDash val="solid"/>
-          </a:ln>
-        </p:spPr>
-      </p:sp>
-      <p:sp>
-        <p:nvSpPr>
-          <p:cNvPr id="10" name="Text 8"/>
-          <p:cNvSpPr/>
-          <p:nvPr/>
-        </p:nvSpPr>
-        <p:spPr>
-          <a:xfrm>
-            <a:off x="4343400" y="1965960"/>
-            <a:ext cx="4572000" cy="365760"/>
-          </a:xfrm>
-          <a:prstGeom prst="rect">
-            <a:avLst/>
-          </a:prstGeom>
-          <a:noFill/>
-          <a:ln/>
-        </p:spPr>
-        <p:txBody>
-          <a:bodyPr wrap="square" rtlCol="0" anchor="t"/>
-          <a:lstStyle/>
-          <a:p>
-            <a:pPr algn="ctr" indent="0" marL="0">
-              <a:buNone/>
-            </a:pPr>
-            <a:r>
-              <a:rPr lang="en-US" sz="1300" b="1" dirty="0">
-                <a:solidFill>
-                  <a:srgbClr val="132A3A"/>
-                </a:solidFill>
-                <a:latin typeface="맑은 고딕" pitchFamily="34" charset="0"/>
-                <a:ea typeface="맑은 고딕" pitchFamily="34" charset="-122"/>
-                <a:cs typeface="맑은 고딕" pitchFamily="34" charset="-120"/>
-              </a:rPr>
-              <a:t>매매가  −  승계 보증금 합계</a:t>
-            </a:r>
-            <a:endParaRPr lang="en-US" sz="1300" dirty="0"/>
-          </a:p>
-        </p:txBody>
-      </p:sp>
-      <p:sp>
-        <p:nvSpPr>
-          <p:cNvPr id="11" name="Text 9"/>
-          <p:cNvSpPr/>
-          <p:nvPr/>
-        </p:nvSpPr>
-        <p:spPr>
-          <a:xfrm>
-            <a:off x="8726119" y="1508760"/>
-            <a:ext cx="2697480" cy="822960"/>
-          </a:xfrm>
-          <a:prstGeom prst="rect">
-            <a:avLst/>
-          </a:prstGeom>
-          <a:noFill/>
-          <a:ln/>
-        </p:spPr>
-        <p:txBody>
-          <a:bodyPr wrap="square" rtlCol="0" anchor="ctr"/>
-          <a:lstStyle/>
-          <a:p>
-            <a:pPr algn="r" indent="0" marL="0">
-              <a:buNone/>
-            </a:pPr>
-            <a:r>
-              <a:rPr lang="en-US" sz="1100" b="1" dirty="0">
-                <a:solidFill>
-                  <a:srgbClr val="B8860B"/>
-                </a:solidFill>
-                <a:latin typeface="맑은 고딕" pitchFamily="34" charset="0"/>
-                <a:ea typeface="맑은 고딕" pitchFamily="34" charset="-122"/>
-                <a:cs typeface="맑은 고딕" pitchFamily="34" charset="-120"/>
-              </a:rPr>
-              <a:t>6.2억원</a:t>
-            </a:r>
-            <a:pPr algn="r" indent="0" marL="0">
-              <a:buNone/>
-            </a:pPr>
-            <a:r>
-              <a:rPr lang="en-US" sz="1100" dirty="0">
-                <a:solidFill>
-                  <a:srgbClr val="5B6B73"/>
-                </a:solidFill>
-                <a:latin typeface="맑은 고딕" pitchFamily="34" charset="0"/>
-                <a:ea typeface="맑은 고딕" pitchFamily="34" charset="-122"/>
-                <a:cs typeface="맑은 고딕" pitchFamily="34" charset="-120"/>
-              </a:rPr>
-              <a:t> ÷ (250.0억원 − 5.4억원)</a:t>
-            </a:r>
-            <a:endParaRPr lang="en-US" sz="1100" dirty="0"/>
-          </a:p>
-        </p:txBody>
-      </p:sp>
-      <p:sp>
-        <p:nvSpPr>
-          <p:cNvPr id="12" name="Shape 10"/>
-          <p:cNvSpPr/>
-          <p:nvPr/>
-        </p:nvSpPr>
-        <p:spPr>
-          <a:xfrm>
-            <a:off x="502920" y="2834640"/>
-            <a:ext cx="5391760" cy="3063240"/>
-          </a:xfrm>
-          <a:prstGeom prst="roundRect">
-            <a:avLst>
-              <a:gd name="adj" fmla="val 2388"/>
+              <a:gd name="adj" fmla="val 1667"/>
             </a:avLst>
           </a:prstGeom>
           <a:solidFill>
@@ -17110,36 +18159,36 @@
       </p:sp>
       <p:sp>
         <p:nvSpPr>
-          <p:cNvPr id="13" name="Shape 11"/>
-          <p:cNvSpPr/>
-          <p:nvPr/>
-        </p:nvSpPr>
-        <p:spPr>
-          <a:xfrm>
-            <a:off x="685800" y="3017520"/>
-            <a:ext cx="1280160" cy="329184"/>
+          <p:cNvPr id="7" name="Shape 5"/>
+          <p:cNvSpPr/>
+          <p:nvPr/>
+        </p:nvSpPr>
+        <p:spPr>
+          <a:xfrm>
+            <a:off x="731520" y="1600200"/>
+            <a:ext cx="10600639" cy="1005840"/>
           </a:xfrm>
           <a:prstGeom prst="roundRect">
             <a:avLst>
-              <a:gd name="adj" fmla="val 11111"/>
+              <a:gd name="adj" fmla="val 7273"/>
             </a:avLst>
           </a:prstGeom>
           <a:solidFill>
-            <a:srgbClr val="F3F6F7"/>
+            <a:srgbClr val="132A3A"/>
           </a:solidFill>
           <a:ln/>
         </p:spPr>
       </p:sp>
       <p:sp>
         <p:nvSpPr>
-          <p:cNvPr id="14" name="Text 12"/>
-          <p:cNvSpPr/>
-          <p:nvPr/>
-        </p:nvSpPr>
-        <p:spPr>
-          <a:xfrm>
-            <a:off x="685800" y="3017520"/>
-            <a:ext cx="1280160" cy="329184"/>
+          <p:cNvPr id="8" name="Text 6"/>
+          <p:cNvSpPr/>
+          <p:nvPr/>
+        </p:nvSpPr>
+        <p:spPr>
+          <a:xfrm>
+            <a:off x="960120" y="1600200"/>
+            <a:ext cx="2286000" cy="1005840"/>
           </a:xfrm>
           <a:prstGeom prst="rect">
             <a:avLst/>
@@ -17151,34 +18200,73 @@
           <a:bodyPr wrap="square" rtlCol="0" anchor="ctr"/>
           <a:lstStyle/>
           <a:p>
-            <a:pPr algn="ctr" indent="0" marL="0">
+            <a:pPr indent="0" marL="0">
               <a:buNone/>
             </a:pPr>
             <a:r>
-              <a:rPr lang="en-US" sz="1000" b="1" dirty="0">
+              <a:rPr lang="en-US" sz="1600" b="1" dirty="0">
                 <a:solidFill>
-                  <a:srgbClr val="132A3A"/>
+                  <a:srgbClr val="FFFFFF"/>
                 </a:solidFill>
                 <a:latin typeface="맑은 고딕" pitchFamily="34" charset="0"/>
                 <a:ea typeface="맑은 고딕" pitchFamily="34" charset="-122"/>
                 <a:cs typeface="맑은 고딕" pitchFamily="34" charset="-120"/>
               </a:rPr>
-              <a:t>As-Is (현재)</a:t>
-            </a:r>
-            <a:endParaRPr lang="en-US" sz="1000" dirty="0"/>
-          </a:p>
-        </p:txBody>
-      </p:sp>
-      <p:sp>
-        <p:nvSpPr>
-          <p:cNvPr id="15" name="Text 13"/>
-          <p:cNvSpPr/>
-          <p:nvPr/>
-        </p:nvSpPr>
-        <p:spPr>
-          <a:xfrm>
-            <a:off x="777240" y="3520440"/>
-            <a:ext cx="2743200" cy="402336"/>
+              <a:t>수익률</a:t>
+            </a:r>
+            <a:endParaRPr lang="en-US" sz="1600" dirty="0"/>
+          </a:p>
+        </p:txBody>
+      </p:sp>
+      <p:sp>
+        <p:nvSpPr>
+          <p:cNvPr id="9" name="Text 7"/>
+          <p:cNvSpPr/>
+          <p:nvPr/>
+        </p:nvSpPr>
+        <p:spPr>
+          <a:xfrm>
+            <a:off x="8360359" y="1600200"/>
+            <a:ext cx="2743200" cy="1005840"/>
+          </a:xfrm>
+          <a:prstGeom prst="rect">
+            <a:avLst/>
+          </a:prstGeom>
+          <a:noFill/>
+          <a:ln/>
+        </p:spPr>
+        <p:txBody>
+          <a:bodyPr wrap="square" rtlCol="0" anchor="ctr"/>
+          <a:lstStyle/>
+          <a:p>
+            <a:pPr algn="r" indent="0" marL="0">
+              <a:buNone/>
+            </a:pPr>
+            <a:r>
+              <a:rPr lang="en-US" sz="2800" b="1" dirty="0">
+                <a:solidFill>
+                  <a:srgbClr val="B8860B"/>
+                </a:solidFill>
+                <a:latin typeface="Arial" pitchFamily="34" charset="0"/>
+                <a:ea typeface="Arial" pitchFamily="34" charset="-122"/>
+                <a:cs typeface="Arial" pitchFamily="34" charset="-120"/>
+              </a:rPr>
+              <a:t>2.52%</a:t>
+            </a:r>
+            <a:endParaRPr lang="en-US" sz="2800" dirty="0"/>
+          </a:p>
+        </p:txBody>
+      </p:sp>
+      <p:sp>
+        <p:nvSpPr>
+          <p:cNvPr id="10" name="Text 8"/>
+          <p:cNvSpPr/>
+          <p:nvPr/>
+        </p:nvSpPr>
+        <p:spPr>
+          <a:xfrm>
+            <a:off x="822960" y="2834640"/>
+            <a:ext cx="2743200" cy="347472"/>
           </a:xfrm>
           <a:prstGeom prst="rect">
             <a:avLst/>
@@ -17202,7 +18290,7 @@
                 <a:ea typeface="맑은 고딕" pitchFamily="34" charset="-122"/>
                 <a:cs typeface="맑은 고딕" pitchFamily="34" charset="-120"/>
               </a:rPr>
-              <a:t>연간 임대료</a:t>
+              <a:t>연간 임대수입</a:t>
             </a:r>
             <a:endParaRPr lang="en-US" sz="1100" dirty="0"/>
           </a:p>
@@ -17210,14 +18298,14 @@
       </p:sp>
       <p:sp>
         <p:nvSpPr>
-          <p:cNvPr id="16" name="Text 14"/>
-          <p:cNvSpPr/>
-          <p:nvPr/>
-        </p:nvSpPr>
-        <p:spPr>
-          <a:xfrm>
-            <a:off x="3791560" y="3520440"/>
-            <a:ext cx="1828800" cy="402336"/>
+          <p:cNvPr id="11" name="Text 9"/>
+          <p:cNvSpPr/>
+          <p:nvPr/>
+        </p:nvSpPr>
+        <p:spPr>
+          <a:xfrm>
+            <a:off x="9000439" y="2834640"/>
+            <a:ext cx="2194560" cy="347472"/>
           </a:xfrm>
           <a:prstGeom prst="rect">
             <a:avLst/>
@@ -17233,7 +18321,7 @@
               <a:buNone/>
             </a:pPr>
             <a:r>
-              <a:rPr lang="en-US" sz="1200" b="1" dirty="0">
+              <a:rPr lang="en-US" sz="1200" dirty="0">
                 <a:solidFill>
                   <a:srgbClr val="132A3A"/>
                 </a:solidFill>
@@ -17249,14 +18337,37 @@
       </p:sp>
       <p:sp>
         <p:nvSpPr>
-          <p:cNvPr id="17" name="Text 15"/>
-          <p:cNvSpPr/>
-          <p:nvPr/>
-        </p:nvSpPr>
-        <p:spPr>
-          <a:xfrm>
-            <a:off x="777240" y="3922776"/>
-            <a:ext cx="2743200" cy="402336"/>
+          <p:cNvPr id="12" name="Shape 10"/>
+          <p:cNvSpPr/>
+          <p:nvPr/>
+        </p:nvSpPr>
+        <p:spPr>
+          <a:xfrm>
+            <a:off x="731520" y="3182112"/>
+            <a:ext cx="10600639" cy="0"/>
+          </a:xfrm>
+          <a:prstGeom prst="line">
+            <a:avLst/>
+          </a:prstGeom>
+          <a:noFill/>
+          <a:ln w="6350">
+            <a:solidFill>
+              <a:srgbClr val="E8E8E8"/>
+            </a:solidFill>
+            <a:prstDash val="solid"/>
+          </a:ln>
+        </p:spPr>
+      </p:sp>
+      <p:sp>
+        <p:nvSpPr>
+          <p:cNvPr id="13" name="Text 11"/>
+          <p:cNvSpPr/>
+          <p:nvPr/>
+        </p:nvSpPr>
+        <p:spPr>
+          <a:xfrm>
+            <a:off x="822960" y="3182112"/>
+            <a:ext cx="2743200" cy="347472"/>
           </a:xfrm>
           <a:prstGeom prst="rect">
             <a:avLst/>
@@ -17288,14 +18399,14 @@
       </p:sp>
       <p:sp>
         <p:nvSpPr>
-          <p:cNvPr id="18" name="Text 16"/>
-          <p:cNvSpPr/>
-          <p:nvPr/>
-        </p:nvSpPr>
-        <p:spPr>
-          <a:xfrm>
-            <a:off x="3791560" y="3922776"/>
-            <a:ext cx="1828800" cy="402336"/>
+          <p:cNvPr id="14" name="Text 12"/>
+          <p:cNvSpPr/>
+          <p:nvPr/>
+        </p:nvSpPr>
+        <p:spPr>
+          <a:xfrm>
+            <a:off x="9000439" y="3182112"/>
+            <a:ext cx="2194560" cy="347472"/>
           </a:xfrm>
           <a:prstGeom prst="rect">
             <a:avLst/>
@@ -17311,7 +18422,7 @@
               <a:buNone/>
             </a:pPr>
             <a:r>
-              <a:rPr lang="en-US" sz="1200" b="1" dirty="0">
+              <a:rPr lang="en-US" sz="1200" dirty="0">
                 <a:solidFill>
                   <a:srgbClr val="132A3A"/>
                 </a:solidFill>
@@ -17327,14 +18438,37 @@
       </p:sp>
       <p:sp>
         <p:nvSpPr>
-          <p:cNvPr id="19" name="Text 17"/>
-          <p:cNvSpPr/>
-          <p:nvPr/>
-        </p:nvSpPr>
-        <p:spPr>
-          <a:xfrm>
-            <a:off x="777240" y="4325112"/>
-            <a:ext cx="2743200" cy="402336"/>
+          <p:cNvPr id="15" name="Shape 13"/>
+          <p:cNvSpPr/>
+          <p:nvPr/>
+        </p:nvSpPr>
+        <p:spPr>
+          <a:xfrm>
+            <a:off x="731520" y="3529584"/>
+            <a:ext cx="10600639" cy="0"/>
+          </a:xfrm>
+          <a:prstGeom prst="line">
+            <a:avLst/>
+          </a:prstGeom>
+          <a:noFill/>
+          <a:ln w="6350">
+            <a:solidFill>
+              <a:srgbClr val="E8E8E8"/>
+            </a:solidFill>
+            <a:prstDash val="solid"/>
+          </a:ln>
+        </p:spPr>
+      </p:sp>
+      <p:sp>
+        <p:nvSpPr>
+          <p:cNvPr id="16" name="Text 14"/>
+          <p:cNvSpPr/>
+          <p:nvPr/>
+        </p:nvSpPr>
+        <p:spPr>
+          <a:xfrm>
+            <a:off x="822960" y="3529584"/>
+            <a:ext cx="2743200" cy="347472"/>
           </a:xfrm>
           <a:prstGeom prst="rect">
             <a:avLst/>
@@ -17366,14 +18500,14 @@
       </p:sp>
       <p:sp>
         <p:nvSpPr>
-          <p:cNvPr id="20" name="Text 18"/>
-          <p:cNvSpPr/>
-          <p:nvPr/>
-        </p:nvSpPr>
-        <p:spPr>
-          <a:xfrm>
-            <a:off x="3791560" y="4325112"/>
-            <a:ext cx="1828800" cy="402336"/>
+          <p:cNvPr id="17" name="Text 15"/>
+          <p:cNvSpPr/>
+          <p:nvPr/>
+        </p:nvSpPr>
+        <p:spPr>
+          <a:xfrm>
+            <a:off x="9000439" y="3529584"/>
+            <a:ext cx="2194560" cy="347472"/>
           </a:xfrm>
           <a:prstGeom prst="rect">
             <a:avLst/>
@@ -17389,7 +18523,7 @@
               <a:buNone/>
             </a:pPr>
             <a:r>
-              <a:rPr lang="en-US" sz="1200" b="1" dirty="0">
+              <a:rPr lang="en-US" sz="1200" dirty="0">
                 <a:solidFill>
                   <a:srgbClr val="132A3A"/>
                 </a:solidFill>
@@ -17405,126 +18539,22 @@
       </p:sp>
       <p:sp>
         <p:nvSpPr>
-          <p:cNvPr id="21" name="Shape 19"/>
-          <p:cNvSpPr/>
-          <p:nvPr/>
-        </p:nvSpPr>
-        <p:spPr>
-          <a:xfrm>
-            <a:off x="685800" y="4837176"/>
-            <a:ext cx="5026000" cy="594360"/>
-          </a:xfrm>
-          <a:prstGeom prst="roundRect">
-            <a:avLst>
-              <a:gd name="adj" fmla="val 9231"/>
-            </a:avLst>
-          </a:prstGeom>
-          <a:solidFill>
-            <a:srgbClr val="132A3A"/>
-          </a:solidFill>
-          <a:ln/>
-        </p:spPr>
-      </p:sp>
-      <p:sp>
-        <p:nvSpPr>
-          <p:cNvPr id="22" name="Text 20"/>
-          <p:cNvSpPr/>
-          <p:nvPr/>
-        </p:nvSpPr>
-        <p:spPr>
-          <a:xfrm>
-            <a:off x="868680" y="4837176"/>
-            <a:ext cx="2286000" cy="594360"/>
-          </a:xfrm>
-          <a:prstGeom prst="rect">
-            <a:avLst/>
-          </a:prstGeom>
-          <a:noFill/>
-          <a:ln/>
-        </p:spPr>
-        <p:txBody>
-          <a:bodyPr wrap="square" rtlCol="0" anchor="ctr"/>
-          <a:lstStyle/>
-          <a:p>
-            <a:pPr indent="0" marL="0">
-              <a:buNone/>
-            </a:pPr>
-            <a:r>
-              <a:rPr lang="en-US" sz="1200" b="1" dirty="0">
-                <a:solidFill>
-                  <a:srgbClr val="FFFFFF"/>
-                </a:solidFill>
-                <a:latin typeface="맑은 고딕" pitchFamily="34" charset="0"/>
-                <a:ea typeface="맑은 고딕" pitchFamily="34" charset="-122"/>
-                <a:cs typeface="맑은 고딕" pitchFamily="34" charset="-120"/>
-              </a:rPr>
-              <a:t>Cap Rate</a:t>
-            </a:r>
-            <a:endParaRPr lang="en-US" sz="1200" dirty="0"/>
-          </a:p>
-        </p:txBody>
-      </p:sp>
-      <p:sp>
-        <p:nvSpPr>
-          <p:cNvPr id="23" name="Text 21"/>
-          <p:cNvSpPr/>
-          <p:nvPr/>
-        </p:nvSpPr>
-        <p:spPr>
-          <a:xfrm>
-            <a:off x="3517240" y="4837176"/>
-            <a:ext cx="2011680" cy="594360"/>
-          </a:xfrm>
-          <a:prstGeom prst="rect">
-            <a:avLst/>
-          </a:prstGeom>
-          <a:noFill/>
-          <a:ln/>
-        </p:spPr>
-        <p:txBody>
-          <a:bodyPr wrap="square" rtlCol="0" anchor="ctr"/>
-          <a:lstStyle/>
-          <a:p>
-            <a:pPr algn="r" indent="0" marL="0">
-              <a:buNone/>
-            </a:pPr>
-            <a:r>
-              <a:rPr lang="en-US" sz="2200" b="1" dirty="0">
-                <a:solidFill>
-                  <a:srgbClr val="FFFFFF"/>
-                </a:solidFill>
-                <a:latin typeface="Arial" pitchFamily="34" charset="0"/>
-                <a:ea typeface="Arial" pitchFamily="34" charset="-122"/>
-                <a:cs typeface="Arial" pitchFamily="34" charset="-120"/>
-              </a:rPr>
-              <a:t>2.52%</a:t>
-            </a:r>
-            <a:endParaRPr lang="en-US" sz="2200" dirty="0"/>
-          </a:p>
-        </p:txBody>
-      </p:sp>
-      <p:sp>
-        <p:nvSpPr>
-          <p:cNvPr id="24" name="Shape 22"/>
-          <p:cNvSpPr/>
-          <p:nvPr/>
-        </p:nvSpPr>
-        <p:spPr>
-          <a:xfrm>
-            <a:off x="6169000" y="2834640"/>
-            <a:ext cx="5391760" cy="3063240"/>
-          </a:xfrm>
-          <a:prstGeom prst="roundRect">
-            <a:avLst>
-              <a:gd name="adj" fmla="val 2388"/>
-            </a:avLst>
-          </a:prstGeom>
-          <a:solidFill>
-            <a:srgbClr val="FFFFFF"/>
-          </a:solidFill>
-          <a:ln w="19050">
+          <p:cNvPr id="18" name="Shape 16"/>
+          <p:cNvSpPr/>
+          <p:nvPr/>
+        </p:nvSpPr>
+        <p:spPr>
+          <a:xfrm>
+            <a:off x="731520" y="3877056"/>
+            <a:ext cx="10600639" cy="0"/>
+          </a:xfrm>
+          <a:prstGeom prst="line">
+            <a:avLst/>
+          </a:prstGeom>
+          <a:noFill/>
+          <a:ln w="6350">
             <a:solidFill>
-              <a:srgbClr val="B8860B"/>
+              <a:srgbClr val="E8E8E8"/>
             </a:solidFill>
             <a:prstDash val="solid"/>
           </a:ln>
@@ -17532,114 +18562,14 @@
       </p:sp>
       <p:sp>
         <p:nvSpPr>
-          <p:cNvPr id="25" name="Shape 23"/>
-          <p:cNvSpPr/>
-          <p:nvPr/>
-        </p:nvSpPr>
-        <p:spPr>
-          <a:xfrm>
-            <a:off x="6351880" y="3017520"/>
-            <a:ext cx="1645920" cy="329184"/>
-          </a:xfrm>
-          <a:prstGeom prst="roundRect">
-            <a:avLst>
-              <a:gd name="adj" fmla="val 11111"/>
-            </a:avLst>
-          </a:prstGeom>
-          <a:solidFill>
-            <a:srgbClr val="F6F1E4"/>
-          </a:solidFill>
-          <a:ln/>
-        </p:spPr>
-      </p:sp>
-      <p:sp>
-        <p:nvSpPr>
-          <p:cNvPr id="26" name="Text 24"/>
-          <p:cNvSpPr/>
-          <p:nvPr/>
-        </p:nvSpPr>
-        <p:spPr>
-          <a:xfrm>
-            <a:off x="6351880" y="3017520"/>
-            <a:ext cx="1645920" cy="329184"/>
-          </a:xfrm>
-          <a:prstGeom prst="rect">
-            <a:avLst/>
-          </a:prstGeom>
-          <a:noFill/>
-          <a:ln/>
-        </p:spPr>
-        <p:txBody>
-          <a:bodyPr wrap="square" rtlCol="0" anchor="ctr"/>
-          <a:lstStyle/>
-          <a:p>
-            <a:pPr algn="ctr" indent="0" marL="0">
-              <a:buNone/>
-            </a:pPr>
-            <a:r>
-              <a:rPr lang="en-US" sz="1000" b="1" dirty="0">
-                <a:solidFill>
-                  <a:srgbClr val="8B6508"/>
-                </a:solidFill>
-                <a:latin typeface="맑은 고딕" pitchFamily="34" charset="0"/>
-                <a:ea typeface="맑은 고딕" pitchFamily="34" charset="-122"/>
-                <a:cs typeface="맑은 고딕" pitchFamily="34" charset="-120"/>
-              </a:rPr>
-              <a:t>Stabilized (안정화)</a:t>
-            </a:r>
-            <a:endParaRPr lang="en-US" sz="1000" dirty="0"/>
-          </a:p>
-        </p:txBody>
-      </p:sp>
-      <p:sp>
-        <p:nvSpPr>
-          <p:cNvPr id="27" name="Text 25"/>
-          <p:cNvSpPr/>
-          <p:nvPr/>
-        </p:nvSpPr>
-        <p:spPr>
-          <a:xfrm>
-            <a:off x="8089240" y="3017520"/>
-            <a:ext cx="1371600" cy="329184"/>
-          </a:xfrm>
-          <a:prstGeom prst="rect">
-            <a:avLst/>
-          </a:prstGeom>
-          <a:noFill/>
-          <a:ln/>
-        </p:spPr>
-        <p:txBody>
-          <a:bodyPr wrap="square" rtlCol="0" anchor="ctr"/>
-          <a:lstStyle/>
-          <a:p>
-            <a:pPr indent="0" marL="0">
-              <a:buNone/>
-            </a:pPr>
-            <a:r>
-              <a:rPr lang="en-US" sz="900" i="1" dirty="0">
-                <a:solidFill>
-                  <a:srgbClr val="B8860B"/>
-                </a:solidFill>
-                <a:latin typeface="맑은 고딕" pitchFamily="34" charset="0"/>
-                <a:ea typeface="맑은 고딕" pitchFamily="34" charset="-122"/>
-                <a:cs typeface="맑은 고딕" pitchFamily="34" charset="-120"/>
-              </a:rPr>
-              <a:t>◇ 분석가정</a:t>
-            </a:r>
-            <a:endParaRPr lang="en-US" sz="900" dirty="0"/>
-          </a:p>
-        </p:txBody>
-      </p:sp>
-      <p:sp>
-        <p:nvSpPr>
-          <p:cNvPr id="28" name="Text 26"/>
-          <p:cNvSpPr/>
-          <p:nvPr/>
-        </p:nvSpPr>
-        <p:spPr>
-          <a:xfrm>
-            <a:off x="6443320" y="3520440"/>
-            <a:ext cx="2743200" cy="402336"/>
+          <p:cNvPr id="19" name="Text 17"/>
+          <p:cNvSpPr/>
+          <p:nvPr/>
+        </p:nvSpPr>
+        <p:spPr>
+          <a:xfrm>
+            <a:off x="822960" y="3877056"/>
+            <a:ext cx="2743200" cy="347472"/>
           </a:xfrm>
           <a:prstGeom prst="rect">
             <a:avLst/>
@@ -17663,7 +18593,7 @@
                 <a:ea typeface="맑은 고딕" pitchFamily="34" charset="-122"/>
                 <a:cs typeface="맑은 고딕" pitchFamily="34" charset="-120"/>
               </a:rPr>
-              <a:t>연간 임대료</a:t>
+              <a:t>순투자금 (매매가 − 보증금)</a:t>
             </a:r>
             <a:endParaRPr lang="en-US" sz="1100" dirty="0"/>
           </a:p>
@@ -17671,14 +18601,14 @@
       </p:sp>
       <p:sp>
         <p:nvSpPr>
-          <p:cNvPr id="29" name="Text 27"/>
-          <p:cNvSpPr/>
-          <p:nvPr/>
-        </p:nvSpPr>
-        <p:spPr>
-          <a:xfrm>
-            <a:off x="9457639" y="3520440"/>
-            <a:ext cx="1828800" cy="402336"/>
+          <p:cNvPr id="20" name="Text 18"/>
+          <p:cNvSpPr/>
+          <p:nvPr/>
+        </p:nvSpPr>
+        <p:spPr>
+          <a:xfrm>
+            <a:off x="9000439" y="3877056"/>
+            <a:ext cx="2194560" cy="347472"/>
           </a:xfrm>
           <a:prstGeom prst="rect">
             <a:avLst/>
@@ -17696,13 +18626,13 @@
             <a:r>
               <a:rPr lang="en-US" sz="1200" b="1" dirty="0">
                 <a:solidFill>
-                  <a:srgbClr val="132A3A"/>
+                  <a:srgbClr val="B8860B"/>
                 </a:solidFill>
                 <a:latin typeface="Arial" pitchFamily="34" charset="0"/>
                 <a:ea typeface="Arial" pitchFamily="34" charset="-122"/>
                 <a:cs typeface="Arial" pitchFamily="34" charset="-120"/>
               </a:rPr>
-              <a:t>6.7억원</a:t>
+              <a:t>244.6억원</a:t>
             </a:r>
             <a:endParaRPr lang="en-US" sz="1200" dirty="0"/>
           </a:p>
@@ -17710,14 +18640,64 @@
       </p:sp>
       <p:sp>
         <p:nvSpPr>
-          <p:cNvPr id="30" name="Text 28"/>
-          <p:cNvSpPr/>
-          <p:nvPr/>
-        </p:nvSpPr>
-        <p:spPr>
-          <a:xfrm>
-            <a:off x="6443320" y="3922776"/>
-            <a:ext cx="2743200" cy="402336"/>
+          <p:cNvPr id="21" name="Shape 19"/>
+          <p:cNvSpPr/>
+          <p:nvPr/>
+        </p:nvSpPr>
+        <p:spPr>
+          <a:xfrm>
+            <a:off x="731520" y="4224528"/>
+            <a:ext cx="10600639" cy="0"/>
+          </a:xfrm>
+          <a:prstGeom prst="line">
+            <a:avLst/>
+          </a:prstGeom>
+          <a:noFill/>
+          <a:ln w="6350">
+            <a:solidFill>
+              <a:srgbClr val="E8E8E8"/>
+            </a:solidFill>
+            <a:prstDash val="solid"/>
+          </a:ln>
+        </p:spPr>
+      </p:sp>
+      <p:sp>
+        <p:nvSpPr>
+          <p:cNvPr id="22" name="Shape 20"/>
+          <p:cNvSpPr/>
+          <p:nvPr/>
+        </p:nvSpPr>
+        <p:spPr>
+          <a:xfrm>
+            <a:off x="731520" y="4361688"/>
+            <a:ext cx="10600639" cy="502920"/>
+          </a:xfrm>
+          <a:prstGeom prst="roundRect">
+            <a:avLst>
+              <a:gd name="adj" fmla="val 10909"/>
+            </a:avLst>
+          </a:prstGeom>
+          <a:solidFill>
+            <a:srgbClr val="F6F1E4"/>
+          </a:solidFill>
+          <a:ln w="12700">
+            <a:solidFill>
+              <a:srgbClr val="B8860B"/>
+            </a:solidFill>
+            <a:prstDash val="solid"/>
+          </a:ln>
+        </p:spPr>
+      </p:sp>
+      <p:sp>
+        <p:nvSpPr>
+          <p:cNvPr id="23" name="Text 21"/>
+          <p:cNvSpPr/>
+          <p:nvPr/>
+        </p:nvSpPr>
+        <p:spPr>
+          <a:xfrm>
+            <a:off x="868680" y="4361688"/>
+            <a:ext cx="2560320" cy="502920"/>
           </a:xfrm>
           <a:prstGeom prst="rect">
             <a:avLst/>
@@ -17733,30 +18713,30 @@
               <a:buNone/>
             </a:pPr>
             <a:r>
-              <a:rPr lang="en-US" sz="1100" dirty="0">
+              <a:rPr lang="en-US" sz="1000" b="1" dirty="0">
                 <a:solidFill>
-                  <a:srgbClr val="5B6B73"/>
+                  <a:srgbClr val="132A3A"/>
                 </a:solidFill>
                 <a:latin typeface="맑은 고딕" pitchFamily="34" charset="0"/>
                 <a:ea typeface="맑은 고딕" pitchFamily="34" charset="-122"/>
                 <a:cs typeface="맑은 고딕" pitchFamily="34" charset="-120"/>
               </a:rPr>
-              <a:t>승계 보증금</a:t>
-            </a:r>
-            <a:endParaRPr lang="en-US" sz="1100" dirty="0"/>
-          </a:p>
-        </p:txBody>
-      </p:sp>
-      <p:sp>
-        <p:nvSpPr>
-          <p:cNvPr id="31" name="Text 29"/>
-          <p:cNvSpPr/>
-          <p:nvPr/>
-        </p:nvSpPr>
-        <p:spPr>
-          <a:xfrm>
-            <a:off x="9457639" y="3922776"/>
-            <a:ext cx="1828800" cy="402336"/>
+              <a:t>◇ 공실 정상화 시</a:t>
+            </a:r>
+            <a:endParaRPr lang="en-US" sz="1000" dirty="0"/>
+          </a:p>
+        </p:txBody>
+      </p:sp>
+      <p:sp>
+        <p:nvSpPr>
+          <p:cNvPr id="24" name="Text 22"/>
+          <p:cNvSpPr/>
+          <p:nvPr/>
+        </p:nvSpPr>
+        <p:spPr>
+          <a:xfrm>
+            <a:off x="8817559" y="4361688"/>
+            <a:ext cx="2286000" cy="502920"/>
           </a:xfrm>
           <a:prstGeom prst="rect">
             <a:avLst/>
@@ -17772,240 +18752,147 @@
               <a:buNone/>
             </a:pPr>
             <a:r>
-              <a:rPr lang="en-US" sz="1200" b="1" dirty="0">
+              <a:rPr lang="en-US" sz="1800" b="1" dirty="0">
                 <a:solidFill>
-                  <a:srgbClr val="132A3A"/>
+                  <a:srgbClr val="B8860B"/>
                 </a:solidFill>
                 <a:latin typeface="Arial" pitchFamily="34" charset="0"/>
                 <a:ea typeface="Arial" pitchFamily="34" charset="-122"/>
                 <a:cs typeface="Arial" pitchFamily="34" charset="-120"/>
               </a:rPr>
-              <a:t>5.4억원</a:t>
-            </a:r>
-            <a:endParaRPr lang="en-US" sz="1200" dirty="0"/>
-          </a:p>
-        </p:txBody>
-      </p:sp>
-      <p:sp>
-        <p:nvSpPr>
-          <p:cNvPr id="32" name="Text 30"/>
-          <p:cNvSpPr/>
-          <p:nvPr/>
-        </p:nvSpPr>
-        <p:spPr>
-          <a:xfrm>
-            <a:off x="6443320" y="4325112"/>
-            <a:ext cx="2743200" cy="402336"/>
-          </a:xfrm>
-          <a:prstGeom prst="rect">
-            <a:avLst/>
-          </a:prstGeom>
-          <a:noFill/>
-          <a:ln/>
-        </p:spPr>
-        <p:txBody>
-          <a:bodyPr wrap="square" rtlCol="0" anchor="ctr"/>
+              <a:t>2.66%</a:t>
+            </a:r>
+            <a:endParaRPr lang="en-US" sz="1800" dirty="0"/>
+          </a:p>
+        </p:txBody>
+      </p:sp>
+      <p:sp>
+        <p:nvSpPr>
+          <p:cNvPr id="25" name="Shape 23"/>
+          <p:cNvSpPr/>
+          <p:nvPr/>
+        </p:nvSpPr>
+        <p:spPr>
+          <a:xfrm>
+            <a:off x="502920" y="5897880"/>
+            <a:ext cx="11057839" cy="438912"/>
+          </a:xfrm>
+          <a:prstGeom prst="roundRect">
+            <a:avLst>
+              <a:gd name="adj" fmla="val 12500"/>
+            </a:avLst>
+          </a:prstGeom>
+          <a:solidFill>
+            <a:srgbClr val="E8F4F8"/>
+          </a:solidFill>
+          <a:ln/>
+        </p:spPr>
+      </p:sp>
+      <p:sp>
+        <p:nvSpPr>
+          <p:cNvPr id="26" name="Shape 24"/>
+          <p:cNvSpPr/>
+          <p:nvPr/>
+        </p:nvSpPr>
+        <p:spPr>
+          <a:xfrm>
+            <a:off x="502920" y="5952744"/>
+            <a:ext cx="36576" cy="329184"/>
+          </a:xfrm>
+          <a:prstGeom prst="rect">
+            <a:avLst/>
+          </a:prstGeom>
+          <a:solidFill>
+            <a:srgbClr val="2E6E82"/>
+          </a:solidFill>
+          <a:ln/>
+        </p:spPr>
+      </p:sp>
+      <p:sp>
+        <p:nvSpPr>
+          <p:cNvPr id="27" name="Text 25"/>
+          <p:cNvSpPr/>
+          <p:nvPr/>
+        </p:nvSpPr>
+        <p:spPr>
+          <a:xfrm>
+            <a:off x="649224" y="5989320"/>
+            <a:ext cx="10801807" cy="201168"/>
+          </a:xfrm>
+          <a:prstGeom prst="rect">
+            <a:avLst/>
+          </a:prstGeom>
+          <a:noFill/>
+          <a:ln/>
+        </p:spPr>
+        <p:txBody>
+          <a:bodyPr wrap="square" lIns="0" tIns="0" rIns="0" bIns="0" rtlCol="0" anchor="ctr"/>
           <a:lstStyle/>
           <a:p>
             <a:pPr indent="0" marL="0">
               <a:buNone/>
             </a:pPr>
             <a:r>
-              <a:rPr lang="en-US" sz="1100" dirty="0">
+              <a:rPr lang="en-US" sz="1050" b="1" dirty="0">
                 <a:solidFill>
-                  <a:srgbClr val="5B6B73"/>
+                  <a:srgbClr val="2E6E82"/>
                 </a:solidFill>
                 <a:latin typeface="맑은 고딕" pitchFamily="34" charset="0"/>
                 <a:ea typeface="맑은 고딕" pitchFamily="34" charset="-122"/>
                 <a:cs typeface="맑은 고딕" pitchFamily="34" charset="-120"/>
               </a:rPr>
-              <a:t>매매가</a:t>
-            </a:r>
-            <a:endParaRPr lang="en-US" sz="1100" dirty="0"/>
-          </a:p>
-        </p:txBody>
-      </p:sp>
-      <p:sp>
-        <p:nvSpPr>
-          <p:cNvPr id="33" name="Text 31"/>
-          <p:cNvSpPr/>
-          <p:nvPr/>
-        </p:nvSpPr>
-        <p:spPr>
-          <a:xfrm>
-            <a:off x="9457639" y="4325112"/>
-            <a:ext cx="1828800" cy="402336"/>
-          </a:xfrm>
-          <a:prstGeom prst="rect">
-            <a:avLst/>
-          </a:prstGeom>
-          <a:noFill/>
-          <a:ln/>
-        </p:spPr>
-        <p:txBody>
-          <a:bodyPr wrap="square" rtlCol="0" anchor="ctr"/>
-          <a:lstStyle/>
-          <a:p>
-            <a:pPr algn="r" indent="0" marL="0">
-              <a:buNone/>
+              <a:t>투자 판단 참고</a:t>
+            </a:r>
+            <a:endParaRPr lang="en-US" sz="1050" dirty="0"/>
+          </a:p>
+        </p:txBody>
+      </p:sp>
+      <p:sp>
+        <p:nvSpPr>
+          <p:cNvPr id="28" name="Text 26"/>
+          <p:cNvSpPr/>
+          <p:nvPr/>
+        </p:nvSpPr>
+        <p:spPr>
+          <a:xfrm>
+            <a:off x="649224" y="6190488"/>
+            <a:ext cx="10801807" cy="109728"/>
+          </a:xfrm>
+          <a:prstGeom prst="rect">
+            <a:avLst/>
+          </a:prstGeom>
+          <a:noFill/>
+          <a:ln/>
+        </p:spPr>
+        <p:txBody>
+          <a:bodyPr wrap="square" lIns="0" tIns="0" rIns="0" bIns="0" rtlCol="0" anchor="t"/>
+          <a:lstStyle/>
+          <a:p>
+            <a:pPr marL="342900" indent="-342900">
+              <a:lnSpc>
+                <a:spcPct val="108000"/>
+              </a:lnSpc>
+              <a:buSzPct val="100000"/>
+              <a:buChar char="•"/>
             </a:pPr>
             <a:r>
-              <a:rPr lang="en-US" sz="1200" b="1" dirty="0">
+              <a:rPr lang="en-US" sz="980" dirty="0">
                 <a:solidFill>
-                  <a:srgbClr val="132A3A"/>
-                </a:solidFill>
-                <a:latin typeface="Arial" pitchFamily="34" charset="0"/>
-                <a:ea typeface="Arial" pitchFamily="34" charset="-122"/>
-                <a:cs typeface="Arial" pitchFamily="34" charset="-120"/>
-              </a:rPr>
-              <a:t>250.0억원</a:t>
-            </a:r>
-            <a:endParaRPr lang="en-US" sz="1200" dirty="0"/>
-          </a:p>
-        </p:txBody>
-      </p:sp>
-      <p:sp>
-        <p:nvSpPr>
-          <p:cNvPr id="34" name="Shape 32"/>
-          <p:cNvSpPr/>
-          <p:nvPr/>
-        </p:nvSpPr>
-        <p:spPr>
-          <a:xfrm>
-            <a:off x="6351880" y="4837176"/>
-            <a:ext cx="5026000" cy="594360"/>
-          </a:xfrm>
-          <a:prstGeom prst="roundRect">
-            <a:avLst>
-              <a:gd name="adj" fmla="val 9231"/>
-            </a:avLst>
-          </a:prstGeom>
-          <a:solidFill>
-            <a:srgbClr val="B8860B"/>
-          </a:solidFill>
-          <a:ln/>
-        </p:spPr>
-      </p:sp>
-      <p:sp>
-        <p:nvSpPr>
-          <p:cNvPr id="35" name="Text 33"/>
-          <p:cNvSpPr/>
-          <p:nvPr/>
-        </p:nvSpPr>
-        <p:spPr>
-          <a:xfrm>
-            <a:off x="6534760" y="4837176"/>
-            <a:ext cx="2286000" cy="594360"/>
-          </a:xfrm>
-          <a:prstGeom prst="rect">
-            <a:avLst/>
-          </a:prstGeom>
-          <a:noFill/>
-          <a:ln/>
-        </p:spPr>
-        <p:txBody>
-          <a:bodyPr wrap="square" rtlCol="0" anchor="ctr"/>
-          <a:lstStyle/>
-          <a:p>
-            <a:pPr indent="0" marL="0">
-              <a:buNone/>
-            </a:pPr>
-            <a:r>
-              <a:rPr lang="en-US" sz="1200" b="1" dirty="0">
-                <a:solidFill>
-                  <a:srgbClr val="FFFFFF"/>
+                  <a:srgbClr val="2B2B2B"/>
                 </a:solidFill>
                 <a:latin typeface="맑은 고딕" pitchFamily="34" charset="0"/>
                 <a:ea typeface="맑은 고딕" pitchFamily="34" charset="-122"/>
                 <a:cs typeface="맑은 고딕" pitchFamily="34" charset="-120"/>
               </a:rPr>
-              <a:t>Cap Rate</a:t>
-            </a:r>
-            <a:endParaRPr lang="en-US" sz="1200" dirty="0"/>
-          </a:p>
-        </p:txBody>
-      </p:sp>
-      <p:sp>
-        <p:nvSpPr>
-          <p:cNvPr id="36" name="Text 34"/>
-          <p:cNvSpPr/>
-          <p:nvPr/>
-        </p:nvSpPr>
-        <p:spPr>
-          <a:xfrm>
-            <a:off x="9183319" y="4837176"/>
-            <a:ext cx="2011680" cy="594360"/>
-          </a:xfrm>
-          <a:prstGeom prst="rect">
-            <a:avLst/>
-          </a:prstGeom>
-          <a:noFill/>
-          <a:ln/>
-        </p:spPr>
-        <p:txBody>
-          <a:bodyPr wrap="square" rtlCol="0" anchor="ctr"/>
-          <a:lstStyle/>
-          <a:p>
-            <a:pPr algn="r" indent="0" marL="0">
-              <a:buNone/>
-            </a:pPr>
-            <a:r>
-              <a:rPr lang="en-US" sz="2200" b="1" dirty="0">
-                <a:solidFill>
-                  <a:srgbClr val="FFFFFF"/>
-                </a:solidFill>
-                <a:latin typeface="Arial" pitchFamily="34" charset="0"/>
-                <a:ea typeface="Arial" pitchFamily="34" charset="-122"/>
-                <a:cs typeface="Arial" pitchFamily="34" charset="-120"/>
-              </a:rPr>
-              <a:t>2.75%</a:t>
-            </a:r>
-            <a:endParaRPr lang="en-US" sz="2200" dirty="0"/>
-          </a:p>
-        </p:txBody>
-      </p:sp>
-      <p:sp>
-        <p:nvSpPr>
-          <p:cNvPr id="37" name="Text 35"/>
-          <p:cNvSpPr/>
-          <p:nvPr/>
-        </p:nvSpPr>
-        <p:spPr>
-          <a:xfrm>
-            <a:off x="502920" y="5943600"/>
-            <a:ext cx="11057839" cy="237744"/>
-          </a:xfrm>
-          <a:prstGeom prst="rect">
-            <a:avLst/>
-          </a:prstGeom>
-          <a:noFill/>
-          <a:ln/>
-        </p:spPr>
-        <p:txBody>
-          <a:bodyPr wrap="square" rtlCol="0" anchor="ctr"/>
-          <a:lstStyle/>
-          <a:p>
-            <a:pPr indent="0" marL="0">
-              <a:buNone/>
-            </a:pPr>
-            <a:r>
-              <a:rPr lang="en-US" sz="900" i="1" dirty="0">
-                <a:solidFill>
-                  <a:srgbClr val="5B6B73"/>
-                </a:solidFill>
-                <a:latin typeface="맑은 고딕" pitchFamily="34" charset="0"/>
-                <a:ea typeface="맑은 고딕" pitchFamily="34" charset="-122"/>
-                <a:cs typeface="맑은 고딕" pitchFamily="34" charset="-120"/>
-              </a:rPr>
-              <a:t>가정: 공실층을 인근 동일 용도 시세 수준으로 임대 가정</a:t>
-            </a:r>
-            <a:endParaRPr lang="en-US" sz="900" dirty="0"/>
-          </a:p>
-        </p:txBody>
-      </p:sp>
-      <p:sp>
-        <p:nvSpPr>
-          <p:cNvPr id="38" name="Text 36"/>
+              <a:t>수익률 2.5%는 시장 평균 하회 — 토지가치 상승 또는 리모델링 후 임대료 증대 가능성 검토 필요</a:t>
+            </a:r>
+            <a:endParaRPr lang="en-US" sz="980" dirty="0"/>
+          </a:p>
+        </p:txBody>
+      </p:sp>
+      <p:sp>
+        <p:nvSpPr>
+          <p:cNvPr id="29" name="Text 27"/>
           <p:cNvSpPr/>
           <p:nvPr/>
         </p:nvSpPr>
@@ -18044,7 +18931,7 @@
       </p:sp>
       <p:sp>
         <p:nvSpPr>
-          <p:cNvPr id="39" name="Text 37"/>
+          <p:cNvPr id="30" name="Text 28"/>
           <p:cNvSpPr/>
           <p:nvPr/>
         </p:nvSpPr>
